--- a/docs/tactile_reflex_system.pptx
+++ b/docs/tactile_reflex_system.pptx
@@ -20,9 +20,14 @@
     <p:sldId id="268" r:id="rId14"/>
     <p:sldId id="269" r:id="rId15"/>
     <p:sldId id="270" r:id="rId16"/>
+    <p:sldId id="271" r:id="rId17"/>
+    <p:sldId id="272" r:id="rId18"/>
+    <p:sldId id="273" r:id="rId19"/>
+    <p:sldId id="274" r:id="rId20"/>
+    <p:sldId id="275" r:id="rId21"/>
   </p:sldIdLst>
   <p:notesMasterIdLst>
-    <p:notesMasterId r:id="rId17"/>
+    <p:notesMasterId r:id="rId22"/>
   </p:notesMasterIdLst>
   <p:sldSz cx="9144000" cy="5143500"/>
   <p:notesSz cx="5143500" cy="9144000"/>
@@ -1086,6 +1091,358 @@
 </p:notes>
 </file>
 
+<file path=ppt/notesSlides/notesSlide16.xml><?xml version="1.0" encoding="utf-8"?>
+<p:notes xmlns:a="http://schemas.openxmlformats.org/drawingml/2006/main" xmlns:r="http://schemas.openxmlformats.org/officeDocument/2006/relationships" xmlns:p="http://schemas.openxmlformats.org/presentationml/2006/main">
+  <p:cSld>
+    <p:spTree>
+      <p:nvGrpSpPr>
+        <p:cNvPr id="1" name=""/>
+        <p:cNvGrpSpPr/>
+        <p:nvPr/>
+      </p:nvGrpSpPr>
+      <p:grpSpPr>
+        <a:xfrm>
+          <a:off x="0" y="0"/>
+          <a:ext cx="0" cy="0"/>
+          <a:chOff x="0" y="0"/>
+          <a:chExt cx="0" cy="0"/>
+        </a:xfrm>
+      </p:grpSpPr>
+      <p:sp>
+        <p:nvSpPr>
+          <p:cNvPr id="2" name="Slide Image Placeholder 1"/>
+          <p:cNvSpPr>
+            <a:spLocks noGrp="1" noRot="1" noChangeAspect="1"/>
+          </p:cNvSpPr>
+          <p:nvPr>
+            <p:ph type="sldImg"/>
+          </p:nvPr>
+        </p:nvSpPr>
+        <p:spPr/>
+      </p:sp>
+      <p:sp>
+        <p:nvSpPr>
+          <p:cNvPr id="3" name="Notes Placeholder 2"/>
+          <p:cNvSpPr>
+            <a:spLocks noGrp="1"/>
+          </p:cNvSpPr>
+          <p:nvPr>
+            <p:ph type="body" idx="1"/>
+          </p:nvPr>
+        </p:nvSpPr>
+        <p:spPr/>
+        <p:txBody>
+          <a:bodyPr/>
+          <a:lstStyle/>
+          <a:p>
+            <a:r>
+              <a:rPr lang="en-US" dirty="0"/>
+              <a:t/>
+            </a:r>
+            <a:endParaRPr lang="en-US" dirty="0"/>
+          </a:p>
+        </p:txBody>
+      </p:sp>
+      <p:sp>
+        <p:nvSpPr>
+          <p:cNvPr id="4" name="Slide Number Placeholder 3"/>
+          <p:cNvSpPr>
+            <a:spLocks noGrp="1"/>
+          </p:cNvSpPr>
+          <p:nvPr>
+            <p:ph type="sldNum" sz="quarter" idx="10"/>
+          </p:nvPr>
+        </p:nvSpPr>
+        <p:spPr/>
+        <p:txBody>
+          <a:bodyPr/>
+          <a:lstStyle/>
+          <a:p>
+            <a:fld id="{F7021451-1387-4CA6-816F-3879F97B5CBC}" type="slidenum">
+              <a:rPr lang="en-US"/>
+              <a:t>16</a:t>
+            </a:fld>
+            <a:endParaRPr lang="en-US"/>
+          </a:p>
+        </p:txBody>
+      </p:sp>
+    </p:spTree>
+    <p:extLst>
+      <p:ext uri="{BB962C8B-B14F-4D97-AF65-F5344CB8AC3E}">
+        <p14:creationId xmlns:p14="http://schemas.microsoft.com/office/powerpoint/2010/main" val="1024086991"/>
+      </p:ext>
+    </p:extLst>
+  </p:cSld>
+  <p:clrMapOvr>
+    <a:masterClrMapping/>
+  </p:clrMapOvr>
+</p:notes>
+</file>
+
+<file path=ppt/notesSlides/notesSlide17.xml><?xml version="1.0" encoding="utf-8"?>
+<p:notes xmlns:a="http://schemas.openxmlformats.org/drawingml/2006/main" xmlns:r="http://schemas.openxmlformats.org/officeDocument/2006/relationships" xmlns:p="http://schemas.openxmlformats.org/presentationml/2006/main">
+  <p:cSld>
+    <p:spTree>
+      <p:nvGrpSpPr>
+        <p:cNvPr id="1" name=""/>
+        <p:cNvGrpSpPr/>
+        <p:nvPr/>
+      </p:nvGrpSpPr>
+      <p:grpSpPr>
+        <a:xfrm>
+          <a:off x="0" y="0"/>
+          <a:ext cx="0" cy="0"/>
+          <a:chOff x="0" y="0"/>
+          <a:chExt cx="0" cy="0"/>
+        </a:xfrm>
+      </p:grpSpPr>
+      <p:sp>
+        <p:nvSpPr>
+          <p:cNvPr id="2" name="Slide Image Placeholder 1"/>
+          <p:cNvSpPr>
+            <a:spLocks noGrp="1" noRot="1" noChangeAspect="1"/>
+          </p:cNvSpPr>
+          <p:nvPr>
+            <p:ph type="sldImg"/>
+          </p:nvPr>
+        </p:nvSpPr>
+        <p:spPr/>
+      </p:sp>
+      <p:sp>
+        <p:nvSpPr>
+          <p:cNvPr id="3" name="Notes Placeholder 2"/>
+          <p:cNvSpPr>
+            <a:spLocks noGrp="1"/>
+          </p:cNvSpPr>
+          <p:nvPr>
+            <p:ph type="body" idx="1"/>
+          </p:nvPr>
+        </p:nvSpPr>
+        <p:spPr/>
+        <p:txBody>
+          <a:bodyPr/>
+          <a:lstStyle/>
+          <a:p>
+            <a:r>
+              <a:rPr lang="en-US" dirty="0"/>
+              <a:t/>
+            </a:r>
+            <a:endParaRPr lang="en-US" dirty="0"/>
+          </a:p>
+        </p:txBody>
+      </p:sp>
+      <p:sp>
+        <p:nvSpPr>
+          <p:cNvPr id="4" name="Slide Number Placeholder 3"/>
+          <p:cNvSpPr>
+            <a:spLocks noGrp="1"/>
+          </p:cNvSpPr>
+          <p:nvPr>
+            <p:ph type="sldNum" sz="quarter" idx="10"/>
+          </p:nvPr>
+        </p:nvSpPr>
+        <p:spPr/>
+        <p:txBody>
+          <a:bodyPr/>
+          <a:lstStyle/>
+          <a:p>
+            <a:fld id="{F7021451-1387-4CA6-816F-3879F97B5CBC}" type="slidenum">
+              <a:rPr lang="en-US"/>
+              <a:t>17</a:t>
+            </a:fld>
+            <a:endParaRPr lang="en-US"/>
+          </a:p>
+        </p:txBody>
+      </p:sp>
+    </p:spTree>
+    <p:extLst>
+      <p:ext uri="{BB962C8B-B14F-4D97-AF65-F5344CB8AC3E}">
+        <p14:creationId xmlns:p14="http://schemas.microsoft.com/office/powerpoint/2010/main" val="1024086991"/>
+      </p:ext>
+    </p:extLst>
+  </p:cSld>
+  <p:clrMapOvr>
+    <a:masterClrMapping/>
+  </p:clrMapOvr>
+</p:notes>
+</file>
+
+<file path=ppt/notesSlides/notesSlide18.xml><?xml version="1.0" encoding="utf-8"?>
+<p:notes xmlns:a="http://schemas.openxmlformats.org/drawingml/2006/main" xmlns:r="http://schemas.openxmlformats.org/officeDocument/2006/relationships" xmlns:p="http://schemas.openxmlformats.org/presentationml/2006/main">
+  <p:cSld>
+    <p:spTree>
+      <p:nvGrpSpPr>
+        <p:cNvPr id="1" name=""/>
+        <p:cNvGrpSpPr/>
+        <p:nvPr/>
+      </p:nvGrpSpPr>
+      <p:grpSpPr>
+        <a:xfrm>
+          <a:off x="0" y="0"/>
+          <a:ext cx="0" cy="0"/>
+          <a:chOff x="0" y="0"/>
+          <a:chExt cx="0" cy="0"/>
+        </a:xfrm>
+      </p:grpSpPr>
+      <p:sp>
+        <p:nvSpPr>
+          <p:cNvPr id="2" name="Slide Image Placeholder 1"/>
+          <p:cNvSpPr>
+            <a:spLocks noGrp="1" noRot="1" noChangeAspect="1"/>
+          </p:cNvSpPr>
+          <p:nvPr>
+            <p:ph type="sldImg"/>
+          </p:nvPr>
+        </p:nvSpPr>
+        <p:spPr/>
+      </p:sp>
+      <p:sp>
+        <p:nvSpPr>
+          <p:cNvPr id="3" name="Notes Placeholder 2"/>
+          <p:cNvSpPr>
+            <a:spLocks noGrp="1"/>
+          </p:cNvSpPr>
+          <p:nvPr>
+            <p:ph type="body" idx="1"/>
+          </p:nvPr>
+        </p:nvSpPr>
+        <p:spPr/>
+        <p:txBody>
+          <a:bodyPr/>
+          <a:lstStyle/>
+          <a:p>
+            <a:r>
+              <a:rPr lang="en-US" dirty="0"/>
+              <a:t/>
+            </a:r>
+            <a:endParaRPr lang="en-US" dirty="0"/>
+          </a:p>
+        </p:txBody>
+      </p:sp>
+      <p:sp>
+        <p:nvSpPr>
+          <p:cNvPr id="4" name="Slide Number Placeholder 3"/>
+          <p:cNvSpPr>
+            <a:spLocks noGrp="1"/>
+          </p:cNvSpPr>
+          <p:nvPr>
+            <p:ph type="sldNum" sz="quarter" idx="10"/>
+          </p:nvPr>
+        </p:nvSpPr>
+        <p:spPr/>
+        <p:txBody>
+          <a:bodyPr/>
+          <a:lstStyle/>
+          <a:p>
+            <a:fld id="{F7021451-1387-4CA6-816F-3879F97B5CBC}" type="slidenum">
+              <a:rPr lang="en-US"/>
+              <a:t>18</a:t>
+            </a:fld>
+            <a:endParaRPr lang="en-US"/>
+          </a:p>
+        </p:txBody>
+      </p:sp>
+    </p:spTree>
+    <p:extLst>
+      <p:ext uri="{BB962C8B-B14F-4D97-AF65-F5344CB8AC3E}">
+        <p14:creationId xmlns:p14="http://schemas.microsoft.com/office/powerpoint/2010/main" val="1024086991"/>
+      </p:ext>
+    </p:extLst>
+  </p:cSld>
+  <p:clrMapOvr>
+    <a:masterClrMapping/>
+  </p:clrMapOvr>
+</p:notes>
+</file>
+
+<file path=ppt/notesSlides/notesSlide19.xml><?xml version="1.0" encoding="utf-8"?>
+<p:notes xmlns:a="http://schemas.openxmlformats.org/drawingml/2006/main" xmlns:r="http://schemas.openxmlformats.org/officeDocument/2006/relationships" xmlns:p="http://schemas.openxmlformats.org/presentationml/2006/main">
+  <p:cSld>
+    <p:spTree>
+      <p:nvGrpSpPr>
+        <p:cNvPr id="1" name=""/>
+        <p:cNvGrpSpPr/>
+        <p:nvPr/>
+      </p:nvGrpSpPr>
+      <p:grpSpPr>
+        <a:xfrm>
+          <a:off x="0" y="0"/>
+          <a:ext cx="0" cy="0"/>
+          <a:chOff x="0" y="0"/>
+          <a:chExt cx="0" cy="0"/>
+        </a:xfrm>
+      </p:grpSpPr>
+      <p:sp>
+        <p:nvSpPr>
+          <p:cNvPr id="2" name="Slide Image Placeholder 1"/>
+          <p:cNvSpPr>
+            <a:spLocks noGrp="1" noRot="1" noChangeAspect="1"/>
+          </p:cNvSpPr>
+          <p:nvPr>
+            <p:ph type="sldImg"/>
+          </p:nvPr>
+        </p:nvSpPr>
+        <p:spPr/>
+      </p:sp>
+      <p:sp>
+        <p:nvSpPr>
+          <p:cNvPr id="3" name="Notes Placeholder 2"/>
+          <p:cNvSpPr>
+            <a:spLocks noGrp="1"/>
+          </p:cNvSpPr>
+          <p:nvPr>
+            <p:ph type="body" idx="1"/>
+          </p:nvPr>
+        </p:nvSpPr>
+        <p:spPr/>
+        <p:txBody>
+          <a:bodyPr/>
+          <a:lstStyle/>
+          <a:p>
+            <a:r>
+              <a:rPr lang="en-US" dirty="0"/>
+              <a:t/>
+            </a:r>
+            <a:endParaRPr lang="en-US" dirty="0"/>
+          </a:p>
+        </p:txBody>
+      </p:sp>
+      <p:sp>
+        <p:nvSpPr>
+          <p:cNvPr id="4" name="Slide Number Placeholder 3"/>
+          <p:cNvSpPr>
+            <a:spLocks noGrp="1"/>
+          </p:cNvSpPr>
+          <p:nvPr>
+            <p:ph type="sldNum" sz="quarter" idx="10"/>
+          </p:nvPr>
+        </p:nvSpPr>
+        <p:spPr/>
+        <p:txBody>
+          <a:bodyPr/>
+          <a:lstStyle/>
+          <a:p>
+            <a:fld id="{F7021451-1387-4CA6-816F-3879F97B5CBC}" type="slidenum">
+              <a:rPr lang="en-US"/>
+              <a:t>19</a:t>
+            </a:fld>
+            <a:endParaRPr lang="en-US"/>
+          </a:p>
+        </p:txBody>
+      </p:sp>
+    </p:spTree>
+    <p:extLst>
+      <p:ext uri="{BB962C8B-B14F-4D97-AF65-F5344CB8AC3E}">
+        <p14:creationId xmlns:p14="http://schemas.microsoft.com/office/powerpoint/2010/main" val="1024086991"/>
+      </p:ext>
+    </p:extLst>
+  </p:cSld>
+  <p:clrMapOvr>
+    <a:masterClrMapping/>
+  </p:clrMapOvr>
+</p:notes>
+</file>
+
 <file path=ppt/notesSlides/notesSlide2.xml><?xml version="1.0" encoding="utf-8"?>
 <p:notes xmlns:a="http://schemas.openxmlformats.org/drawingml/2006/main" xmlns:r="http://schemas.openxmlformats.org/officeDocument/2006/relationships" xmlns:p="http://schemas.openxmlformats.org/presentationml/2006/main">
   <p:cSld>
@@ -1156,6 +1513,94 @@
             <a:fld id="{F7021451-1387-4CA6-816F-3879F97B5CBC}" type="slidenum">
               <a:rPr lang="en-US"/>
               <a:t>2</a:t>
+            </a:fld>
+            <a:endParaRPr lang="en-US"/>
+          </a:p>
+        </p:txBody>
+      </p:sp>
+    </p:spTree>
+    <p:extLst>
+      <p:ext uri="{BB962C8B-B14F-4D97-AF65-F5344CB8AC3E}">
+        <p14:creationId xmlns:p14="http://schemas.microsoft.com/office/powerpoint/2010/main" val="1024086991"/>
+      </p:ext>
+    </p:extLst>
+  </p:cSld>
+  <p:clrMapOvr>
+    <a:masterClrMapping/>
+  </p:clrMapOvr>
+</p:notes>
+</file>
+
+<file path=ppt/notesSlides/notesSlide20.xml><?xml version="1.0" encoding="utf-8"?>
+<p:notes xmlns:a="http://schemas.openxmlformats.org/drawingml/2006/main" xmlns:r="http://schemas.openxmlformats.org/officeDocument/2006/relationships" xmlns:p="http://schemas.openxmlformats.org/presentationml/2006/main">
+  <p:cSld>
+    <p:spTree>
+      <p:nvGrpSpPr>
+        <p:cNvPr id="1" name=""/>
+        <p:cNvGrpSpPr/>
+        <p:nvPr/>
+      </p:nvGrpSpPr>
+      <p:grpSpPr>
+        <a:xfrm>
+          <a:off x="0" y="0"/>
+          <a:ext cx="0" cy="0"/>
+          <a:chOff x="0" y="0"/>
+          <a:chExt cx="0" cy="0"/>
+        </a:xfrm>
+      </p:grpSpPr>
+      <p:sp>
+        <p:nvSpPr>
+          <p:cNvPr id="2" name="Slide Image Placeholder 1"/>
+          <p:cNvSpPr>
+            <a:spLocks noGrp="1" noRot="1" noChangeAspect="1"/>
+          </p:cNvSpPr>
+          <p:nvPr>
+            <p:ph type="sldImg"/>
+          </p:nvPr>
+        </p:nvSpPr>
+        <p:spPr/>
+      </p:sp>
+      <p:sp>
+        <p:nvSpPr>
+          <p:cNvPr id="3" name="Notes Placeholder 2"/>
+          <p:cNvSpPr>
+            <a:spLocks noGrp="1"/>
+          </p:cNvSpPr>
+          <p:nvPr>
+            <p:ph type="body" idx="1"/>
+          </p:nvPr>
+        </p:nvSpPr>
+        <p:spPr/>
+        <p:txBody>
+          <a:bodyPr/>
+          <a:lstStyle/>
+          <a:p>
+            <a:r>
+              <a:rPr lang="en-US" dirty="0"/>
+              <a:t/>
+            </a:r>
+            <a:endParaRPr lang="en-US" dirty="0"/>
+          </a:p>
+        </p:txBody>
+      </p:sp>
+      <p:sp>
+        <p:nvSpPr>
+          <p:cNvPr id="4" name="Slide Number Placeholder 3"/>
+          <p:cNvSpPr>
+            <a:spLocks noGrp="1"/>
+          </p:cNvSpPr>
+          <p:nvPr>
+            <p:ph type="sldNum" sz="quarter" idx="10"/>
+          </p:nvPr>
+        </p:nvSpPr>
+        <p:spPr/>
+        <p:txBody>
+          <a:bodyPr/>
+          <a:lstStyle/>
+          <a:p>
+            <a:fld id="{F7021451-1387-4CA6-816F-3879F97B5CBC}" type="slidenum">
+              <a:rPr lang="en-US"/>
+              <a:t>20</a:t>
             </a:fld>
             <a:endParaRPr lang="en-US"/>
           </a:p>
@@ -2556,26 +3001,281 @@
                   <a:schemeClr val="tx2"/>
                 </a:solidFill>
               </a:rPr>
-              <a:t>AI/ML evaluation</a:t>
+              <a:t>Simulation console output</a:t>
             </a:r>
             <a:endParaRPr lang="en-US" sz="3600" dirty="0"/>
           </a:p>
         </p:txBody>
       </p:sp>
-      <p:sp>
-        <p:nvSpPr>
-          <p:cNvPr id="3" name="Shape 1"/>
+      <p:pic>
+        <p:nvPicPr>
+          <p:cNvPr id="3" name="Image 0" descr="Console output of run_all.sh showing all testbenches passing">    </p:cNvPr>
+          <p:cNvPicPr>
+            <a:picLocks noChangeAspect="1"/>
+          </p:cNvPicPr>
+          <p:nvPr/>
+        </p:nvPicPr>
+        <p:blipFill>
+          <a:blip r:embed="rId1"/>
+          <a:stretch>
+            <a:fillRect/>
+          </a:stretch>
+        </p:blipFill>
+        <p:spPr>
+          <a:xfrm>
+            <a:off x="457200" y="1097280"/>
+            <a:ext cx="8229600" cy="3566160"/>
+          </a:xfrm>
+          <a:prstGeom prst="rect">
+            <a:avLst/>
+          </a:prstGeom>
+        </p:spPr>
+      </p:pic>
+      <p:sp>
+        <p:nvSpPr>
+          <p:cNvPr id="25" name="Slide Number Placeholder 0"/>
+          <p:cNvSpPr>
+            <a:spLocks noGrp="1"/>
+          </p:cNvSpPr>
+          <p:nvPr>
+            <p:ph type="sldNum" sz="quarter" idx="4294967295"/>
+          </p:nvPr>
+        </p:nvSpPr>
+        <p:spPr>
+          <a:xfrm>
+            <a:off x="8321040" y="4754880"/>
+            <a:ext cx="457200" cy="274320"/>
+          </a:xfrm>
+          <a:prstGeom prst="rect">
+            <a:avLst/>
+          </a:prstGeom>
+          <a:extLst>
+            <a:ext uri="{C572A759-6A51-4108-AA02-DFA0A04FC94B}">
+              <ma14:wrappingTextBoxFlag xmlns:ma14="http://schemas.microsoft.com/office/mac/drawingml/2011/main" val="0"/>
+            </a:ext>
+          </a:extLst>
+        </p:spPr>
+        <p:txBody>
+          <a:bodyPr/>
+          <a:lstStyle>
+            <a:lvl1pPr>
+              <a:defRPr sz="1000">
+                <a:solidFill>
+                  <a:schemeClr val="accent5"/>
+                </a:solidFill>
+              </a:defRPr>
+            </a:lvl1pPr>
+          </a:lstStyle>
+          <a:p>
+            <a:pPr algn="l"/>
+            <a:fld id="{F7021451-1387-4CA6-816F-3879F97B5CBC}" type="slidenum">
+              <a:rPr b="0" lang="en-US"/>
+              <a:t>10</a:t>
+            </a:fld>
+            <a:endParaRPr lang="en-US"/>
+          </a:p>
+        </p:txBody>
+      </p:sp>
+    </p:spTree>
+  </p:cSld>
+  <p:clrMapOvr>
+    <a:masterClrMapping/>
+  </p:clrMapOvr>
+</p:sld>
+</file>
+
+<file path=ppt/slides/slide11.xml><?xml version="1.0" encoding="utf-8"?>
+<p:sld xmlns:a="http://schemas.openxmlformats.org/drawingml/2006/main" xmlns:r="http://schemas.openxmlformats.org/officeDocument/2006/relationships" xmlns:p="http://schemas.openxmlformats.org/presentationml/2006/main">
+  <p:cSld name="Slide 11">
+    <p:spTree>
+      <p:nvGrpSpPr>
+        <p:cNvPr id="1" name=""/>
+        <p:cNvGrpSpPr/>
+        <p:nvPr/>
+      </p:nvGrpSpPr>
+      <p:grpSpPr>
+        <a:xfrm>
+          <a:off x="0" y="0"/>
+          <a:ext cx="0" cy="0"/>
+          <a:chOff x="0" y="0"/>
+          <a:chExt cx="0" cy="0"/>
+        </a:xfrm>
+      </p:grpSpPr>
+      <p:sp>
+        <p:nvSpPr>
+          <p:cNvPr id="2" name="Text 0"/>
           <p:cNvSpPr/>
-          <p:nvPr/>
-        </p:nvSpPr>
-        <p:spPr>
-          <a:xfrm>
-            <a:off x="6858000" y="411480"/>
-            <a:ext cx="1828800" cy="365760"/>
+          <p:nvPr>
+            <p:ph idx="100" type="title" hasCustomPrompt="1"/>
+          </p:nvPr>
+        </p:nvSpPr>
+        <p:spPr>
+          <a:xfrm>
+            <a:off x="457200" y="274320"/>
+            <a:ext cx="8229600" cy="731520"/>
+          </a:xfrm>
+          <a:prstGeom prst="rect">
+            <a:avLst/>
+          </a:prstGeom>
+          <a:noFill/>
+          <a:ln/>
+        </p:spPr>
+        <p:txBody>
+          <a:bodyPr wrap="square" lIns="0" tIns="0" rIns="0" bIns="0" rtlCol="0" anchor="ctr"/>
+          <a:lstStyle/>
+          <a:p>
+            <a:pPr algn="l" indent="0" marL="0">
+              <a:buNone/>
+            </a:pPr>
+            <a:r>
+              <a:rPr lang="en-US" sz="3600" b="1" dirty="0">
+                <a:solidFill>
+                  <a:schemeClr val="tx2"/>
+                </a:solidFill>
+              </a:rPr>
+              <a:t>AI overridden by the Governor</a:t>
+            </a:r>
+            <a:endParaRPr lang="en-US" sz="3600" dirty="0"/>
+          </a:p>
+        </p:txBody>
+      </p:sp>
+      <p:pic>
+        <p:nvPicPr>
+          <p:cNvPr id="3" name="Image 0" descr="Waveform: force exceeds FORCE_MAX while AI class stays 2; safe_state rises and pwm_out falls">    </p:cNvPr>
+          <p:cNvPicPr>
+            <a:picLocks noChangeAspect="1"/>
+          </p:cNvPicPr>
+          <p:nvPr/>
+        </p:nvPicPr>
+        <p:blipFill>
+          <a:blip r:embed="rId1"/>
+          <a:stretch>
+            <a:fillRect/>
+          </a:stretch>
+        </p:blipFill>
+        <p:spPr>
+          <a:xfrm>
+            <a:off x="457200" y="1097280"/>
+            <a:ext cx="4937760" cy="3401568"/>
+          </a:xfrm>
+          <a:prstGeom prst="rect">
+            <a:avLst/>
+          </a:prstGeom>
+        </p:spPr>
+      </p:pic>
+      <p:sp>
+        <p:nvSpPr>
+          <p:cNvPr id="4" name="card AI says class 2"/>
+          <p:cNvSpPr/>
+          <p:nvPr/>
+        </p:nvSpPr>
+        <p:spPr>
+          <a:xfrm>
+            <a:off x="5577840" y="1188720"/>
+            <a:ext cx="3108960" cy="1051560"/>
           </a:xfrm>
           <a:prstGeom prst="roundRect">
             <a:avLst>
-              <a:gd name="adj" fmla="val 25000"/>
+              <a:gd name="adj" fmla="val 6957"/>
+            </a:avLst>
+          </a:prstGeom>
+          <a:solidFill>
+            <a:schemeClr val="bg2"/>
+          </a:solidFill>
+          <a:ln w="12700">
+            <a:solidFill>
+              <a:schemeClr val="bg2"/>
+            </a:solidFill>
+            <a:prstDash val="solid"/>
+          </a:ln>
+        </p:spPr>
+      </p:sp>
+      <p:sp>
+        <p:nvSpPr>
+          <p:cNvPr id="5" name="Text 2"/>
+          <p:cNvSpPr txBox="1"/>
+          <p:nvPr/>
+        </p:nvSpPr>
+        <p:spPr>
+          <a:xfrm>
+            <a:off x="5715000" y="1298448"/>
+            <a:ext cx="2834640" cy="320040"/>
+          </a:xfrm>
+          <a:prstGeom prst="rect">
+            <a:avLst/>
+          </a:prstGeom>
+          <a:noFill/>
+          <a:ln/>
+        </p:spPr>
+        <p:txBody>
+          <a:bodyPr wrap="square" lIns="0" tIns="0" rIns="0" bIns="0" rtlCol="0" anchor="t"/>
+          <a:lstStyle/>
+          <a:p>
+            <a:pPr indent="0" marL="0">
+              <a:buNone/>
+            </a:pPr>
+            <a:r>
+              <a:rPr lang="en-US" sz="1400" b="1" dirty="0">
+                <a:solidFill>
+                  <a:schemeClr val="tx2"/>
+                </a:solidFill>
+              </a:rPr>
+              <a:t>AI says class 2</a:t>
+            </a:r>
+            <a:endParaRPr lang="en-US" sz="1400" dirty="0"/>
+          </a:p>
+        </p:txBody>
+      </p:sp>
+      <p:sp>
+        <p:nvSpPr>
+          <p:cNvPr id="6" name="Text 3"/>
+          <p:cNvSpPr txBox="1"/>
+          <p:nvPr/>
+        </p:nvSpPr>
+        <p:spPr>
+          <a:xfrm>
+            <a:off x="5715000" y="1645920"/>
+            <a:ext cx="2834640" cy="502920"/>
+          </a:xfrm>
+          <a:prstGeom prst="rect">
+            <a:avLst/>
+          </a:prstGeom>
+          <a:noFill/>
+          <a:ln/>
+        </p:spPr>
+        <p:txBody>
+          <a:bodyPr wrap="square" lIns="0" tIns="0" rIns="0" bIns="0" rtlCol="0" anchor="t"/>
+          <a:lstStyle/>
+          <a:p>
+            <a:pPr indent="0" marL="0">
+              <a:buNone/>
+            </a:pPr>
+            <a:r>
+              <a:rPr lang="en-US" sz="1400" dirty="0">
+                <a:solidFill>
+                  <a:schemeClr val="tx1"/>
+                </a:solidFill>
+              </a:rPr>
+              <a:t>Normal grip, valid, steady.</a:t>
+            </a:r>
+            <a:endParaRPr lang="en-US" sz="1400" dirty="0"/>
+          </a:p>
+        </p:txBody>
+      </p:sp>
+      <p:sp>
+        <p:nvSpPr>
+          <p:cNvPr id="7" name="card Force passes FORCE_MAX"/>
+          <p:cNvSpPr/>
+          <p:nvPr/>
+        </p:nvSpPr>
+        <p:spPr>
+          <a:xfrm>
+            <a:off x="5577840" y="2377440"/>
+            <a:ext cx="3108960" cy="1051560"/>
+          </a:xfrm>
+          <a:prstGeom prst="roundRect">
+            <a:avLst>
+              <a:gd name="adj" fmla="val 6957"/>
             </a:avLst>
           </a:prstGeom>
           <a:solidFill>
@@ -2591,14 +3291,293 @@
       </p:sp>
       <p:sp>
         <p:nvSpPr>
-          <p:cNvPr id="4" name="Text 2"/>
+          <p:cNvPr id="8" name="Text 5"/>
           <p:cNvSpPr txBox="1"/>
           <p:nvPr/>
         </p:nvSpPr>
         <p:spPr>
           <a:xfrm>
-            <a:off x="6858000" y="411480"/>
-            <a:ext cx="1828800" cy="365760"/>
+            <a:off x="5715000" y="2487168"/>
+            <a:ext cx="2834640" cy="320040"/>
+          </a:xfrm>
+          <a:prstGeom prst="rect">
+            <a:avLst/>
+          </a:prstGeom>
+          <a:noFill/>
+          <a:ln/>
+        </p:spPr>
+        <p:txBody>
+          <a:bodyPr wrap="square" lIns="0" tIns="0" rIns="0" bIns="0" rtlCol="0" anchor="t"/>
+          <a:lstStyle/>
+          <a:p>
+            <a:pPr indent="0" marL="0">
+              <a:buNone/>
+            </a:pPr>
+            <a:r>
+              <a:rPr lang="en-US" sz="1400" b="1" dirty="0">
+                <a:solidFill>
+                  <a:schemeClr val="tx2"/>
+                </a:solidFill>
+              </a:rPr>
+              <a:t>Force passes FORCE_MAX</a:t>
+            </a:r>
+            <a:endParaRPr lang="en-US" sz="1400" dirty="0"/>
+          </a:p>
+        </p:txBody>
+      </p:sp>
+      <p:sp>
+        <p:nvSpPr>
+          <p:cNvPr id="9" name="Text 6"/>
+          <p:cNvSpPr txBox="1"/>
+          <p:nvPr/>
+        </p:nvSpPr>
+        <p:spPr>
+          <a:xfrm>
+            <a:off x="5715000" y="2834640"/>
+            <a:ext cx="2834640" cy="502920"/>
+          </a:xfrm>
+          <a:prstGeom prst="rect">
+            <a:avLst/>
+          </a:prstGeom>
+          <a:noFill/>
+          <a:ln/>
+        </p:spPr>
+        <p:txBody>
+          <a:bodyPr wrap="square" lIns="0" tIns="0" rIns="0" bIns="0" rtlCol="0" anchor="t"/>
+          <a:lstStyle/>
+          <a:p>
+            <a:pPr indent="0" marL="0">
+              <a:buNone/>
+            </a:pPr>
+            <a:r>
+              <a:rPr lang="en-US" sz="1400" dirty="0">
+                <a:solidFill>
+                  <a:schemeClr val="tx1"/>
+                </a:solidFill>
+              </a:rPr>
+              <a:t>Governor trips the safe state.</a:t>
+            </a:r>
+            <a:endParaRPr lang="en-US" sz="1400" dirty="0"/>
+          </a:p>
+        </p:txBody>
+      </p:sp>
+      <p:sp>
+        <p:nvSpPr>
+          <p:cNvPr id="10" name="card PWM goes low"/>
+          <p:cNvSpPr/>
+          <p:nvPr/>
+        </p:nvSpPr>
+        <p:spPr>
+          <a:xfrm>
+            <a:off x="5577840" y="3566160"/>
+            <a:ext cx="3108960" cy="914400"/>
+          </a:xfrm>
+          <a:prstGeom prst="roundRect">
+            <a:avLst>
+              <a:gd name="adj" fmla="val 8000"/>
+            </a:avLst>
+          </a:prstGeom>
+          <a:solidFill>
+            <a:schemeClr val="bg2"/>
+          </a:solidFill>
+          <a:ln w="12700">
+            <a:solidFill>
+              <a:schemeClr val="bg2"/>
+            </a:solidFill>
+            <a:prstDash val="solid"/>
+          </a:ln>
+        </p:spPr>
+      </p:sp>
+      <p:sp>
+        <p:nvSpPr>
+          <p:cNvPr id="11" name="Text 8"/>
+          <p:cNvSpPr txBox="1"/>
+          <p:nvPr/>
+        </p:nvSpPr>
+        <p:spPr>
+          <a:xfrm>
+            <a:off x="5715000" y="3675888"/>
+            <a:ext cx="2834640" cy="320040"/>
+          </a:xfrm>
+          <a:prstGeom prst="rect">
+            <a:avLst/>
+          </a:prstGeom>
+          <a:noFill/>
+          <a:ln/>
+        </p:spPr>
+        <p:txBody>
+          <a:bodyPr wrap="square" lIns="0" tIns="0" rIns="0" bIns="0" rtlCol="0" anchor="t"/>
+          <a:lstStyle/>
+          <a:p>
+            <a:pPr indent="0" marL="0">
+              <a:buNone/>
+            </a:pPr>
+            <a:r>
+              <a:rPr lang="en-US" sz="1400" b="1" dirty="0">
+                <a:solidFill>
+                  <a:schemeClr val="tx2"/>
+                </a:solidFill>
+              </a:rPr>
+              <a:t>PWM goes low</a:t>
+            </a:r>
+            <a:endParaRPr lang="en-US" sz="1400" dirty="0"/>
+          </a:p>
+        </p:txBody>
+      </p:sp>
+      <p:sp>
+        <p:nvSpPr>
+          <p:cNvPr id="12" name="Text 9"/>
+          <p:cNvSpPr txBox="1"/>
+          <p:nvPr/>
+        </p:nvSpPr>
+        <p:spPr>
+          <a:xfrm>
+            <a:off x="5715000" y="4023360"/>
+            <a:ext cx="2834640" cy="365760"/>
+          </a:xfrm>
+          <a:prstGeom prst="rect">
+            <a:avLst/>
+          </a:prstGeom>
+          <a:noFill/>
+          <a:ln/>
+        </p:spPr>
+        <p:txBody>
+          <a:bodyPr wrap="square" lIns="0" tIns="0" rIns="0" bIns="0" rtlCol="0" anchor="t"/>
+          <a:lstStyle/>
+          <a:p>
+            <a:pPr indent="0" marL="0">
+              <a:buNone/>
+            </a:pPr>
+            <a:r>
+              <a:rPr lang="en-US" sz="1400" dirty="0">
+                <a:solidFill>
+                  <a:schemeClr val="tx1"/>
+                </a:solidFill>
+              </a:rPr>
+              <a:t>AI input ignored.</a:t>
+            </a:r>
+            <a:endParaRPr lang="en-US" sz="1400" dirty="0"/>
+          </a:p>
+        </p:txBody>
+      </p:sp>
+      <p:sp>
+        <p:nvSpPr>
+          <p:cNvPr id="13" name="Text 10"/>
+          <p:cNvSpPr txBox="1"/>
+          <p:nvPr/>
+        </p:nvSpPr>
+        <p:spPr>
+          <a:xfrm>
+            <a:off x="457200" y="4553712"/>
+            <a:ext cx="4937760" cy="228600"/>
+          </a:xfrm>
+          <a:prstGeom prst="rect">
+            <a:avLst/>
+          </a:prstGeom>
+          <a:noFill/>
+          <a:ln/>
+        </p:spPr>
+        <p:txBody>
+          <a:bodyPr wrap="square" lIns="0" tIns="0" rIns="0" bIns="0" rtlCol="0" anchor="t"/>
+          <a:lstStyle/>
+          <a:p>
+            <a:pPr indent="0" marL="0">
+              <a:buNone/>
+            </a:pPr>
+            <a:r>
+              <a:rPr lang="en-US" sz="1000" dirty="0">
+                <a:solidFill>
+                  <a:schemeClr val="accent5"/>
+                </a:solidFill>
+              </a:rPr>
+              <a:t>RTL simulation, 100 MHz clock</a:t>
+            </a:r>
+            <a:endParaRPr lang="en-US" sz="1000" dirty="0"/>
+          </a:p>
+        </p:txBody>
+      </p:sp>
+      <p:sp>
+        <p:nvSpPr>
+          <p:cNvPr id="25" name="Slide Number Placeholder 0"/>
+          <p:cNvSpPr>
+            <a:spLocks noGrp="1"/>
+          </p:cNvSpPr>
+          <p:nvPr>
+            <p:ph type="sldNum" sz="quarter" idx="4294967295"/>
+          </p:nvPr>
+        </p:nvSpPr>
+        <p:spPr>
+          <a:xfrm>
+            <a:off x="8321040" y="4754880"/>
+            <a:ext cx="457200" cy="274320"/>
+          </a:xfrm>
+          <a:prstGeom prst="rect">
+            <a:avLst/>
+          </a:prstGeom>
+          <a:extLst>
+            <a:ext uri="{C572A759-6A51-4108-AA02-DFA0A04FC94B}">
+              <ma14:wrappingTextBoxFlag xmlns:ma14="http://schemas.microsoft.com/office/mac/drawingml/2011/main" val="0"/>
+            </a:ext>
+          </a:extLst>
+        </p:spPr>
+        <p:txBody>
+          <a:bodyPr/>
+          <a:lstStyle>
+            <a:lvl1pPr>
+              <a:defRPr sz="1000">
+                <a:solidFill>
+                  <a:schemeClr val="accent5"/>
+                </a:solidFill>
+              </a:defRPr>
+            </a:lvl1pPr>
+          </a:lstStyle>
+          <a:p>
+            <a:pPr algn="l"/>
+            <a:fld id="{F7021451-1387-4CA6-816F-3879F97B5CBC}" type="slidenum">
+              <a:rPr b="0" lang="en-US"/>
+              <a:t>11</a:t>
+            </a:fld>
+            <a:endParaRPr lang="en-US"/>
+          </a:p>
+        </p:txBody>
+      </p:sp>
+    </p:spTree>
+  </p:cSld>
+  <p:clrMapOvr>
+    <a:masterClrMapping/>
+  </p:clrMapOvr>
+</p:sld>
+</file>
+
+<file path=ppt/slides/slide12.xml><?xml version="1.0" encoding="utf-8"?>
+<p:sld xmlns:a="http://schemas.openxmlformats.org/drawingml/2006/main" xmlns:r="http://schemas.openxmlformats.org/officeDocument/2006/relationships" xmlns:p="http://schemas.openxmlformats.org/presentationml/2006/main">
+  <p:cSld name="Slide 12">
+    <p:spTree>
+      <p:nvGrpSpPr>
+        <p:cNvPr id="1" name=""/>
+        <p:cNvGrpSpPr/>
+        <p:nvPr/>
+      </p:nvGrpSpPr>
+      <p:grpSpPr>
+        <a:xfrm>
+          <a:off x="0" y="0"/>
+          <a:ext cx="0" cy="0"/>
+          <a:chOff x="0" y="0"/>
+          <a:chExt cx="0" cy="0"/>
+        </a:xfrm>
+      </p:grpSpPr>
+      <p:sp>
+        <p:nvSpPr>
+          <p:cNvPr id="2" name="Text 0"/>
+          <p:cNvSpPr/>
+          <p:nvPr>
+            <p:ph idx="100" type="title" hasCustomPrompt="1"/>
+          </p:nvPr>
+        </p:nvSpPr>
+        <p:spPr>
+          <a:xfrm>
+            <a:off x="457200" y="274320"/>
+            <a:ext cx="8229600" cy="731520"/>
           </a:xfrm>
           <a:prstGeom prst="rect">
             <a:avLst/>
@@ -2610,24 +3589,24 @@
           <a:bodyPr wrap="square" lIns="0" tIns="0" rIns="0" bIns="0" rtlCol="0" anchor="ctr"/>
           <a:lstStyle/>
           <a:p>
-            <a:pPr algn="ctr" indent="0" marL="0">
+            <a:pPr algn="l" indent="0" marL="0">
               <a:buNone/>
             </a:pPr>
             <a:r>
-              <a:rPr lang="en-US" sz="1200" b="1" dirty="0">
-                <a:solidFill>
-                  <a:schemeClr val="tx1"/>
-                </a:solidFill>
-              </a:rPr>
-              <a:t>SIMULATED DATA</a:t>
-            </a:r>
-            <a:endParaRPr lang="en-US" sz="1200" dirty="0"/>
+              <a:rPr lang="en-US" sz="3600" b="1" dirty="0">
+                <a:solidFill>
+                  <a:schemeClr val="tx2"/>
+                </a:solidFill>
+              </a:rPr>
+              <a:t>Emergency stop response</a:t>
+            </a:r>
+            <a:endParaRPr lang="en-US" sz="3600" dirty="0"/>
           </a:p>
         </p:txBody>
       </p:sp>
       <p:pic>
         <p:nvPicPr>
-          <p:cNvPr id="5" name="Image 0" descr="Confusion matrix on the simulated test set">    </p:cNvPr>
+          <p:cNvPr id="3" name="Image 0" descr="Waveform: e-stop asserted, safe_state rises and pwm_out falls within 5 clock cycles">    </p:cNvPr>
           <p:cNvPicPr>
             <a:picLocks noChangeAspect="1"/>
           </p:cNvPicPr>
@@ -2642,6 +3621,1785 @@
         <p:spPr>
           <a:xfrm>
             <a:off x="457200" y="1097280"/>
+            <a:ext cx="4937760" cy="3401568"/>
+          </a:xfrm>
+          <a:prstGeom prst="rect">
+            <a:avLst/>
+          </a:prstGeom>
+        </p:spPr>
+      </p:pic>
+      <p:sp>
+        <p:nvSpPr>
+          <p:cNvPr id="4" name="card E-stop asserted"/>
+          <p:cNvSpPr/>
+          <p:nvPr/>
+        </p:nvSpPr>
+        <p:spPr>
+          <a:xfrm>
+            <a:off x="5577840" y="1188720"/>
+            <a:ext cx="3108960" cy="1051560"/>
+          </a:xfrm>
+          <a:prstGeom prst="roundRect">
+            <a:avLst>
+              <a:gd name="adj" fmla="val 6957"/>
+            </a:avLst>
+          </a:prstGeom>
+          <a:solidFill>
+            <a:schemeClr val="bg2"/>
+          </a:solidFill>
+          <a:ln w="12700">
+            <a:solidFill>
+              <a:schemeClr val="bg2"/>
+            </a:solidFill>
+            <a:prstDash val="solid"/>
+          </a:ln>
+        </p:spPr>
+      </p:sp>
+      <p:sp>
+        <p:nvSpPr>
+          <p:cNvPr id="5" name="Text 2"/>
+          <p:cNvSpPr txBox="1"/>
+          <p:nvPr/>
+        </p:nvSpPr>
+        <p:spPr>
+          <a:xfrm>
+            <a:off x="5715000" y="1298448"/>
+            <a:ext cx="2834640" cy="320040"/>
+          </a:xfrm>
+          <a:prstGeom prst="rect">
+            <a:avLst/>
+          </a:prstGeom>
+          <a:noFill/>
+          <a:ln/>
+        </p:spPr>
+        <p:txBody>
+          <a:bodyPr wrap="square" lIns="0" tIns="0" rIns="0" bIns="0" rtlCol="0" anchor="t"/>
+          <a:lstStyle/>
+          <a:p>
+            <a:pPr indent="0" marL="0">
+              <a:buNone/>
+            </a:pPr>
+            <a:r>
+              <a:rPr lang="en-US" sz="1400" b="1" dirty="0">
+                <a:solidFill>
+                  <a:schemeClr val="tx2"/>
+                </a:solidFill>
+              </a:rPr>
+              <a:t>E-stop asserted</a:t>
+            </a:r>
+            <a:endParaRPr lang="en-US" sz="1400" dirty="0"/>
+          </a:p>
+        </p:txBody>
+      </p:sp>
+      <p:sp>
+        <p:nvSpPr>
+          <p:cNvPr id="6" name="Text 3"/>
+          <p:cNvSpPr txBox="1"/>
+          <p:nvPr/>
+        </p:nvSpPr>
+        <p:spPr>
+          <a:xfrm>
+            <a:off x="5715000" y="1645920"/>
+            <a:ext cx="2834640" cy="502920"/>
+          </a:xfrm>
+          <a:prstGeom prst="rect">
+            <a:avLst/>
+          </a:prstGeom>
+          <a:noFill/>
+          <a:ln/>
+        </p:spPr>
+        <p:txBody>
+          <a:bodyPr wrap="square" lIns="0" tIns="0" rIns="0" bIns="0" rtlCol="0" anchor="t"/>
+          <a:lstStyle/>
+          <a:p>
+            <a:pPr indent="0" marL="0">
+              <a:buNone/>
+            </a:pPr>
+            <a:r>
+              <a:rPr lang="en-US" sz="1400" dirty="0">
+                <a:solidFill>
+                  <a:schemeClr val="tx1"/>
+                </a:solidFill>
+              </a:rPr>
+              <a:t>Input synchronised, then latched.</a:t>
+            </a:r>
+            <a:endParaRPr lang="en-US" sz="1400" dirty="0"/>
+          </a:p>
+        </p:txBody>
+      </p:sp>
+      <p:sp>
+        <p:nvSpPr>
+          <p:cNvPr id="7" name="card 5 clock cycles"/>
+          <p:cNvSpPr/>
+          <p:nvPr/>
+        </p:nvSpPr>
+        <p:spPr>
+          <a:xfrm>
+            <a:off x="5577840" y="2377440"/>
+            <a:ext cx="3108960" cy="1051560"/>
+          </a:xfrm>
+          <a:prstGeom prst="roundRect">
+            <a:avLst>
+              <a:gd name="adj" fmla="val 6957"/>
+            </a:avLst>
+          </a:prstGeom>
+          <a:solidFill>
+            <a:schemeClr val="accent2"/>
+          </a:solidFill>
+          <a:ln w="12700">
+            <a:solidFill>
+              <a:schemeClr val="accent2"/>
+            </a:solidFill>
+            <a:prstDash val="solid"/>
+          </a:ln>
+        </p:spPr>
+      </p:sp>
+      <p:sp>
+        <p:nvSpPr>
+          <p:cNvPr id="8" name="Text 5"/>
+          <p:cNvSpPr txBox="1"/>
+          <p:nvPr/>
+        </p:nvSpPr>
+        <p:spPr>
+          <a:xfrm>
+            <a:off x="5715000" y="2487168"/>
+            <a:ext cx="2834640" cy="320040"/>
+          </a:xfrm>
+          <a:prstGeom prst="rect">
+            <a:avLst/>
+          </a:prstGeom>
+          <a:noFill/>
+          <a:ln/>
+        </p:spPr>
+        <p:txBody>
+          <a:bodyPr wrap="square" lIns="0" tIns="0" rIns="0" bIns="0" rtlCol="0" anchor="t"/>
+          <a:lstStyle/>
+          <a:p>
+            <a:pPr indent="0" marL="0">
+              <a:buNone/>
+            </a:pPr>
+            <a:r>
+              <a:rPr lang="en-US" sz="1400" b="1" dirty="0">
+                <a:solidFill>
+                  <a:schemeClr val="tx2"/>
+                </a:solidFill>
+              </a:rPr>
+              <a:t>5 clock cycles</a:t>
+            </a:r>
+            <a:endParaRPr lang="en-US" sz="1400" dirty="0"/>
+          </a:p>
+        </p:txBody>
+      </p:sp>
+      <p:sp>
+        <p:nvSpPr>
+          <p:cNvPr id="9" name="Text 6"/>
+          <p:cNvSpPr txBox="1"/>
+          <p:nvPr/>
+        </p:nvSpPr>
+        <p:spPr>
+          <a:xfrm>
+            <a:off x="5715000" y="2834640"/>
+            <a:ext cx="2834640" cy="502920"/>
+          </a:xfrm>
+          <a:prstGeom prst="rect">
+            <a:avLst/>
+          </a:prstGeom>
+          <a:noFill/>
+          <a:ln/>
+        </p:spPr>
+        <p:txBody>
+          <a:bodyPr wrap="square" lIns="0" tIns="0" rIns="0" bIns="0" rtlCol="0" anchor="t"/>
+          <a:lstStyle/>
+          <a:p>
+            <a:pPr indent="0" marL="0">
+              <a:buNone/>
+            </a:pPr>
+            <a:r>
+              <a:rPr lang="en-US" sz="1400" dirty="0">
+                <a:solidFill>
+                  <a:schemeClr val="tx1"/>
+                </a:solidFill>
+              </a:rPr>
+              <a:t>From input edge to PWM low.</a:t>
+            </a:r>
+            <a:endParaRPr lang="en-US" sz="1400" dirty="0"/>
+          </a:p>
+        </p:txBody>
+      </p:sp>
+      <p:sp>
+        <p:nvSpPr>
+          <p:cNvPr id="10" name="card Latched"/>
+          <p:cNvSpPr/>
+          <p:nvPr/>
+        </p:nvSpPr>
+        <p:spPr>
+          <a:xfrm>
+            <a:off x="5577840" y="3566160"/>
+            <a:ext cx="3108960" cy="914400"/>
+          </a:xfrm>
+          <a:prstGeom prst="roundRect">
+            <a:avLst>
+              <a:gd name="adj" fmla="val 8000"/>
+            </a:avLst>
+          </a:prstGeom>
+          <a:solidFill>
+            <a:schemeClr val="bg2"/>
+          </a:solidFill>
+          <a:ln w="12700">
+            <a:solidFill>
+              <a:schemeClr val="bg2"/>
+            </a:solidFill>
+            <a:prstDash val="solid"/>
+          </a:ln>
+        </p:spPr>
+      </p:sp>
+      <p:sp>
+        <p:nvSpPr>
+          <p:cNvPr id="11" name="Text 8"/>
+          <p:cNvSpPr txBox="1"/>
+          <p:nvPr/>
+        </p:nvSpPr>
+        <p:spPr>
+          <a:xfrm>
+            <a:off x="5715000" y="3675888"/>
+            <a:ext cx="2834640" cy="320040"/>
+          </a:xfrm>
+          <a:prstGeom prst="rect">
+            <a:avLst/>
+          </a:prstGeom>
+          <a:noFill/>
+          <a:ln/>
+        </p:spPr>
+        <p:txBody>
+          <a:bodyPr wrap="square" lIns="0" tIns="0" rIns="0" bIns="0" rtlCol="0" anchor="t"/>
+          <a:lstStyle/>
+          <a:p>
+            <a:pPr indent="0" marL="0">
+              <a:buNone/>
+            </a:pPr>
+            <a:r>
+              <a:rPr lang="en-US" sz="1400" b="1" dirty="0">
+                <a:solidFill>
+                  <a:schemeClr val="tx2"/>
+                </a:solidFill>
+              </a:rPr>
+              <a:t>Latched</a:t>
+            </a:r>
+            <a:endParaRPr lang="en-US" sz="1400" dirty="0"/>
+          </a:p>
+        </p:txBody>
+      </p:sp>
+      <p:sp>
+        <p:nvSpPr>
+          <p:cNvPr id="12" name="Text 9"/>
+          <p:cNvSpPr txBox="1"/>
+          <p:nvPr/>
+        </p:nvSpPr>
+        <p:spPr>
+          <a:xfrm>
+            <a:off x="5715000" y="4023360"/>
+            <a:ext cx="2834640" cy="365760"/>
+          </a:xfrm>
+          <a:prstGeom prst="rect">
+            <a:avLst/>
+          </a:prstGeom>
+          <a:noFill/>
+          <a:ln/>
+        </p:spPr>
+        <p:txBody>
+          <a:bodyPr wrap="square" lIns="0" tIns="0" rIns="0" bIns="0" rtlCol="0" anchor="t"/>
+          <a:lstStyle/>
+          <a:p>
+            <a:pPr indent="0" marL="0">
+              <a:buNone/>
+            </a:pPr>
+            <a:r>
+              <a:rPr lang="en-US" sz="1400" dirty="0">
+                <a:solidFill>
+                  <a:schemeClr val="tx1"/>
+                </a:solidFill>
+              </a:rPr>
+              <a:t>Cleared only by operator.</a:t>
+            </a:r>
+            <a:endParaRPr lang="en-US" sz="1400" dirty="0"/>
+          </a:p>
+        </p:txBody>
+      </p:sp>
+      <p:sp>
+        <p:nvSpPr>
+          <p:cNvPr id="13" name="Text 10"/>
+          <p:cNvSpPr txBox="1"/>
+          <p:nvPr/>
+        </p:nvSpPr>
+        <p:spPr>
+          <a:xfrm>
+            <a:off x="457200" y="4553712"/>
+            <a:ext cx="4937760" cy="228600"/>
+          </a:xfrm>
+          <a:prstGeom prst="rect">
+            <a:avLst/>
+          </a:prstGeom>
+          <a:noFill/>
+          <a:ln/>
+        </p:spPr>
+        <p:txBody>
+          <a:bodyPr wrap="square" lIns="0" tIns="0" rIns="0" bIns="0" rtlCol="0" anchor="t"/>
+          <a:lstStyle/>
+          <a:p>
+            <a:pPr indent="0" marL="0">
+              <a:buNone/>
+            </a:pPr>
+            <a:r>
+              <a:rPr lang="en-US" sz="1000" dirty="0">
+                <a:solidFill>
+                  <a:schemeClr val="accent5"/>
+                </a:solidFill>
+              </a:rPr>
+              <a:t>RTL simulation, 100 MHz clock</a:t>
+            </a:r>
+            <a:endParaRPr lang="en-US" sz="1000" dirty="0"/>
+          </a:p>
+        </p:txBody>
+      </p:sp>
+      <p:sp>
+        <p:nvSpPr>
+          <p:cNvPr id="25" name="Slide Number Placeholder 0"/>
+          <p:cNvSpPr>
+            <a:spLocks noGrp="1"/>
+          </p:cNvSpPr>
+          <p:nvPr>
+            <p:ph type="sldNum" sz="quarter" idx="4294967295"/>
+          </p:nvPr>
+        </p:nvSpPr>
+        <p:spPr>
+          <a:xfrm>
+            <a:off x="8321040" y="4754880"/>
+            <a:ext cx="457200" cy="274320"/>
+          </a:xfrm>
+          <a:prstGeom prst="rect">
+            <a:avLst/>
+          </a:prstGeom>
+          <a:extLst>
+            <a:ext uri="{C572A759-6A51-4108-AA02-DFA0A04FC94B}">
+              <ma14:wrappingTextBoxFlag xmlns:ma14="http://schemas.microsoft.com/office/mac/drawingml/2011/main" val="0"/>
+            </a:ext>
+          </a:extLst>
+        </p:spPr>
+        <p:txBody>
+          <a:bodyPr/>
+          <a:lstStyle>
+            <a:lvl1pPr>
+              <a:defRPr sz="1000">
+                <a:solidFill>
+                  <a:schemeClr val="accent5"/>
+                </a:solidFill>
+              </a:defRPr>
+            </a:lvl1pPr>
+          </a:lstStyle>
+          <a:p>
+            <a:pPr algn="l"/>
+            <a:fld id="{F7021451-1387-4CA6-816F-3879F97B5CBC}" type="slidenum">
+              <a:rPr b="0" lang="en-US"/>
+              <a:t>12</a:t>
+            </a:fld>
+            <a:endParaRPr lang="en-US"/>
+          </a:p>
+        </p:txBody>
+      </p:sp>
+    </p:spTree>
+  </p:cSld>
+  <p:clrMapOvr>
+    <a:masterClrMapping/>
+  </p:clrMapOvr>
+</p:sld>
+</file>
+
+<file path=ppt/slides/slide13.xml><?xml version="1.0" encoding="utf-8"?>
+<p:sld xmlns:a="http://schemas.openxmlformats.org/drawingml/2006/main" xmlns:r="http://schemas.openxmlformats.org/officeDocument/2006/relationships" xmlns:p="http://schemas.openxmlformats.org/presentationml/2006/main">
+  <p:cSld name="Slide 13">
+    <p:spTree>
+      <p:nvGrpSpPr>
+        <p:cNvPr id="1" name=""/>
+        <p:cNvGrpSpPr/>
+        <p:nvPr/>
+      </p:nvGrpSpPr>
+      <p:grpSpPr>
+        <a:xfrm>
+          <a:off x="0" y="0"/>
+          <a:ext cx="0" cy="0"/>
+          <a:chOff x="0" y="0"/>
+          <a:chExt cx="0" cy="0"/>
+        </a:xfrm>
+      </p:grpSpPr>
+      <p:sp>
+        <p:nvSpPr>
+          <p:cNvPr id="2" name="Text 0"/>
+          <p:cNvSpPr/>
+          <p:nvPr>
+            <p:ph idx="100" type="title" hasCustomPrompt="1"/>
+          </p:nvPr>
+        </p:nvSpPr>
+        <p:spPr>
+          <a:xfrm>
+            <a:off x="457200" y="274320"/>
+            <a:ext cx="8229600" cy="731520"/>
+          </a:xfrm>
+          <a:prstGeom prst="rect">
+            <a:avLst/>
+          </a:prstGeom>
+          <a:noFill/>
+          <a:ln/>
+        </p:spPr>
+        <p:txBody>
+          <a:bodyPr wrap="square" lIns="0" tIns="0" rIns="0" bIns="0" rtlCol="0" anchor="ctr"/>
+          <a:lstStyle/>
+          <a:p>
+            <a:pPr algn="l" indent="0" marL="0">
+              <a:buNone/>
+            </a:pPr>
+            <a:r>
+              <a:rPr lang="en-US" sz="3600" b="1" dirty="0">
+                <a:solidFill>
+                  <a:schemeClr val="tx2"/>
+                </a:solidFill>
+              </a:rPr>
+              <a:t>FPGA path latency</a:t>
+            </a:r>
+            <a:endParaRPr lang="en-US" sz="3600" dirty="0"/>
+          </a:p>
+        </p:txBody>
+      </p:sp>
+      <p:sp>
+        <p:nvSpPr>
+          <p:cNvPr id="3" name="Shape 1"/>
+          <p:cNvSpPr/>
+          <p:nvPr/>
+        </p:nvSpPr>
+        <p:spPr>
+          <a:xfrm>
+            <a:off x="457200" y="1188720"/>
+            <a:ext cx="4023360" cy="1463040"/>
+          </a:xfrm>
+          <a:prstGeom prst="roundRect">
+            <a:avLst>
+              <a:gd name="adj" fmla="val 5000"/>
+            </a:avLst>
+          </a:prstGeom>
+          <a:solidFill>
+            <a:schemeClr val="bg2"/>
+          </a:solidFill>
+          <a:ln w="12700">
+            <a:solidFill>
+              <a:schemeClr val="bg2"/>
+            </a:solidFill>
+            <a:prstDash val="solid"/>
+          </a:ln>
+        </p:spPr>
+      </p:sp>
+      <p:sp>
+        <p:nvSpPr>
+          <p:cNvPr id="4" name="Text 2"/>
+          <p:cNvSpPr txBox="1"/>
+          <p:nvPr/>
+        </p:nvSpPr>
+        <p:spPr>
+          <a:xfrm>
+            <a:off x="594360" y="1280160"/>
+            <a:ext cx="3749040" cy="640080"/>
+          </a:xfrm>
+          <a:prstGeom prst="rect">
+            <a:avLst/>
+          </a:prstGeom>
+          <a:noFill/>
+          <a:ln/>
+        </p:spPr>
+        <p:txBody>
+          <a:bodyPr wrap="square" lIns="0" tIns="0" rIns="0" bIns="0" rtlCol="0" anchor="t"/>
+          <a:lstStyle/>
+          <a:p>
+            <a:pPr indent="0" marL="0">
+              <a:buNone/>
+            </a:pPr>
+            <a:r>
+              <a:rPr lang="en-US" sz="3200" b="1" dirty="0">
+                <a:solidFill>
+                  <a:schemeClr val="accent1"/>
+                </a:solidFill>
+              </a:rPr>
+              <a:t>40 ns</a:t>
+            </a:r>
+            <a:endParaRPr lang="en-US" sz="3200" dirty="0"/>
+          </a:p>
+        </p:txBody>
+      </p:sp>
+      <p:sp>
+        <p:nvSpPr>
+          <p:cNvPr id="5" name="Text 3"/>
+          <p:cNvSpPr txBox="1"/>
+          <p:nvPr/>
+        </p:nvSpPr>
+        <p:spPr>
+          <a:xfrm>
+            <a:off x="594360" y="1965960"/>
+            <a:ext cx="3749040" cy="594360"/>
+          </a:xfrm>
+          <a:prstGeom prst="rect">
+            <a:avLst/>
+          </a:prstGeom>
+          <a:noFill/>
+          <a:ln/>
+        </p:spPr>
+        <p:txBody>
+          <a:bodyPr wrap="square" lIns="0" tIns="0" rIns="0" bIns="0" rtlCol="0" anchor="t"/>
+          <a:lstStyle/>
+          <a:p>
+            <a:pPr indent="0" marL="0">
+              <a:buNone/>
+            </a:pPr>
+            <a:r>
+              <a:rPr lang="en-US" sz="1400" dirty="0">
+                <a:solidFill>
+                  <a:schemeClr val="tx1"/>
+                </a:solidFill>
+              </a:rPr>
+              <a:t>ADC sample to PWM low: 4 clock cycles, jitter 0</a:t>
+            </a:r>
+            <a:endParaRPr lang="en-US" sz="1400" dirty="0"/>
+          </a:p>
+        </p:txBody>
+      </p:sp>
+      <p:sp>
+        <p:nvSpPr>
+          <p:cNvPr id="6" name="Shape 4"/>
+          <p:cNvSpPr/>
+          <p:nvPr/>
+        </p:nvSpPr>
+        <p:spPr>
+          <a:xfrm>
+            <a:off x="4663440" y="1188720"/>
+            <a:ext cx="4023360" cy="1463040"/>
+          </a:xfrm>
+          <a:prstGeom prst="roundRect">
+            <a:avLst>
+              <a:gd name="adj" fmla="val 5000"/>
+            </a:avLst>
+          </a:prstGeom>
+          <a:solidFill>
+            <a:schemeClr val="bg2"/>
+          </a:solidFill>
+          <a:ln w="12700">
+            <a:solidFill>
+              <a:schemeClr val="bg2"/>
+            </a:solidFill>
+            <a:prstDash val="solid"/>
+          </a:ln>
+        </p:spPr>
+      </p:sp>
+      <p:sp>
+        <p:nvSpPr>
+          <p:cNvPr id="7" name="Text 5"/>
+          <p:cNvSpPr txBox="1"/>
+          <p:nvPr/>
+        </p:nvSpPr>
+        <p:spPr>
+          <a:xfrm>
+            <a:off x="4800600" y="1280160"/>
+            <a:ext cx="3749040" cy="640080"/>
+          </a:xfrm>
+          <a:prstGeom prst="rect">
+            <a:avLst/>
+          </a:prstGeom>
+          <a:noFill/>
+          <a:ln/>
+        </p:spPr>
+        <p:txBody>
+          <a:bodyPr wrap="square" lIns="0" tIns="0" rIns="0" bIns="0" rtlCol="0" anchor="t"/>
+          <a:lstStyle/>
+          <a:p>
+            <a:pPr indent="0" marL="0">
+              <a:buNone/>
+            </a:pPr>
+            <a:r>
+              <a:rPr lang="en-US" sz="3200" b="1" dirty="0">
+                <a:solidFill>
+                  <a:schemeClr val="accent1"/>
+                </a:solidFill>
+              </a:rPr>
+              <a:t>50 ns</a:t>
+            </a:r>
+            <a:endParaRPr lang="en-US" sz="3200" dirty="0"/>
+          </a:p>
+        </p:txBody>
+      </p:sp>
+      <p:sp>
+        <p:nvSpPr>
+          <p:cNvPr id="8" name="Text 6"/>
+          <p:cNvSpPr txBox="1"/>
+          <p:nvPr/>
+        </p:nvSpPr>
+        <p:spPr>
+          <a:xfrm>
+            <a:off x="4800600" y="1965960"/>
+            <a:ext cx="3749040" cy="594360"/>
+          </a:xfrm>
+          <a:prstGeom prst="rect">
+            <a:avLst/>
+          </a:prstGeom>
+          <a:noFill/>
+          <a:ln/>
+        </p:spPr>
+        <p:txBody>
+          <a:bodyPr wrap="square" lIns="0" tIns="0" rIns="0" bIns="0" rtlCol="0" anchor="t"/>
+          <a:lstStyle/>
+          <a:p>
+            <a:pPr indent="0" marL="0">
+              <a:buNone/>
+            </a:pPr>
+            <a:r>
+              <a:rPr lang="en-US" sz="1400" dirty="0">
+                <a:solidFill>
+                  <a:schemeClr val="tx1"/>
+                </a:solidFill>
+              </a:rPr>
+              <a:t>E-stop input to PWM low: 5 clock cycles, jitter 0</a:t>
+            </a:r>
+            <a:endParaRPr lang="en-US" sz="1400" dirty="0"/>
+          </a:p>
+        </p:txBody>
+      </p:sp>
+      <p:sp>
+        <p:nvSpPr>
+          <p:cNvPr id="9" name="Shape 7"/>
+          <p:cNvSpPr/>
+          <p:nvPr/>
+        </p:nvSpPr>
+        <p:spPr>
+          <a:xfrm>
+            <a:off x="457200" y="2788920"/>
+            <a:ext cx="4023360" cy="1463040"/>
+          </a:xfrm>
+          <a:prstGeom prst="roundRect">
+            <a:avLst>
+              <a:gd name="adj" fmla="val 5000"/>
+            </a:avLst>
+          </a:prstGeom>
+          <a:solidFill>
+            <a:schemeClr val="accent1"/>
+          </a:solidFill>
+          <a:ln w="12700">
+            <a:solidFill>
+              <a:schemeClr val="accent1"/>
+            </a:solidFill>
+            <a:prstDash val="solid"/>
+          </a:ln>
+        </p:spPr>
+      </p:sp>
+      <p:sp>
+        <p:nvSpPr>
+          <p:cNvPr id="10" name="Text 8"/>
+          <p:cNvSpPr txBox="1"/>
+          <p:nvPr/>
+        </p:nvSpPr>
+        <p:spPr>
+          <a:xfrm>
+            <a:off x="594360" y="2880360"/>
+            <a:ext cx="3749040" cy="640080"/>
+          </a:xfrm>
+          <a:prstGeom prst="rect">
+            <a:avLst/>
+          </a:prstGeom>
+          <a:noFill/>
+          <a:ln/>
+        </p:spPr>
+        <p:txBody>
+          <a:bodyPr wrap="square" lIns="0" tIns="0" rIns="0" bIns="0" rtlCol="0" anchor="t"/>
+          <a:lstStyle/>
+          <a:p>
+            <a:pPr indent="0" marL="0">
+              <a:buNone/>
+            </a:pPr>
+            <a:r>
+              <a:rPr lang="en-US" sz="3200" b="1" dirty="0">
+                <a:solidFill>
+                  <a:schemeClr val="bg1"/>
+                </a:solidFill>
+              </a:rPr>
+              <a:t>1.68 us</a:t>
+            </a:r>
+            <a:endParaRPr lang="en-US" sz="3200" dirty="0"/>
+          </a:p>
+        </p:txBody>
+      </p:sp>
+      <p:sp>
+        <p:nvSpPr>
+          <p:cNvPr id="11" name="Text 9"/>
+          <p:cNvSpPr txBox="1"/>
+          <p:nvPr/>
+        </p:nvSpPr>
+        <p:spPr>
+          <a:xfrm>
+            <a:off x="594360" y="3566160"/>
+            <a:ext cx="3749040" cy="594360"/>
+          </a:xfrm>
+          <a:prstGeom prst="rect">
+            <a:avLst/>
+          </a:prstGeom>
+          <a:noFill/>
+          <a:ln/>
+        </p:spPr>
+        <p:txBody>
+          <a:bodyPr wrap="square" lIns="0" tIns="0" rIns="0" bIns="0" rtlCol="0" anchor="t"/>
+          <a:lstStyle/>
+          <a:p>
+            <a:pPr indent="0" marL="0">
+              <a:buNone/>
+            </a:pPr>
+            <a:r>
+              <a:rPr lang="en-US" sz="1400" dirty="0">
+                <a:solidFill>
+                  <a:schemeClr val="bg1"/>
+                </a:solidFill>
+              </a:rPr>
+              <a:t>ADC frame time: 168 cycles at 10 MHz SCLK</a:t>
+            </a:r>
+            <a:endParaRPr lang="en-US" sz="1400" dirty="0"/>
+          </a:p>
+        </p:txBody>
+      </p:sp>
+      <p:sp>
+        <p:nvSpPr>
+          <p:cNvPr id="12" name="Shape 10"/>
+          <p:cNvSpPr/>
+          <p:nvPr/>
+        </p:nvSpPr>
+        <p:spPr>
+          <a:xfrm>
+            <a:off x="4663440" y="2788920"/>
+            <a:ext cx="4023360" cy="1463040"/>
+          </a:xfrm>
+          <a:prstGeom prst="roundRect">
+            <a:avLst>
+              <a:gd name="adj" fmla="val 5000"/>
+            </a:avLst>
+          </a:prstGeom>
+          <a:solidFill>
+            <a:schemeClr val="accent1"/>
+          </a:solidFill>
+          <a:ln w="12700">
+            <a:solidFill>
+              <a:schemeClr val="accent1"/>
+            </a:solidFill>
+            <a:prstDash val="solid"/>
+          </a:ln>
+        </p:spPr>
+      </p:sp>
+      <p:sp>
+        <p:nvSpPr>
+          <p:cNvPr id="13" name="Text 11"/>
+          <p:cNvSpPr txBox="1"/>
+          <p:nvPr/>
+        </p:nvSpPr>
+        <p:spPr>
+          <a:xfrm>
+            <a:off x="4800600" y="2880360"/>
+            <a:ext cx="3749040" cy="640080"/>
+          </a:xfrm>
+          <a:prstGeom prst="rect">
+            <a:avLst/>
+          </a:prstGeom>
+          <a:noFill/>
+          <a:ln/>
+        </p:spPr>
+        <p:txBody>
+          <a:bodyPr wrap="square" lIns="0" tIns="0" rIns="0" bIns="0" rtlCol="0" anchor="t"/>
+          <a:lstStyle/>
+          <a:p>
+            <a:pPr indent="0" marL="0">
+              <a:buNone/>
+            </a:pPr>
+            <a:r>
+              <a:rPr lang="en-US" sz="2800" b="1" dirty="0">
+                <a:solidFill>
+                  <a:schemeClr val="bg1"/>
+                </a:solidFill>
+              </a:rPr>
+              <a:t>1.65 - 3.20 us</a:t>
+            </a:r>
+            <a:endParaRPr lang="en-US" sz="2800" dirty="0"/>
+          </a:p>
+        </p:txBody>
+      </p:sp>
+      <p:sp>
+        <p:nvSpPr>
+          <p:cNvPr id="14" name="Text 12"/>
+          <p:cNvSpPr txBox="1"/>
+          <p:nvPr/>
+        </p:nvSpPr>
+        <p:spPr>
+          <a:xfrm>
+            <a:off x="4800600" y="3566160"/>
+            <a:ext cx="3749040" cy="594360"/>
+          </a:xfrm>
+          <a:prstGeom prst="rect">
+            <a:avLst/>
+          </a:prstGeom>
+          <a:noFill/>
+          <a:ln/>
+        </p:spPr>
+        <p:txBody>
+          <a:bodyPr wrap="square" lIns="0" tIns="0" rIns="0" bIns="0" rtlCol="0" anchor="t"/>
+          <a:lstStyle/>
+          <a:p>
+            <a:pPr indent="0" marL="0">
+              <a:buNone/>
+            </a:pPr>
+            <a:r>
+              <a:rPr lang="en-US" sz="1400" dirty="0">
+                <a:solidFill>
+                  <a:schemeClr val="bg1"/>
+                </a:solidFill>
+              </a:rPr>
+              <a:t>Input change to PWM low; jitter 1.55 us from ADC frame phase</a:t>
+            </a:r>
+            <a:endParaRPr lang="en-US" sz="1400" dirty="0"/>
+          </a:p>
+        </p:txBody>
+      </p:sp>
+      <p:sp>
+        <p:nvSpPr>
+          <p:cNvPr id="15" name="Text 13"/>
+          <p:cNvSpPr txBox="1"/>
+          <p:nvPr/>
+        </p:nvSpPr>
+        <p:spPr>
+          <a:xfrm>
+            <a:off x="457200" y="4389120"/>
+            <a:ext cx="8229600" cy="274320"/>
+          </a:xfrm>
+          <a:prstGeom prst="rect">
+            <a:avLst/>
+          </a:prstGeom>
+          <a:noFill/>
+          <a:ln/>
+        </p:spPr>
+        <p:txBody>
+          <a:bodyPr wrap="square" lIns="0" tIns="0" rIns="0" bIns="0" rtlCol="0" anchor="t"/>
+          <a:lstStyle/>
+          <a:p>
+            <a:pPr indent="0" marL="0">
+              <a:buNone/>
+            </a:pPr>
+            <a:r>
+              <a:rPr lang="en-US" sz="1200" dirty="0">
+                <a:solidFill>
+                  <a:schemeClr val="accent5"/>
+                </a:solidFill>
+              </a:rPr>
+              <a:t>RTL simulation, 100 MHz clock, behavioural ADC model. T_FPGA is reported separately from T_ML.</a:t>
+            </a:r>
+            <a:endParaRPr lang="en-US" sz="1200" dirty="0"/>
+          </a:p>
+        </p:txBody>
+      </p:sp>
+      <p:sp>
+        <p:nvSpPr>
+          <p:cNvPr id="25" name="Slide Number Placeholder 0"/>
+          <p:cNvSpPr>
+            <a:spLocks noGrp="1"/>
+          </p:cNvSpPr>
+          <p:nvPr>
+            <p:ph type="sldNum" sz="quarter" idx="4294967295"/>
+          </p:nvPr>
+        </p:nvSpPr>
+        <p:spPr>
+          <a:xfrm>
+            <a:off x="8321040" y="4754880"/>
+            <a:ext cx="457200" cy="274320"/>
+          </a:xfrm>
+          <a:prstGeom prst="rect">
+            <a:avLst/>
+          </a:prstGeom>
+          <a:extLst>
+            <a:ext uri="{C572A759-6A51-4108-AA02-DFA0A04FC94B}">
+              <ma14:wrappingTextBoxFlag xmlns:ma14="http://schemas.microsoft.com/office/mac/drawingml/2011/main" val="0"/>
+            </a:ext>
+          </a:extLst>
+        </p:spPr>
+        <p:txBody>
+          <a:bodyPr/>
+          <a:lstStyle>
+            <a:lvl1pPr>
+              <a:defRPr sz="1000">
+                <a:solidFill>
+                  <a:schemeClr val="accent5"/>
+                </a:solidFill>
+              </a:defRPr>
+            </a:lvl1pPr>
+          </a:lstStyle>
+          <a:p>
+            <a:pPr algn="l"/>
+            <a:fld id="{F7021451-1387-4CA6-816F-3879F97B5CBC}" type="slidenum">
+              <a:rPr b="0" lang="en-US"/>
+              <a:t>13</a:t>
+            </a:fld>
+            <a:endParaRPr lang="en-US"/>
+          </a:p>
+        </p:txBody>
+      </p:sp>
+    </p:spTree>
+  </p:cSld>
+  <p:clrMapOvr>
+    <a:masterClrMapping/>
+  </p:clrMapOvr>
+</p:sld>
+</file>
+
+<file path=ppt/slides/slide14.xml><?xml version="1.0" encoding="utf-8"?>
+<p:sld xmlns:a="http://schemas.openxmlformats.org/drawingml/2006/main" xmlns:r="http://schemas.openxmlformats.org/officeDocument/2006/relationships" xmlns:p="http://schemas.openxmlformats.org/presentationml/2006/main">
+  <p:cSld name="Slide 14">
+    <p:spTree>
+      <p:nvGrpSpPr>
+        <p:cNvPr id="1" name=""/>
+        <p:cNvGrpSpPr/>
+        <p:nvPr/>
+      </p:nvGrpSpPr>
+      <p:grpSpPr>
+        <a:xfrm>
+          <a:off x="0" y="0"/>
+          <a:ext cx="0" cy="0"/>
+          <a:chOff x="0" y="0"/>
+          <a:chExt cx="0" cy="0"/>
+        </a:xfrm>
+      </p:grpSpPr>
+      <p:sp>
+        <p:nvSpPr>
+          <p:cNvPr id="2" name="Text 0"/>
+          <p:cNvSpPr/>
+          <p:nvPr>
+            <p:ph idx="100" type="title" hasCustomPrompt="1"/>
+          </p:nvPr>
+        </p:nvSpPr>
+        <p:spPr>
+          <a:xfrm>
+            <a:off x="457200" y="274320"/>
+            <a:ext cx="8229600" cy="731520"/>
+          </a:xfrm>
+          <a:prstGeom prst="rect">
+            <a:avLst/>
+          </a:prstGeom>
+          <a:noFill/>
+          <a:ln/>
+        </p:spPr>
+        <p:txBody>
+          <a:bodyPr wrap="square" lIns="0" tIns="0" rIns="0" bIns="0" rtlCol="0" anchor="ctr"/>
+          <a:lstStyle/>
+          <a:p>
+            <a:pPr algn="l" indent="0" marL="0">
+              <a:buNone/>
+            </a:pPr>
+            <a:r>
+              <a:rPr lang="en-US" sz="3600" b="1" dirty="0">
+                <a:solidFill>
+                  <a:schemeClr val="tx2"/>
+                </a:solidFill>
+              </a:rPr>
+              <a:t>Lightweight AI/ML model</a:t>
+            </a:r>
+            <a:endParaRPr lang="en-US" sz="3600" dirty="0"/>
+          </a:p>
+        </p:txBody>
+      </p:sp>
+      <p:sp>
+        <p:nvSpPr>
+          <p:cNvPr id="3" name="Shape 1"/>
+          <p:cNvSpPr/>
+          <p:nvPr/>
+        </p:nvSpPr>
+        <p:spPr>
+          <a:xfrm>
+            <a:off x="6858000" y="411480"/>
+            <a:ext cx="1828800" cy="365760"/>
+          </a:xfrm>
+          <a:prstGeom prst="roundRect">
+            <a:avLst>
+              <a:gd name="adj" fmla="val 25000"/>
+            </a:avLst>
+          </a:prstGeom>
+          <a:solidFill>
+            <a:schemeClr val="accent2"/>
+          </a:solidFill>
+          <a:ln w="12700">
+            <a:solidFill>
+              <a:schemeClr val="accent2"/>
+            </a:solidFill>
+            <a:prstDash val="solid"/>
+          </a:ln>
+        </p:spPr>
+      </p:sp>
+      <p:sp>
+        <p:nvSpPr>
+          <p:cNvPr id="4" name="Text 2"/>
+          <p:cNvSpPr txBox="1"/>
+          <p:nvPr/>
+        </p:nvSpPr>
+        <p:spPr>
+          <a:xfrm>
+            <a:off x="6858000" y="411480"/>
+            <a:ext cx="1828800" cy="365760"/>
+          </a:xfrm>
+          <a:prstGeom prst="rect">
+            <a:avLst/>
+          </a:prstGeom>
+          <a:noFill/>
+          <a:ln/>
+        </p:spPr>
+        <p:txBody>
+          <a:bodyPr wrap="square" lIns="0" tIns="0" rIns="0" bIns="0" rtlCol="0" anchor="ctr"/>
+          <a:lstStyle/>
+          <a:p>
+            <a:pPr algn="ctr" indent="0" marL="0">
+              <a:buNone/>
+            </a:pPr>
+            <a:r>
+              <a:rPr lang="en-US" sz="1200" b="1" dirty="0">
+                <a:solidFill>
+                  <a:schemeClr val="tx1"/>
+                </a:solidFill>
+              </a:rPr>
+              <a:t>SIMULATED DATA</a:t>
+            </a:r>
+            <a:endParaRPr lang="en-US" sz="1200" dirty="0"/>
+          </a:p>
+        </p:txBody>
+      </p:sp>
+      <p:sp>
+        <p:nvSpPr>
+          <p:cNvPr id="5" name="Text 3"/>
+          <p:cNvSpPr txBox="1"/>
+          <p:nvPr/>
+        </p:nvSpPr>
+        <p:spPr>
+          <a:xfrm>
+            <a:off x="457200" y="1188720"/>
+            <a:ext cx="4206240" cy="3108960"/>
+          </a:xfrm>
+          <a:prstGeom prst="rect">
+            <a:avLst/>
+          </a:prstGeom>
+          <a:noFill/>
+          <a:ln/>
+        </p:spPr>
+        <p:txBody>
+          <a:bodyPr wrap="square" lIns="0" tIns="0" rIns="0" bIns="0" rtlCol="0" anchor="t"/>
+          <a:lstStyle/>
+          <a:p>
+            <a:pPr marL="342900" indent="-342900">
+              <a:spcAft>
+                <a:spcPts val="600"/>
+              </a:spcAft>
+              <a:buSzPct val="100000"/>
+              <a:buChar char="•"/>
+            </a:pPr>
+            <a:r>
+              <a:rPr lang="en-US" sz="1400" dirty="0">
+                <a:solidFill>
+                  <a:schemeClr val="tx1"/>
+                </a:solidFill>
+              </a:rPr>
+              <a:t>Decision tree: depth 4, 16 leaves (scikit-learn)</a:t>
+            </a:r>
+            <a:endParaRPr lang="en-US" sz="1400" dirty="0"/>
+          </a:p>
+          <a:p>
+            <a:pPr marL="342900" indent="-342900">
+              <a:spcAft>
+                <a:spcPts val="600"/>
+              </a:spcAft>
+              <a:buSzPct val="100000"/>
+              <a:buChar char="•"/>
+            </a:pPr>
+            <a:r>
+              <a:rPr lang="en-US" sz="1400" dirty="0">
+                <a:solidFill>
+                  <a:schemeClr val="tx1"/>
+                </a:solidFill>
+              </a:rPr>
+              <a:t>Six features: force, previous force, rate of change, moving average, contact duration, last delta</a:t>
+            </a:r>
+            <a:endParaRPr lang="en-US" sz="1400" dirty="0"/>
+          </a:p>
+          <a:p>
+            <a:pPr marL="342900" indent="-342900">
+              <a:spcAft>
+                <a:spcPts val="600"/>
+              </a:spcAft>
+              <a:buSzPct val="100000"/>
+              <a:buChar char="•"/>
+            </a:pPr>
+            <a:r>
+              <a:rPr lang="en-US" sz="1400" dirty="0">
+                <a:solidFill>
+                  <a:schemeClr val="tx1"/>
+                </a:solidFill>
+              </a:rPr>
+              <a:t>420 training and 180 test episodes, split by episode</a:t>
+            </a:r>
+            <a:endParaRPr lang="en-US" sz="1400" dirty="0"/>
+          </a:p>
+          <a:p>
+            <a:pPr marL="342900" indent="-342900">
+              <a:spcAft>
+                <a:spcPts val="600"/>
+              </a:spcAft>
+              <a:buSzPct val="100000"/>
+              <a:buChar char="•"/>
+            </a:pPr>
+            <a:r>
+              <a:rPr lang="en-US" sz="1400" dirty="0">
+                <a:solidFill>
+                  <a:schemeClr val="tx1"/>
+                </a:solidFill>
+              </a:rPr>
+              <a:t>Labels come from the scenario that generated each episode</a:t>
+            </a:r>
+            <a:endParaRPr lang="en-US" sz="1400" dirty="0"/>
+          </a:p>
+        </p:txBody>
+      </p:sp>
+      <p:graphicFrame>
+        <p:nvGraphicFramePr>
+          <p:cNvPr id="15" name="Table 0"/>
+          <p:cNvGraphicFramePr>
+            <a:graphicFrameLocks noGrp="1"/>
+          </p:cNvGraphicFramePr>
+          <p:nvPr>
+            <p:extLst>
+              <p:ext uri="{D42A27DB-BD31-4B8C-83A1-F6EECF244321}">
+                <p14:modId xmlns:p14="http://schemas.microsoft.com/office/powerpoint/2010/main" val="1579011935"/>
+              </p:ext>
+            </p:extLst>
+          </p:nvPr>
+        </p:nvGraphicFramePr>
+        <p:xfrm>
+          <a:off x="4937760" y="1188720"/>
+          <a:ext cx="3749040" cy="914400"/>
+        </p:xfrm>
+        <a:graphic>
+          <a:graphicData uri="http://schemas.openxmlformats.org/drawingml/2006/table">
+            <a:tbl>
+              <a:tblPr/>
+              <a:tblGrid>
+                <a:gridCol w="914400"/>
+                <a:gridCol w="2834640"/>
+              </a:tblGrid>
+              <a:tr h="457200">
+                <a:tc>
+                  <a:txBody>
+                    <a:bodyPr/>
+                    <a:lstStyle/>
+                    <a:p>
+                      <a:pPr indent="0" marL="0">
+                        <a:buNone/>
+                      </a:pPr>
+                      <a:r>
+                        <a:rPr lang="en-US" sz="1400" b="1" dirty="0">
+                          <a:solidFill>
+                            <a:schemeClr val="bg1"/>
+                          </a:solidFill>
+                        </a:rPr>
+                        <a:t>Class</a:t>
+                      </a:r>
+                      <a:endParaRPr lang="en-US" sz="1400" dirty="0"/>
+                    </a:p>
+                  </a:txBody>
+                  <a:tcPr marL="91440" marR="91440" marT="45720" marB="45720" anchor="ctr">
+                    <a:lnL w="0" cap="flat" cmpd="sng" algn="ctr">
+                      <a:noFill/>
+                    </a:lnL>
+                    <a:lnR w="0" cap="flat" cmpd="sng" algn="ctr">
+                      <a:noFill/>
+                    </a:lnR>
+                    <a:lnT w="0" cap="flat" cmpd="sng" algn="ctr">
+                      <a:noFill/>
+                    </a:lnT>
+                    <a:lnB w="0" cap="flat" cmpd="sng" algn="ctr">
+                      <a:noFill/>
+                    </a:lnB>
+                    <a:solidFill>
+                      <a:schemeClr val="accent1"/>
+                    </a:solidFill>
+                  </a:tcPr>
+                </a:tc>
+                <a:tc>
+                  <a:txBody>
+                    <a:bodyPr/>
+                    <a:lstStyle/>
+                    <a:p>
+                      <a:pPr indent="0" marL="0">
+                        <a:buNone/>
+                      </a:pPr>
+                      <a:r>
+                        <a:rPr lang="en-US" sz="1400" b="1" dirty="0">
+                          <a:solidFill>
+                            <a:schemeClr val="bg1"/>
+                          </a:solidFill>
+                        </a:rPr>
+                        <a:t>Meaning</a:t>
+                      </a:r>
+                      <a:endParaRPr lang="en-US" sz="1400" dirty="0"/>
+                    </a:p>
+                  </a:txBody>
+                  <a:tcPr marL="91440" marR="91440" marT="45720" marB="45720" anchor="ctr">
+                    <a:lnL w="0" cap="flat" cmpd="sng" algn="ctr">
+                      <a:noFill/>
+                    </a:lnL>
+                    <a:lnR w="0" cap="flat" cmpd="sng" algn="ctr">
+                      <a:noFill/>
+                    </a:lnR>
+                    <a:lnT w="0" cap="flat" cmpd="sng" algn="ctr">
+                      <a:noFill/>
+                    </a:lnT>
+                    <a:lnB w="0" cap="flat" cmpd="sng" algn="ctr">
+                      <a:noFill/>
+                    </a:lnB>
+                    <a:solidFill>
+                      <a:schemeClr val="accent1"/>
+                    </a:solidFill>
+                  </a:tcPr>
+                </a:tc>
+              </a:tr>
+              <a:tr h="457200">
+                <a:tc>
+                  <a:txBody>
+                    <a:bodyPr/>
+                    <a:lstStyle/>
+                    <a:p>
+                      <a:pPr indent="0" marL="0">
+                        <a:buNone/>
+                      </a:pPr>
+                      <a:r>
+                        <a:rPr lang="en-US" sz="1400" dirty="0">
+                          <a:solidFill>
+                            <a:schemeClr val="tx1"/>
+                          </a:solidFill>
+                        </a:rPr>
+                        <a:t>0</a:t>
+                      </a:r>
+                      <a:endParaRPr lang="en-US" sz="1400" dirty="0"/>
+                    </a:p>
+                  </a:txBody>
+                  <a:tcPr marL="91440" marR="91440" marT="45720" marB="45720" anchor="ctr">
+                    <a:lnL w="0" cap="flat" cmpd="sng" algn="ctr">
+                      <a:noFill/>
+                    </a:lnL>
+                    <a:lnR w="0" cap="flat" cmpd="sng" algn="ctr">
+                      <a:noFill/>
+                    </a:lnR>
+                    <a:lnT w="0" cap="flat" cmpd="sng" algn="ctr">
+                      <a:noFill/>
+                    </a:lnT>
+                    <a:lnB w="0" cap="flat" cmpd="sng" algn="ctr">
+                      <a:noFill/>
+                    </a:lnB>
+                    <a:solidFill>
+                      <a:schemeClr val="bg2"/>
+                    </a:solidFill>
+                  </a:tcPr>
+                </a:tc>
+                <a:tc>
+                  <a:txBody>
+                    <a:bodyPr/>
+                    <a:lstStyle/>
+                    <a:p>
+                      <a:pPr indent="0" marL="0">
+                        <a:buNone/>
+                      </a:pPr>
+                      <a:r>
+                        <a:rPr lang="en-US" sz="1400" dirty="0">
+                          <a:solidFill>
+                            <a:schemeClr val="tx1"/>
+                          </a:solidFill>
+                        </a:rPr>
+                        <a:t>No contact</a:t>
+                      </a:r>
+                      <a:endParaRPr lang="en-US" sz="1400" dirty="0"/>
+                    </a:p>
+                  </a:txBody>
+                  <a:tcPr marL="91440" marR="91440" marT="45720" marB="45720" anchor="ctr">
+                    <a:lnL w="0" cap="flat" cmpd="sng" algn="ctr">
+                      <a:noFill/>
+                    </a:lnL>
+                    <a:lnR w="0" cap="flat" cmpd="sng" algn="ctr">
+                      <a:noFill/>
+                    </a:lnR>
+                    <a:lnT w="0" cap="flat" cmpd="sng" algn="ctr">
+                      <a:noFill/>
+                    </a:lnT>
+                    <a:lnB w="0" cap="flat" cmpd="sng" algn="ctr">
+                      <a:noFill/>
+                    </a:lnB>
+                    <a:solidFill>
+                      <a:schemeClr val="bg2"/>
+                    </a:solidFill>
+                  </a:tcPr>
+                </a:tc>
+              </a:tr>
+              <a:tr h="457200">
+                <a:tc>
+                  <a:txBody>
+                    <a:bodyPr/>
+                    <a:lstStyle/>
+                    <a:p>
+                      <a:pPr indent="0" marL="0">
+                        <a:buNone/>
+                      </a:pPr>
+                      <a:r>
+                        <a:rPr lang="en-US" sz="1400" dirty="0">
+                          <a:solidFill>
+                            <a:schemeClr val="tx1"/>
+                          </a:solidFill>
+                        </a:rPr>
+                        <a:t>1</a:t>
+                      </a:r>
+                      <a:endParaRPr lang="en-US" sz="1400" dirty="0"/>
+                    </a:p>
+                  </a:txBody>
+                  <a:tcPr marL="91440" marR="91440" marT="45720" marB="45720" anchor="ctr">
+                    <a:lnL w="0" cap="flat" cmpd="sng" algn="ctr">
+                      <a:noFill/>
+                    </a:lnL>
+                    <a:lnR w="0" cap="flat" cmpd="sng" algn="ctr">
+                      <a:noFill/>
+                    </a:lnR>
+                    <a:lnT w="0" cap="flat" cmpd="sng" algn="ctr">
+                      <a:noFill/>
+                    </a:lnT>
+                    <a:lnB w="0" cap="flat" cmpd="sng" algn="ctr">
+                      <a:noFill/>
+                    </a:lnB>
+                    <a:solidFill>
+                      <a:schemeClr val="bg1"/>
+                    </a:solidFill>
+                  </a:tcPr>
+                </a:tc>
+                <a:tc>
+                  <a:txBody>
+                    <a:bodyPr/>
+                    <a:lstStyle/>
+                    <a:p>
+                      <a:pPr indent="0" marL="0">
+                        <a:buNone/>
+                      </a:pPr>
+                      <a:r>
+                        <a:rPr lang="en-US" sz="1400" dirty="0">
+                          <a:solidFill>
+                            <a:schemeClr val="tx1"/>
+                          </a:solidFill>
+                        </a:rPr>
+                        <a:t>Light contact</a:t>
+                      </a:r>
+                      <a:endParaRPr lang="en-US" sz="1400" dirty="0"/>
+                    </a:p>
+                  </a:txBody>
+                  <a:tcPr marL="91440" marR="91440" marT="45720" marB="45720" anchor="ctr">
+                    <a:lnL w="0" cap="flat" cmpd="sng" algn="ctr">
+                      <a:noFill/>
+                    </a:lnL>
+                    <a:lnR w="0" cap="flat" cmpd="sng" algn="ctr">
+                      <a:noFill/>
+                    </a:lnR>
+                    <a:lnT w="0" cap="flat" cmpd="sng" algn="ctr">
+                      <a:noFill/>
+                    </a:lnT>
+                    <a:lnB w="0" cap="flat" cmpd="sng" algn="ctr">
+                      <a:noFill/>
+                    </a:lnB>
+                    <a:solidFill>
+                      <a:schemeClr val="bg1"/>
+                    </a:solidFill>
+                  </a:tcPr>
+                </a:tc>
+              </a:tr>
+              <a:tr h="457200">
+                <a:tc>
+                  <a:txBody>
+                    <a:bodyPr/>
+                    <a:lstStyle/>
+                    <a:p>
+                      <a:pPr indent="0" marL="0">
+                        <a:buNone/>
+                      </a:pPr>
+                      <a:r>
+                        <a:rPr lang="en-US" sz="1400" dirty="0">
+                          <a:solidFill>
+                            <a:schemeClr val="tx1"/>
+                          </a:solidFill>
+                        </a:rPr>
+                        <a:t>2</a:t>
+                      </a:r>
+                      <a:endParaRPr lang="en-US" sz="1400" dirty="0"/>
+                    </a:p>
+                  </a:txBody>
+                  <a:tcPr marL="91440" marR="91440" marT="45720" marB="45720" anchor="ctr">
+                    <a:lnL w="0" cap="flat" cmpd="sng" algn="ctr">
+                      <a:noFill/>
+                    </a:lnL>
+                    <a:lnR w="0" cap="flat" cmpd="sng" algn="ctr">
+                      <a:noFill/>
+                    </a:lnR>
+                    <a:lnT w="0" cap="flat" cmpd="sng" algn="ctr">
+                      <a:noFill/>
+                    </a:lnT>
+                    <a:lnB w="0" cap="flat" cmpd="sng" algn="ctr">
+                      <a:noFill/>
+                    </a:lnB>
+                    <a:solidFill>
+                      <a:schemeClr val="bg2"/>
+                    </a:solidFill>
+                  </a:tcPr>
+                </a:tc>
+                <a:tc>
+                  <a:txBody>
+                    <a:bodyPr/>
+                    <a:lstStyle/>
+                    <a:p>
+                      <a:pPr indent="0" marL="0">
+                        <a:buNone/>
+                      </a:pPr>
+                      <a:r>
+                        <a:rPr lang="en-US" sz="1400" dirty="0">
+                          <a:solidFill>
+                            <a:schemeClr val="tx1"/>
+                          </a:solidFill>
+                        </a:rPr>
+                        <a:t>Normal grip</a:t>
+                      </a:r>
+                      <a:endParaRPr lang="en-US" sz="1400" dirty="0"/>
+                    </a:p>
+                  </a:txBody>
+                  <a:tcPr marL="91440" marR="91440" marT="45720" marB="45720" anchor="ctr">
+                    <a:lnL w="0" cap="flat" cmpd="sng" algn="ctr">
+                      <a:noFill/>
+                    </a:lnL>
+                    <a:lnR w="0" cap="flat" cmpd="sng" algn="ctr">
+                      <a:noFill/>
+                    </a:lnR>
+                    <a:lnT w="0" cap="flat" cmpd="sng" algn="ctr">
+                      <a:noFill/>
+                    </a:lnT>
+                    <a:lnB w="0" cap="flat" cmpd="sng" algn="ctr">
+                      <a:noFill/>
+                    </a:lnB>
+                    <a:solidFill>
+                      <a:schemeClr val="bg2"/>
+                    </a:solidFill>
+                  </a:tcPr>
+                </a:tc>
+              </a:tr>
+              <a:tr h="457200">
+                <a:tc>
+                  <a:txBody>
+                    <a:bodyPr/>
+                    <a:lstStyle/>
+                    <a:p>
+                      <a:pPr indent="0" marL="0">
+                        <a:buNone/>
+                      </a:pPr>
+                      <a:r>
+                        <a:rPr lang="en-US" sz="1400" dirty="0">
+                          <a:solidFill>
+                            <a:schemeClr val="tx1"/>
+                          </a:solidFill>
+                        </a:rPr>
+                        <a:t>3</a:t>
+                      </a:r>
+                      <a:endParaRPr lang="en-US" sz="1400" dirty="0"/>
+                    </a:p>
+                  </a:txBody>
+                  <a:tcPr marL="91440" marR="91440" marT="45720" marB="45720" anchor="ctr">
+                    <a:lnL w="0" cap="flat" cmpd="sng" algn="ctr">
+                      <a:noFill/>
+                    </a:lnL>
+                    <a:lnR w="0" cap="flat" cmpd="sng" algn="ctr">
+                      <a:noFill/>
+                    </a:lnR>
+                    <a:lnT w="0" cap="flat" cmpd="sng" algn="ctr">
+                      <a:noFill/>
+                    </a:lnT>
+                    <a:lnB w="0" cap="flat" cmpd="sng" algn="ctr">
+                      <a:noFill/>
+                    </a:lnB>
+                    <a:solidFill>
+                      <a:schemeClr val="bg1"/>
+                    </a:solidFill>
+                  </a:tcPr>
+                </a:tc>
+                <a:tc>
+                  <a:txBody>
+                    <a:bodyPr/>
+                    <a:lstStyle/>
+                    <a:p>
+                      <a:pPr indent="0" marL="0">
+                        <a:buNone/>
+                      </a:pPr>
+                      <a:r>
+                        <a:rPr lang="en-US" sz="1400" dirty="0">
+                          <a:solidFill>
+                            <a:schemeClr val="tx1"/>
+                          </a:solidFill>
+                        </a:rPr>
+                        <a:t>Excessive force</a:t>
+                      </a:r>
+                      <a:endParaRPr lang="en-US" sz="1400" dirty="0"/>
+                    </a:p>
+                  </a:txBody>
+                  <a:tcPr marL="91440" marR="91440" marT="45720" marB="45720" anchor="ctr">
+                    <a:lnL w="0" cap="flat" cmpd="sng" algn="ctr">
+                      <a:noFill/>
+                    </a:lnL>
+                    <a:lnR w="0" cap="flat" cmpd="sng" algn="ctr">
+                      <a:noFill/>
+                    </a:lnR>
+                    <a:lnT w="0" cap="flat" cmpd="sng" algn="ctr">
+                      <a:noFill/>
+                    </a:lnT>
+                    <a:lnB w="0" cap="flat" cmpd="sng" algn="ctr">
+                      <a:noFill/>
+                    </a:lnB>
+                    <a:solidFill>
+                      <a:schemeClr val="bg1"/>
+                    </a:solidFill>
+                  </a:tcPr>
+                </a:tc>
+              </a:tr>
+            </a:tbl>
+          </a:graphicData>
+        </a:graphic>
+      </p:graphicFrame>
+      <p:sp>
+        <p:nvSpPr>
+          <p:cNvPr id="7" name="Text 4"/>
+          <p:cNvSpPr txBox="1"/>
+          <p:nvPr/>
+        </p:nvSpPr>
+        <p:spPr>
+          <a:xfrm>
+            <a:off x="4937760" y="3657600"/>
+            <a:ext cx="3749040" cy="548640"/>
+          </a:xfrm>
+          <a:prstGeom prst="rect">
+            <a:avLst/>
+          </a:prstGeom>
+          <a:noFill/>
+          <a:ln/>
+        </p:spPr>
+        <p:txBody>
+          <a:bodyPr wrap="square" lIns="0" tIns="0" rIns="0" bIns="0" rtlCol="0" anchor="t"/>
+          <a:lstStyle/>
+          <a:p>
+            <a:pPr indent="0" marL="0">
+              <a:buNone/>
+            </a:pPr>
+            <a:r>
+              <a:rPr lang="en-US" sz="1400" b="1" dirty="0">
+                <a:solidFill>
+                  <a:schemeClr val="tx2"/>
+                </a:solidFill>
+              </a:rPr>
+              <a:t>Output maps to control states sent to the PL.</a:t>
+            </a:r>
+            <a:endParaRPr lang="en-US" sz="1400" dirty="0"/>
+          </a:p>
+        </p:txBody>
+      </p:sp>
+      <p:sp>
+        <p:nvSpPr>
+          <p:cNvPr id="25" name="Slide Number Placeholder 0"/>
+          <p:cNvSpPr>
+            <a:spLocks noGrp="1"/>
+          </p:cNvSpPr>
+          <p:nvPr>
+            <p:ph type="sldNum" sz="quarter" idx="4294967295"/>
+          </p:nvPr>
+        </p:nvSpPr>
+        <p:spPr>
+          <a:xfrm>
+            <a:off x="8321040" y="4754880"/>
+            <a:ext cx="457200" cy="274320"/>
+          </a:xfrm>
+          <a:prstGeom prst="rect">
+            <a:avLst/>
+          </a:prstGeom>
+          <a:extLst>
+            <a:ext uri="{C572A759-6A51-4108-AA02-DFA0A04FC94B}">
+              <ma14:wrappingTextBoxFlag xmlns:ma14="http://schemas.microsoft.com/office/mac/drawingml/2011/main" val="0"/>
+            </a:ext>
+          </a:extLst>
+        </p:spPr>
+        <p:txBody>
+          <a:bodyPr/>
+          <a:lstStyle>
+            <a:lvl1pPr>
+              <a:defRPr sz="1000">
+                <a:solidFill>
+                  <a:schemeClr val="accent5"/>
+                </a:solidFill>
+              </a:defRPr>
+            </a:lvl1pPr>
+          </a:lstStyle>
+          <a:p>
+            <a:pPr algn="l"/>
+            <a:fld id="{F7021451-1387-4CA6-816F-3879F97B5CBC}" type="slidenum">
+              <a:rPr b="0" lang="en-US"/>
+              <a:t>14</a:t>
+            </a:fld>
+            <a:endParaRPr lang="en-US"/>
+          </a:p>
+        </p:txBody>
+      </p:sp>
+    </p:spTree>
+  </p:cSld>
+  <p:clrMapOvr>
+    <a:masterClrMapping/>
+  </p:clrMapOvr>
+</p:sld>
+</file>
+
+<file path=ppt/slides/slide15.xml><?xml version="1.0" encoding="utf-8"?>
+<p:sld xmlns:a="http://schemas.openxmlformats.org/drawingml/2006/main" xmlns:r="http://schemas.openxmlformats.org/officeDocument/2006/relationships" xmlns:p="http://schemas.openxmlformats.org/presentationml/2006/main">
+  <p:cSld name="Slide 15">
+    <p:spTree>
+      <p:nvGrpSpPr>
+        <p:cNvPr id="1" name=""/>
+        <p:cNvGrpSpPr/>
+        <p:nvPr/>
+      </p:nvGrpSpPr>
+      <p:grpSpPr>
+        <a:xfrm>
+          <a:off x="0" y="0"/>
+          <a:ext cx="0" cy="0"/>
+          <a:chOff x="0" y="0"/>
+          <a:chExt cx="0" cy="0"/>
+        </a:xfrm>
+      </p:grpSpPr>
+      <p:sp>
+        <p:nvSpPr>
+          <p:cNvPr id="2" name="Text 0"/>
+          <p:cNvSpPr/>
+          <p:nvPr>
+            <p:ph idx="100" type="title" hasCustomPrompt="1"/>
+          </p:nvPr>
+        </p:nvSpPr>
+        <p:spPr>
+          <a:xfrm>
+            <a:off x="457200" y="274320"/>
+            <a:ext cx="8229600" cy="731520"/>
+          </a:xfrm>
+          <a:prstGeom prst="rect">
+            <a:avLst/>
+          </a:prstGeom>
+          <a:noFill/>
+          <a:ln/>
+        </p:spPr>
+        <p:txBody>
+          <a:bodyPr wrap="square" lIns="0" tIns="0" rIns="0" bIns="0" rtlCol="0" anchor="ctr"/>
+          <a:lstStyle/>
+          <a:p>
+            <a:pPr algn="l" indent="0" marL="0">
+              <a:buNone/>
+            </a:pPr>
+            <a:r>
+              <a:rPr lang="en-US" sz="3600" b="1" dirty="0">
+                <a:solidFill>
+                  <a:schemeClr val="tx2"/>
+                </a:solidFill>
+              </a:rPr>
+              <a:t>AI/ML evaluation</a:t>
+            </a:r>
+            <a:endParaRPr lang="en-US" sz="3600" dirty="0"/>
+          </a:p>
+        </p:txBody>
+      </p:sp>
+      <p:sp>
+        <p:nvSpPr>
+          <p:cNvPr id="3" name="Shape 1"/>
+          <p:cNvSpPr/>
+          <p:nvPr/>
+        </p:nvSpPr>
+        <p:spPr>
+          <a:xfrm>
+            <a:off x="6858000" y="411480"/>
+            <a:ext cx="1828800" cy="365760"/>
+          </a:xfrm>
+          <a:prstGeom prst="roundRect">
+            <a:avLst>
+              <a:gd name="adj" fmla="val 25000"/>
+            </a:avLst>
+          </a:prstGeom>
+          <a:solidFill>
+            <a:schemeClr val="accent2"/>
+          </a:solidFill>
+          <a:ln w="12700">
+            <a:solidFill>
+              <a:schemeClr val="accent2"/>
+            </a:solidFill>
+            <a:prstDash val="solid"/>
+          </a:ln>
+        </p:spPr>
+      </p:sp>
+      <p:sp>
+        <p:nvSpPr>
+          <p:cNvPr id="4" name="Text 2"/>
+          <p:cNvSpPr txBox="1"/>
+          <p:nvPr/>
+        </p:nvSpPr>
+        <p:spPr>
+          <a:xfrm>
+            <a:off x="6858000" y="411480"/>
+            <a:ext cx="1828800" cy="365760"/>
+          </a:xfrm>
+          <a:prstGeom prst="rect">
+            <a:avLst/>
+          </a:prstGeom>
+          <a:noFill/>
+          <a:ln/>
+        </p:spPr>
+        <p:txBody>
+          <a:bodyPr wrap="square" lIns="0" tIns="0" rIns="0" bIns="0" rtlCol="0" anchor="ctr"/>
+          <a:lstStyle/>
+          <a:p>
+            <a:pPr algn="ctr" indent="0" marL="0">
+              <a:buNone/>
+            </a:pPr>
+            <a:r>
+              <a:rPr lang="en-US" sz="1200" b="1" dirty="0">
+                <a:solidFill>
+                  <a:schemeClr val="tx1"/>
+                </a:solidFill>
+              </a:rPr>
+              <a:t>SIMULATED DATA</a:t>
+            </a:r>
+            <a:endParaRPr lang="en-US" sz="1200" dirty="0"/>
+          </a:p>
+        </p:txBody>
+      </p:sp>
+      <p:pic>
+        <p:nvPicPr>
+          <p:cNvPr id="5" name="Image 0" descr="Confusion matrix on the simulated test set">    </p:cNvPr>
+          <p:cNvPicPr>
+            <a:picLocks noChangeAspect="1"/>
+          </p:cNvPicPr>
+          <p:nvPr/>
+        </p:nvPicPr>
+        <p:blipFill>
+          <a:blip r:embed="rId1"/>
+          <a:stretch>
+            <a:fillRect/>
+          </a:stretch>
+        </p:blipFill>
+        <p:spPr>
+          <a:xfrm>
+            <a:off x="457200" y="1097280"/>
             <a:ext cx="3931920" cy="3328416"/>
           </a:xfrm>
           <a:prstGeom prst="rect">
@@ -2651,7 +5409,7 @@
       </p:pic>
       <p:graphicFrame>
         <p:nvGraphicFramePr>
-          <p:cNvPr id="11" name="Table 0"/>
+          <p:cNvPr id="16" name="Table 0"/>
           <p:cNvGraphicFramePr>
             <a:graphicFrameLocks noGrp="1"/>
           </p:cNvGraphicFramePr>
@@ -3482,7 +6240,7 @@
             <a:pPr algn="l"/>
             <a:fld id="{F7021451-1387-4CA6-816F-3879F97B5CBC}" type="slidenum">
               <a:rPr b="0" lang="en-US"/>
-              <a:t>10</a:t>
+              <a:t>15</a:t>
             </a:fld>
             <a:endParaRPr lang="en-US"/>
           </a:p>
@@ -3496,9 +6254,9 @@
 </p:sld>
 </file>
 
-<file path=ppt/slides/slide11.xml><?xml version="1.0" encoding="utf-8"?>
+<file path=ppt/slides/slide16.xml><?xml version="1.0" encoding="utf-8"?>
 <p:sld xmlns:a="http://schemas.openxmlformats.org/drawingml/2006/main" xmlns:r="http://schemas.openxmlformats.org/officeDocument/2006/relationships" xmlns:p="http://schemas.openxmlformats.org/presentationml/2006/main">
-  <p:cSld name="Slide 11">
+  <p:cSld name="Slide 16">
     <p:spTree>
       <p:nvGrpSpPr>
         <p:cNvPr id="1" name=""/>
@@ -3950,7 +6708,7 @@
             <a:pPr algn="l"/>
             <a:fld id="{F7021451-1387-4CA6-816F-3879F97B5CBC}" type="slidenum">
               <a:rPr b="0" lang="en-US"/>
-              <a:t>11</a:t>
+              <a:t>16</a:t>
             </a:fld>
             <a:endParaRPr lang="en-US"/>
           </a:p>
@@ -3964,9 +6722,9 @@
 </p:sld>
 </file>
 
-<file path=ppt/slides/slide12.xml><?xml version="1.0" encoding="utf-8"?>
+<file path=ppt/slides/slide17.xml><?xml version="1.0" encoding="utf-8"?>
 <p:sld xmlns:a="http://schemas.openxmlformats.org/drawingml/2006/main" xmlns:r="http://schemas.openxmlformats.org/officeDocument/2006/relationships" xmlns:p="http://schemas.openxmlformats.org/presentationml/2006/main">
-  <p:cSld name="Slide 12">
+  <p:cSld name="Slide 17">
     <p:spTree>
       <p:nvGrpSpPr>
         <p:cNvPr id="1" name=""/>
@@ -4787,7 +7545,7 @@
             <a:pPr algn="l"/>
             <a:fld id="{F7021451-1387-4CA6-816F-3879F97B5CBC}" type="slidenum">
               <a:rPr b="0" lang="en-US"/>
-              <a:t>12</a:t>
+              <a:t>17</a:t>
             </a:fld>
             <a:endParaRPr lang="en-US"/>
           </a:p>
@@ -4801,9 +7559,9 @@
 </p:sld>
 </file>
 
-<file path=ppt/slides/slide13.xml><?xml version="1.0" encoding="utf-8"?>
+<file path=ppt/slides/slide18.xml><?xml version="1.0" encoding="utf-8"?>
 <p:sld xmlns:a="http://schemas.openxmlformats.org/drawingml/2006/main" xmlns:r="http://schemas.openxmlformats.org/officeDocument/2006/relationships" xmlns:p="http://schemas.openxmlformats.org/presentationml/2006/main">
-  <p:cSld name="Slide 13">
+  <p:cSld name="Slide 18">
     <p:spTree>
       <p:nvGrpSpPr>
         <p:cNvPr id="1" name=""/>
@@ -5227,7 +7985,7 @@
             <a:pPr algn="l"/>
             <a:fld id="{F7021451-1387-4CA6-816F-3879F97B5CBC}" type="slidenum">
               <a:rPr b="0" lang="en-US"/>
-              <a:t>13</a:t>
+              <a:t>18</a:t>
             </a:fld>
             <a:endParaRPr lang="en-US"/>
           </a:p>
@@ -5241,9 +7999,9 @@
 </p:sld>
 </file>
 
-<file path=ppt/slides/slide14.xml><?xml version="1.0" encoding="utf-8"?>
+<file path=ppt/slides/slide19.xml><?xml version="1.0" encoding="utf-8"?>
 <p:sld xmlns:a="http://schemas.openxmlformats.org/drawingml/2006/main" xmlns:r="http://schemas.openxmlformats.org/officeDocument/2006/relationships" xmlns:p="http://schemas.openxmlformats.org/presentationml/2006/main">
-  <p:cSld name="Slide 14">
+  <p:cSld name="Slide 19">
     <p:spTree>
       <p:nvGrpSpPr>
         <p:cNvPr id="1" name=""/>
@@ -5953,147 +8711,9 @@
             <a:pPr algn="l"/>
             <a:fld id="{F7021451-1387-4CA6-816F-3879F97B5CBC}" type="slidenum">
               <a:rPr b="0" lang="en-US"/>
-              <a:t>14</a:t>
+              <a:t>19</a:t>
             </a:fld>
             <a:endParaRPr lang="en-US"/>
-          </a:p>
-        </p:txBody>
-      </p:sp>
-    </p:spTree>
-  </p:cSld>
-  <p:clrMapOvr>
-    <a:masterClrMapping/>
-  </p:clrMapOvr>
-</p:sld>
-</file>
-
-<file path=ppt/slides/slide15.xml><?xml version="1.0" encoding="utf-8"?>
-<p:sld xmlns:a="http://schemas.openxmlformats.org/drawingml/2006/main" xmlns:r="http://schemas.openxmlformats.org/officeDocument/2006/relationships" xmlns:p="http://schemas.openxmlformats.org/presentationml/2006/main">
-  <p:cSld name="Slide 15">
-    <p:spTree>
-      <p:nvGrpSpPr>
-        <p:cNvPr id="1" name=""/>
-        <p:cNvGrpSpPr/>
-        <p:nvPr/>
-      </p:nvGrpSpPr>
-      <p:grpSpPr>
-        <a:xfrm>
-          <a:off x="0" y="0"/>
-          <a:ext cx="0" cy="0"/>
-          <a:chOff x="0" y="0"/>
-          <a:chExt cx="0" cy="0"/>
-        </a:xfrm>
-      </p:grpSpPr>
-      <p:sp>
-        <p:nvSpPr>
-          <p:cNvPr id="2" name="Text 0"/>
-          <p:cNvSpPr/>
-          <p:nvPr>
-            <p:ph idx="100" type="title" hasCustomPrompt="1"/>
-          </p:nvPr>
-        </p:nvSpPr>
-        <p:spPr>
-          <a:xfrm>
-            <a:off x="548640" y="1188720"/>
-            <a:ext cx="7863840" cy="1554480"/>
-          </a:xfrm>
-          <a:prstGeom prst="rect">
-            <a:avLst/>
-          </a:prstGeom>
-          <a:noFill/>
-          <a:ln/>
-        </p:spPr>
-        <p:txBody>
-          <a:bodyPr wrap="square" lIns="0" tIns="0" rIns="0" bIns="0" rtlCol="0" anchor="t"/>
-          <a:lstStyle/>
-          <a:p>
-            <a:pPr algn="l" indent="0" marL="0">
-              <a:buNone/>
-            </a:pPr>
-            <a:r>
-              <a:rPr lang="en-US" sz="4000" b="1" dirty="0">
-                <a:solidFill>
-                  <a:schemeClr val="bg1"/>
-                </a:solidFill>
-              </a:rPr>
-              <a:t>Conclusion</a:t>
-            </a:r>
-            <a:endParaRPr lang="en-US" sz="4000" dirty="0"/>
-          </a:p>
-        </p:txBody>
-      </p:sp>
-      <p:sp>
-        <p:nvSpPr>
-          <p:cNvPr id="3" name="Text 0"/>
-          <p:cNvSpPr/>
-          <p:nvPr>
-            <p:ph idx="101" type="body" hasCustomPrompt="1"/>
-          </p:nvPr>
-        </p:nvSpPr>
-        <p:spPr>
-          <a:xfrm>
-            <a:off x="548640" y="2926080"/>
-            <a:ext cx="7863840" cy="1097280"/>
-          </a:xfrm>
-          <a:prstGeom prst="rect">
-            <a:avLst/>
-          </a:prstGeom>
-          <a:noFill/>
-          <a:ln/>
-        </p:spPr>
-        <p:txBody>
-          <a:bodyPr wrap="square" lIns="0" tIns="0" rIns="0" bIns="0" rtlCol="0" anchor="t"/>
-          <a:lstStyle/>
-          <a:p>
-            <a:pPr marL="342900" indent="-342900">
-              <a:spcAft>
-                <a:spcPts val="800"/>
-              </a:spcAft>
-              <a:buSzPct val="100000"/>
-              <a:buChar char="•"/>
-            </a:pPr>
-            <a:r>
-              <a:rPr lang="en-US" sz="1800" dirty="0">
-                <a:solidFill>
-                  <a:schemeClr val="bg2"/>
-                </a:solidFill>
-              </a:rPr>
-              <a:t>A deterministic FPGA reflex path enforces the hard limits.</a:t>
-            </a:r>
-            <a:endParaRPr lang="en-US" sz="1800" dirty="0"/>
-          </a:p>
-          <a:p>
-            <a:pPr marL="342900" indent="-342900">
-              <a:spcAft>
-                <a:spcPts val="800"/>
-              </a:spcAft>
-              <a:buSzPct val="100000"/>
-              <a:buChar char="•"/>
-            </a:pPr>
-            <a:r>
-              <a:rPr lang="en-US" sz="1800" dirty="0">
-                <a:solidFill>
-                  <a:schemeClr val="bg2"/>
-                </a:solidFill>
-              </a:rPr>
-              <a:t>The AI path adds contact classification and can only lower the command.</a:t>
-            </a:r>
-            <a:endParaRPr lang="en-US" sz="1800" dirty="0"/>
-          </a:p>
-          <a:p>
-            <a:pPr marL="342900" indent="-342900">
-              <a:buSzPct val="100000"/>
-              <a:buChar char="•"/>
-            </a:pPr>
-            <a:r>
-              <a:rPr lang="en-US" sz="1800" dirty="0">
-                <a:solidFill>
-                  <a:schemeClr val="bg2"/>
-                </a:solidFill>
-              </a:rPr>
-              <a:t>134 directed checks and 3,600 replayed vectors confirm the override behaviour in simulation.</a:t>
-            </a:r>
-            <a:endParaRPr lang="en-US" sz="1800" dirty="0"/>
           </a:p>
         </p:txBody>
       </p:sp>
@@ -6510,6 +9130,144 @@
 </p:sld>
 </file>
 
+<file path=ppt/slides/slide20.xml><?xml version="1.0" encoding="utf-8"?>
+<p:sld xmlns:a="http://schemas.openxmlformats.org/drawingml/2006/main" xmlns:r="http://schemas.openxmlformats.org/officeDocument/2006/relationships" xmlns:p="http://schemas.openxmlformats.org/presentationml/2006/main">
+  <p:cSld name="Slide 20">
+    <p:spTree>
+      <p:nvGrpSpPr>
+        <p:cNvPr id="1" name=""/>
+        <p:cNvGrpSpPr/>
+        <p:nvPr/>
+      </p:nvGrpSpPr>
+      <p:grpSpPr>
+        <a:xfrm>
+          <a:off x="0" y="0"/>
+          <a:ext cx="0" cy="0"/>
+          <a:chOff x="0" y="0"/>
+          <a:chExt cx="0" cy="0"/>
+        </a:xfrm>
+      </p:grpSpPr>
+      <p:sp>
+        <p:nvSpPr>
+          <p:cNvPr id="2" name="Text 0"/>
+          <p:cNvSpPr/>
+          <p:nvPr>
+            <p:ph idx="100" type="title" hasCustomPrompt="1"/>
+          </p:nvPr>
+        </p:nvSpPr>
+        <p:spPr>
+          <a:xfrm>
+            <a:off x="548640" y="1188720"/>
+            <a:ext cx="7863840" cy="1554480"/>
+          </a:xfrm>
+          <a:prstGeom prst="rect">
+            <a:avLst/>
+          </a:prstGeom>
+          <a:noFill/>
+          <a:ln/>
+        </p:spPr>
+        <p:txBody>
+          <a:bodyPr wrap="square" lIns="0" tIns="0" rIns="0" bIns="0" rtlCol="0" anchor="t"/>
+          <a:lstStyle/>
+          <a:p>
+            <a:pPr algn="l" indent="0" marL="0">
+              <a:buNone/>
+            </a:pPr>
+            <a:r>
+              <a:rPr lang="en-US" sz="4000" b="1" dirty="0">
+                <a:solidFill>
+                  <a:schemeClr val="bg1"/>
+                </a:solidFill>
+              </a:rPr>
+              <a:t>Conclusion</a:t>
+            </a:r>
+            <a:endParaRPr lang="en-US" sz="4000" dirty="0"/>
+          </a:p>
+        </p:txBody>
+      </p:sp>
+      <p:sp>
+        <p:nvSpPr>
+          <p:cNvPr id="3" name="Text 0"/>
+          <p:cNvSpPr/>
+          <p:nvPr>
+            <p:ph idx="101" type="body" hasCustomPrompt="1"/>
+          </p:nvPr>
+        </p:nvSpPr>
+        <p:spPr>
+          <a:xfrm>
+            <a:off x="548640" y="2926080"/>
+            <a:ext cx="7863840" cy="1097280"/>
+          </a:xfrm>
+          <a:prstGeom prst="rect">
+            <a:avLst/>
+          </a:prstGeom>
+          <a:noFill/>
+          <a:ln/>
+        </p:spPr>
+        <p:txBody>
+          <a:bodyPr wrap="square" lIns="0" tIns="0" rIns="0" bIns="0" rtlCol="0" anchor="t"/>
+          <a:lstStyle/>
+          <a:p>
+            <a:pPr marL="342900" indent="-342900">
+              <a:spcAft>
+                <a:spcPts val="800"/>
+              </a:spcAft>
+              <a:buSzPct val="100000"/>
+              <a:buChar char="•"/>
+            </a:pPr>
+            <a:r>
+              <a:rPr lang="en-US" sz="1800" dirty="0">
+                <a:solidFill>
+                  <a:schemeClr val="bg2"/>
+                </a:solidFill>
+              </a:rPr>
+              <a:t>A deterministic FPGA reflex path enforces the hard limits.</a:t>
+            </a:r>
+            <a:endParaRPr lang="en-US" sz="1800" dirty="0"/>
+          </a:p>
+          <a:p>
+            <a:pPr marL="342900" indent="-342900">
+              <a:spcAft>
+                <a:spcPts val="800"/>
+              </a:spcAft>
+              <a:buSzPct val="100000"/>
+              <a:buChar char="•"/>
+            </a:pPr>
+            <a:r>
+              <a:rPr lang="en-US" sz="1800" dirty="0">
+                <a:solidFill>
+                  <a:schemeClr val="bg2"/>
+                </a:solidFill>
+              </a:rPr>
+              <a:t>The AI path adds contact classification and can only lower the command.</a:t>
+            </a:r>
+            <a:endParaRPr lang="en-US" sz="1800" dirty="0"/>
+          </a:p>
+          <a:p>
+            <a:pPr marL="342900" indent="-342900">
+              <a:buSzPct val="100000"/>
+              <a:buChar char="•"/>
+            </a:pPr>
+            <a:r>
+              <a:rPr lang="en-US" sz="1800" dirty="0">
+                <a:solidFill>
+                  <a:schemeClr val="bg2"/>
+                </a:solidFill>
+              </a:rPr>
+              <a:t>134 directed checks and 3,600 replayed vectors confirm the override behaviour in simulation.</a:t>
+            </a:r>
+            <a:endParaRPr lang="en-US" sz="1800" dirty="0"/>
+          </a:p>
+        </p:txBody>
+      </p:sp>
+    </p:spTree>
+  </p:cSld>
+  <p:clrMapOvr>
+    <a:masterClrMapping/>
+  </p:clrMapOvr>
+</p:sld>
+</file>
+
 <file path=ppt/slides/slide3.xml><?xml version="1.0" encoding="utf-8"?>
 <p:sld xmlns:a="http://schemas.openxmlformats.org/drawingml/2006/main" xmlns:r="http://schemas.openxmlformats.org/officeDocument/2006/relationships" xmlns:p="http://schemas.openxmlformats.org/presentationml/2006/main">
   <p:cSld name="Slide 3">
@@ -7507,26 +10265,50 @@
                   <a:schemeClr val="tx2"/>
                 </a:solidFill>
               </a:rPr>
-              <a:t>Safety Governor rules</a:t>
+              <a:t>Circuit diagram</a:t>
             </a:r>
             <a:endParaRPr lang="en-US" sz="3600" dirty="0"/>
           </a:p>
         </p:txBody>
       </p:sp>
-      <p:sp>
-        <p:nvSpPr>
-          <p:cNvPr id="3" name="card 1  Maximum force"/>
+      <p:pic>
+        <p:nvPicPr>
+          <p:cNvPr id="3" name="Image 0" descr="Wiring schematic: FSR divider, Pmod AD1, PYNQ-Z2, DRV8871, motor, e-stop">    </p:cNvPr>
+          <p:cNvPicPr>
+            <a:picLocks noChangeAspect="1"/>
+          </p:cNvPicPr>
+          <p:nvPr/>
+        </p:nvPicPr>
+        <p:blipFill>
+          <a:blip r:embed="rId1"/>
+          <a:stretch>
+            <a:fillRect/>
+          </a:stretch>
+        </p:blipFill>
+        <p:spPr>
+          <a:xfrm>
+            <a:off x="457200" y="1051560"/>
+            <a:ext cx="5852160" cy="3776472"/>
+          </a:xfrm>
+          <a:prstGeom prst="rect">
+            <a:avLst/>
+          </a:prstGeom>
+        </p:spPr>
+      </p:pic>
+      <p:sp>
+        <p:nvSpPr>
+          <p:cNvPr id="4" name="card Sensing"/>
           <p:cNvSpPr/>
           <p:nvPr/>
         </p:nvSpPr>
         <p:spPr>
           <a:xfrm>
-            <a:off x="457200" y="1188720"/>
-            <a:ext cx="2606040" cy="1600200"/>
+            <a:off x="6492240" y="1188720"/>
+            <a:ext cx="2194560" cy="1005840"/>
           </a:xfrm>
           <a:prstGeom prst="roundRect">
             <a:avLst>
-              <a:gd name="adj" fmla="val 4571"/>
+              <a:gd name="adj" fmla="val 7273"/>
             </a:avLst>
           </a:prstGeom>
           <a:solidFill>
@@ -7542,14 +10324,14 @@
       </p:sp>
       <p:sp>
         <p:nvSpPr>
-          <p:cNvPr id="4" name="Text 2"/>
+          <p:cNvPr id="5" name="Text 2"/>
           <p:cNvSpPr txBox="1"/>
           <p:nvPr/>
         </p:nvSpPr>
         <p:spPr>
           <a:xfrm>
-            <a:off x="594360" y="1298448"/>
-            <a:ext cx="2331720" cy="320040"/>
+            <a:off x="6629400" y="1298448"/>
+            <a:ext cx="1920240" cy="320040"/>
           </a:xfrm>
           <a:prstGeom prst="rect">
             <a:avLst/>
@@ -7565,27 +10347,27 @@
               <a:buNone/>
             </a:pPr>
             <a:r>
-              <a:rPr lang="en-US" sz="1600" b="1" dirty="0">
+              <a:rPr lang="en-US" sz="1400" b="1" dirty="0">
                 <a:solidFill>
                   <a:schemeClr val="tx2"/>
                 </a:solidFill>
               </a:rPr>
-              <a:t>1  Maximum force</a:t>
-            </a:r>
-            <a:endParaRPr lang="en-US" sz="1600" dirty="0"/>
-          </a:p>
-        </p:txBody>
-      </p:sp>
-      <p:sp>
-        <p:nvSpPr>
-          <p:cNvPr id="5" name="Text 3"/>
+              <a:t>Sensing</a:t>
+            </a:r>
+            <a:endParaRPr lang="en-US" sz="1400" dirty="0"/>
+          </a:p>
+        </p:txBody>
+      </p:sp>
+      <p:sp>
+        <p:nvSpPr>
+          <p:cNvPr id="6" name="Text 3"/>
           <p:cNvSpPr txBox="1"/>
           <p:nvPr/>
         </p:nvSpPr>
         <p:spPr>
           <a:xfrm>
-            <a:off x="594360" y="1645920"/>
-            <a:ext cx="2331720" cy="1051560"/>
+            <a:off x="6629400" y="1645920"/>
+            <a:ext cx="1920240" cy="457200"/>
           </a:xfrm>
           <a:prstGeom prst="rect">
             <a:avLst/>
@@ -7606,7 +10388,7 @@
                   <a:schemeClr val="tx1"/>
                 </a:solidFill>
               </a:rPr>
-              <a:t>Force at or above FORCE_MAX trips the safe state, with release hysteresis.</a:t>
+              <a:t>FSR divider into SPI ADC.</a:t>
             </a:r>
             <a:endParaRPr lang="en-US" sz="1400" dirty="0"/>
           </a:p>
@@ -7614,18 +10396,18 @@
       </p:sp>
       <p:sp>
         <p:nvSpPr>
-          <p:cNvPr id="6" name="card 2  Sensor fault"/>
+          <p:cNvPr id="7" name="card Actuation"/>
           <p:cNvSpPr/>
           <p:nvPr/>
         </p:nvSpPr>
         <p:spPr>
           <a:xfrm>
-            <a:off x="3264408" y="1188720"/>
-            <a:ext cx="2606040" cy="1600200"/>
+            <a:off x="6492240" y="2331720"/>
+            <a:ext cx="2194560" cy="1005840"/>
           </a:xfrm>
           <a:prstGeom prst="roundRect">
             <a:avLst>
-              <a:gd name="adj" fmla="val 4571"/>
+              <a:gd name="adj" fmla="val 7273"/>
             </a:avLst>
           </a:prstGeom>
           <a:solidFill>
@@ -7641,14 +10423,14 @@
       </p:sp>
       <p:sp>
         <p:nvSpPr>
-          <p:cNvPr id="7" name="Text 5"/>
+          <p:cNvPr id="8" name="Text 5"/>
           <p:cNvSpPr txBox="1"/>
           <p:nvPr/>
         </p:nvSpPr>
         <p:spPr>
           <a:xfrm>
-            <a:off x="3401568" y="1298448"/>
-            <a:ext cx="2331720" cy="320040"/>
+            <a:off x="6629400" y="2441448"/>
+            <a:ext cx="1920240" cy="320040"/>
           </a:xfrm>
           <a:prstGeom prst="rect">
             <a:avLst/>
@@ -7664,27 +10446,27 @@
               <a:buNone/>
             </a:pPr>
             <a:r>
-              <a:rPr lang="en-US" sz="1600" b="1" dirty="0">
+              <a:rPr lang="en-US" sz="1400" b="1" dirty="0">
                 <a:solidFill>
                   <a:schemeClr val="tx2"/>
                 </a:solidFill>
               </a:rPr>
-              <a:t>2  Sensor fault</a:t>
-            </a:r>
-            <a:endParaRPr lang="en-US" sz="1600" dirty="0"/>
-          </a:p>
-        </p:txBody>
-      </p:sp>
-      <p:sp>
-        <p:nvSpPr>
-          <p:cNvPr id="8" name="Text 6"/>
+              <a:t>Actuation</a:t>
+            </a:r>
+            <a:endParaRPr lang="en-US" sz="1400" dirty="0"/>
+          </a:p>
+        </p:txBody>
+      </p:sp>
+      <p:sp>
+        <p:nvSpPr>
+          <p:cNvPr id="9" name="Text 6"/>
           <p:cNvSpPr txBox="1"/>
           <p:nvPr/>
         </p:nvSpPr>
         <p:spPr>
           <a:xfrm>
-            <a:off x="3401568" y="1645920"/>
-            <a:ext cx="2331720" cy="1051560"/>
+            <a:off x="6629400" y="2788920"/>
+            <a:ext cx="1920240" cy="457200"/>
           </a:xfrm>
           <a:prstGeom prst="rect">
             <a:avLst/>
@@ -7705,7 +10487,7 @@
                   <a:schemeClr val="tx1"/>
                 </a:solidFill>
               </a:rPr>
-              <a:t>Persistent invalid readings or a silent ADC latch a fault.</a:t>
+              <a:t>PWM to driver, fused supply.</a:t>
             </a:r>
             <a:endParaRPr lang="en-US" sz="1400" dirty="0"/>
           </a:p>
@@ -7713,315 +10495,18 @@
       </p:sp>
       <p:sp>
         <p:nvSpPr>
-          <p:cNvPr id="9" name="card 3  Emergency stop"/>
+          <p:cNvPr id="10" name="card Fail-safe"/>
           <p:cNvSpPr/>
           <p:nvPr/>
         </p:nvSpPr>
         <p:spPr>
           <a:xfrm>
-            <a:off x="6071616" y="1188720"/>
-            <a:ext cx="2606040" cy="1600200"/>
+            <a:off x="6492240" y="3474720"/>
+            <a:ext cx="2194560" cy="1005840"/>
           </a:xfrm>
           <a:prstGeom prst="roundRect">
             <a:avLst>
-              <a:gd name="adj" fmla="val 4571"/>
-            </a:avLst>
-          </a:prstGeom>
-          <a:solidFill>
-            <a:schemeClr val="bg2"/>
-          </a:solidFill>
-          <a:ln w="12700">
-            <a:solidFill>
-              <a:schemeClr val="bg2"/>
-            </a:solidFill>
-            <a:prstDash val="solid"/>
-          </a:ln>
-        </p:spPr>
-      </p:sp>
-      <p:sp>
-        <p:nvSpPr>
-          <p:cNvPr id="10" name="Text 8"/>
-          <p:cNvSpPr txBox="1"/>
-          <p:nvPr/>
-        </p:nvSpPr>
-        <p:spPr>
-          <a:xfrm>
-            <a:off x="6208776" y="1298448"/>
-            <a:ext cx="2331720" cy="320040"/>
-          </a:xfrm>
-          <a:prstGeom prst="rect">
-            <a:avLst/>
-          </a:prstGeom>
-          <a:noFill/>
-          <a:ln/>
-        </p:spPr>
-        <p:txBody>
-          <a:bodyPr wrap="square" lIns="0" tIns="0" rIns="0" bIns="0" rtlCol="0" anchor="t"/>
-          <a:lstStyle/>
-          <a:p>
-            <a:pPr indent="0" marL="0">
-              <a:buNone/>
-            </a:pPr>
-            <a:r>
-              <a:rPr lang="en-US" sz="1600" b="1" dirty="0">
-                <a:solidFill>
-                  <a:schemeClr val="tx2"/>
-                </a:solidFill>
-              </a:rPr>
-              <a:t>3  Emergency stop</a:t>
-            </a:r>
-            <a:endParaRPr lang="en-US" sz="1600" dirty="0"/>
-          </a:p>
-        </p:txBody>
-      </p:sp>
-      <p:sp>
-        <p:nvSpPr>
-          <p:cNvPr id="11" name="Text 9"/>
-          <p:cNvSpPr txBox="1"/>
-          <p:nvPr/>
-        </p:nvSpPr>
-        <p:spPr>
-          <a:xfrm>
-            <a:off x="6208776" y="1645920"/>
-            <a:ext cx="2331720" cy="1051560"/>
-          </a:xfrm>
-          <a:prstGeom prst="rect">
-            <a:avLst/>
-          </a:prstGeom>
-          <a:noFill/>
-          <a:ln/>
-        </p:spPr>
-        <p:txBody>
-          <a:bodyPr wrap="square" lIns="0" tIns="0" rIns="0" bIns="0" rtlCol="0" anchor="t"/>
-          <a:lstStyle/>
-          <a:p>
-            <a:pPr indent="0" marL="0">
-              <a:buNone/>
-            </a:pPr>
-            <a:r>
-              <a:rPr lang="en-US" sz="1400" dirty="0">
-                <a:solidFill>
-                  <a:schemeClr val="tx1"/>
-                </a:solidFill>
-              </a:rPr>
-              <a:t>Fail-safe input: an open contact or cut wire stops the output.</a:t>
-            </a:r>
-            <a:endParaRPr lang="en-US" sz="1400" dirty="0"/>
-          </a:p>
-        </p:txBody>
-      </p:sp>
-      <p:sp>
-        <p:nvSpPr>
-          <p:cNvPr id="12" name="card 4  Invalid ADC value"/>
-          <p:cNvSpPr/>
-          <p:nvPr/>
-        </p:nvSpPr>
-        <p:spPr>
-          <a:xfrm>
-            <a:off x="457200" y="2926080"/>
-            <a:ext cx="2606040" cy="1600200"/>
-          </a:xfrm>
-          <a:prstGeom prst="roundRect">
-            <a:avLst>
-              <a:gd name="adj" fmla="val 4571"/>
-            </a:avLst>
-          </a:prstGeom>
-          <a:solidFill>
-            <a:schemeClr val="bg2"/>
-          </a:solidFill>
-          <a:ln w="12700">
-            <a:solidFill>
-              <a:schemeClr val="bg2"/>
-            </a:solidFill>
-            <a:prstDash val="solid"/>
-          </a:ln>
-        </p:spPr>
-      </p:sp>
-      <p:sp>
-        <p:nvSpPr>
-          <p:cNvPr id="13" name="Text 11"/>
-          <p:cNvSpPr txBox="1"/>
-          <p:nvPr/>
-        </p:nvSpPr>
-        <p:spPr>
-          <a:xfrm>
-            <a:off x="594360" y="3035808"/>
-            <a:ext cx="2331720" cy="320040"/>
-          </a:xfrm>
-          <a:prstGeom prst="rect">
-            <a:avLst/>
-          </a:prstGeom>
-          <a:noFill/>
-          <a:ln/>
-        </p:spPr>
-        <p:txBody>
-          <a:bodyPr wrap="square" lIns="0" tIns="0" rIns="0" bIns="0" rtlCol="0" anchor="t"/>
-          <a:lstStyle/>
-          <a:p>
-            <a:pPr indent="0" marL="0">
-              <a:buNone/>
-            </a:pPr>
-            <a:r>
-              <a:rPr lang="en-US" sz="1600" b="1" dirty="0">
-                <a:solidFill>
-                  <a:schemeClr val="tx2"/>
-                </a:solidFill>
-              </a:rPr>
-              <a:t>4  Invalid ADC value</a:t>
-            </a:r>
-            <a:endParaRPr lang="en-US" sz="1600" dirty="0"/>
-          </a:p>
-        </p:txBody>
-      </p:sp>
-      <p:sp>
-        <p:nvSpPr>
-          <p:cNvPr id="14" name="Text 12"/>
-          <p:cNvSpPr txBox="1"/>
-          <p:nvPr/>
-        </p:nvSpPr>
-        <p:spPr>
-          <a:xfrm>
-            <a:off x="594360" y="3383280"/>
-            <a:ext cx="2331720" cy="1051560"/>
-          </a:xfrm>
-          <a:prstGeom prst="rect">
-            <a:avLst/>
-          </a:prstGeom>
-          <a:noFill/>
-          <a:ln/>
-        </p:spPr>
-        <p:txBody>
-          <a:bodyPr wrap="square" lIns="0" tIns="0" rIns="0" bIns="0" rtlCol="0" anchor="t"/>
-          <a:lstStyle/>
-          <a:p>
-            <a:pPr indent="0" marL="0">
-              <a:buNone/>
-            </a:pPr>
-            <a:r>
-              <a:rPr lang="en-US" sz="1400" dirty="0">
-                <a:solidFill>
-                  <a:schemeClr val="tx1"/>
-                </a:solidFill>
-              </a:rPr>
-              <a:t>Frame errors and railed readings are rejected immediately.</a:t>
-            </a:r>
-            <a:endParaRPr lang="en-US" sz="1400" dirty="0"/>
-          </a:p>
-        </p:txBody>
-      </p:sp>
-      <p:sp>
-        <p:nvSpPr>
-          <p:cNvPr id="15" name="card 5  Safe output state"/>
-          <p:cNvSpPr/>
-          <p:nvPr/>
-        </p:nvSpPr>
-        <p:spPr>
-          <a:xfrm>
-            <a:off x="3264408" y="2926080"/>
-            <a:ext cx="2606040" cy="1600200"/>
-          </a:xfrm>
-          <a:prstGeom prst="roundRect">
-            <a:avLst>
-              <a:gd name="adj" fmla="val 4571"/>
-            </a:avLst>
-          </a:prstGeom>
-          <a:solidFill>
-            <a:schemeClr val="bg2"/>
-          </a:solidFill>
-          <a:ln w="12700">
-            <a:solidFill>
-              <a:schemeClr val="bg2"/>
-            </a:solidFill>
-            <a:prstDash val="solid"/>
-          </a:ln>
-        </p:spPr>
-      </p:sp>
-      <p:sp>
-        <p:nvSpPr>
-          <p:cNvPr id="16" name="Text 14"/>
-          <p:cNvSpPr txBox="1"/>
-          <p:nvPr/>
-        </p:nvSpPr>
-        <p:spPr>
-          <a:xfrm>
-            <a:off x="3401568" y="3035808"/>
-            <a:ext cx="2331720" cy="320040"/>
-          </a:xfrm>
-          <a:prstGeom prst="rect">
-            <a:avLst/>
-          </a:prstGeom>
-          <a:noFill/>
-          <a:ln/>
-        </p:spPr>
-        <p:txBody>
-          <a:bodyPr wrap="square" lIns="0" tIns="0" rIns="0" bIns="0" rtlCol="0" anchor="t"/>
-          <a:lstStyle/>
-          <a:p>
-            <a:pPr indent="0" marL="0">
-              <a:buNone/>
-            </a:pPr>
-            <a:r>
-              <a:rPr lang="en-US" sz="1600" b="1" dirty="0">
-                <a:solidFill>
-                  <a:schemeClr val="tx2"/>
-                </a:solidFill>
-              </a:rPr>
-              <a:t>5  Safe output state</a:t>
-            </a:r>
-            <a:endParaRPr lang="en-US" sz="1600" dirty="0"/>
-          </a:p>
-        </p:txBody>
-      </p:sp>
-      <p:sp>
-        <p:nvSpPr>
-          <p:cNvPr id="17" name="Text 15"/>
-          <p:cNvSpPr txBox="1"/>
-          <p:nvPr/>
-        </p:nvSpPr>
-        <p:spPr>
-          <a:xfrm>
-            <a:off x="3401568" y="3383280"/>
-            <a:ext cx="2331720" cy="1051560"/>
-          </a:xfrm>
-          <a:prstGeom prst="rect">
-            <a:avLst/>
-          </a:prstGeom>
-          <a:noFill/>
-          <a:ln/>
-        </p:spPr>
-        <p:txBody>
-          <a:bodyPr wrap="square" lIns="0" tIns="0" rIns="0" bIns="0" rtlCol="0" anchor="t"/>
-          <a:lstStyle/>
-          <a:p>
-            <a:pPr indent="0" marL="0">
-              <a:buNone/>
-            </a:pPr>
-            <a:r>
-              <a:rPr lang="en-US" sz="1400" dirty="0">
-                <a:solidFill>
-                  <a:schemeClr val="tx1"/>
-                </a:solidFill>
-              </a:rPr>
-              <a:t>PWM forced low on the next clock, not at the next period.</a:t>
-            </a:r>
-            <a:endParaRPr lang="en-US" sz="1400" dirty="0"/>
-          </a:p>
-        </p:txBody>
-      </p:sp>
-      <p:sp>
-        <p:nvSpPr>
-          <p:cNvPr id="18" name="card 6  AI override"/>
-          <p:cNvSpPr/>
-          <p:nvPr/>
-        </p:nvSpPr>
-        <p:spPr>
-          <a:xfrm>
-            <a:off x="6071616" y="2926080"/>
-            <a:ext cx="2606040" cy="1600200"/>
-          </a:xfrm>
-          <a:prstGeom prst="roundRect">
-            <a:avLst>
-              <a:gd name="adj" fmla="val 4571"/>
+              <a:gd name="adj" fmla="val 7273"/>
             </a:avLst>
           </a:prstGeom>
           <a:solidFill>
@@ -8037,14 +10522,14 @@
       </p:sp>
       <p:sp>
         <p:nvSpPr>
-          <p:cNvPr id="19" name="Text 17"/>
+          <p:cNvPr id="11" name="Text 8"/>
           <p:cNvSpPr txBox="1"/>
           <p:nvPr/>
         </p:nvSpPr>
         <p:spPr>
           <a:xfrm>
-            <a:off x="6208776" y="3035808"/>
-            <a:ext cx="2331720" cy="320040"/>
+            <a:off x="6629400" y="3584448"/>
+            <a:ext cx="1920240" cy="320040"/>
           </a:xfrm>
           <a:prstGeom prst="rect">
             <a:avLst/>
@@ -8060,27 +10545,27 @@
               <a:buNone/>
             </a:pPr>
             <a:r>
-              <a:rPr lang="en-US" sz="1600" b="1" dirty="0">
+              <a:rPr lang="en-US" sz="1400" b="1" dirty="0">
                 <a:solidFill>
                   <a:schemeClr val="tx2"/>
                 </a:solidFill>
               </a:rPr>
-              <a:t>6  AI override</a:t>
-            </a:r>
-            <a:endParaRPr lang="en-US" sz="1600" dirty="0"/>
-          </a:p>
-        </p:txBody>
-      </p:sp>
-      <p:sp>
-        <p:nvSpPr>
-          <p:cNvPr id="20" name="Text 18"/>
+              <a:t>Fail-safe</a:t>
+            </a:r>
+            <a:endParaRPr lang="en-US" sz="1400" dirty="0"/>
+          </a:p>
+        </p:txBody>
+      </p:sp>
+      <p:sp>
+        <p:nvSpPr>
+          <p:cNvPr id="12" name="Text 9"/>
           <p:cNvSpPr txBox="1"/>
           <p:nvPr/>
         </p:nvSpPr>
         <p:spPr>
           <a:xfrm>
-            <a:off x="6208776" y="3383280"/>
-            <a:ext cx="2331720" cy="1051560"/>
+            <a:off x="6629400" y="3931920"/>
+            <a:ext cx="1920240" cy="457200"/>
           </a:xfrm>
           <a:prstGeom prst="rect">
             <a:avLst/>
@@ -8101,7 +10586,7 @@
                   <a:schemeClr val="tx1"/>
                 </a:solidFill>
               </a:rPr>
-              <a:t>AI is ignored when invalid or when any hard limit trips.</a:t>
+              <a:t>NC e-stop, common ground.</a:t>
             </a:r>
             <a:endParaRPr lang="en-US" sz="1400" dirty="0"/>
           </a:p>
@@ -8209,6 +10694,1902 @@
                   <a:schemeClr val="tx2"/>
                 </a:solidFill>
               </a:rPr>
+              <a:t>Hardware: control and sensing</a:t>
+            </a:r>
+            <a:endParaRPr lang="en-US" sz="3600" dirty="0"/>
+          </a:p>
+        </p:txBody>
+      </p:sp>
+      <p:sp>
+        <p:nvSpPr>
+          <p:cNvPr id="3" name="Shape 1"/>
+          <p:cNvSpPr/>
+          <p:nvPr/>
+        </p:nvSpPr>
+        <p:spPr>
+          <a:xfrm>
+            <a:off x="457200" y="1097280"/>
+            <a:ext cx="2606040" cy="3611880"/>
+          </a:xfrm>
+          <a:prstGeom prst="roundRect">
+            <a:avLst>
+              <a:gd name="adj" fmla="val 2807"/>
+            </a:avLst>
+          </a:prstGeom>
+          <a:solidFill>
+            <a:schemeClr val="bg2"/>
+          </a:solidFill>
+          <a:ln w="12700">
+            <a:solidFill>
+              <a:schemeClr val="bg2"/>
+            </a:solidFill>
+            <a:prstDash val="solid"/>
+          </a:ln>
+        </p:spPr>
+      </p:sp>
+      <p:pic>
+        <p:nvPicPr>
+          <p:cNvPr id="4" name="Image 0" descr="Photo placeholder: PYNQ-Z2">    </p:cNvPr>
+          <p:cNvPicPr>
+            <a:picLocks noChangeAspect="1"/>
+          </p:cNvPicPr>
+          <p:nvPr/>
+        </p:nvPicPr>
+        <p:blipFill>
+          <a:blip r:embed="rId1"/>
+          <a:stretch>
+            <a:fillRect/>
+          </a:stretch>
+        </p:blipFill>
+        <p:spPr>
+          <a:xfrm>
+            <a:off x="594360" y="1234440"/>
+            <a:ext cx="2331720" cy="1371600"/>
+          </a:xfrm>
+          <a:prstGeom prst="rect">
+            <a:avLst/>
+          </a:prstGeom>
+        </p:spPr>
+      </p:pic>
+      <p:sp>
+        <p:nvSpPr>
+          <p:cNvPr id="5" name="Text 2"/>
+          <p:cNvSpPr txBox="1"/>
+          <p:nvPr/>
+        </p:nvSpPr>
+        <p:spPr>
+          <a:xfrm>
+            <a:off x="594360" y="2697480"/>
+            <a:ext cx="2331720" cy="320040"/>
+          </a:xfrm>
+          <a:prstGeom prst="rect">
+            <a:avLst/>
+          </a:prstGeom>
+          <a:noFill/>
+          <a:ln/>
+        </p:spPr>
+        <p:txBody>
+          <a:bodyPr wrap="square" lIns="0" tIns="0" rIns="0" bIns="0" rtlCol="0" anchor="t"/>
+          <a:lstStyle/>
+          <a:p>
+            <a:pPr indent="0" marL="0">
+              <a:buNone/>
+            </a:pPr>
+            <a:r>
+              <a:rPr lang="en-US" sz="1600" b="1" dirty="0">
+                <a:solidFill>
+                  <a:schemeClr val="tx2"/>
+                </a:solidFill>
+              </a:rPr>
+              <a:t>PYNQ-Z2</a:t>
+            </a:r>
+            <a:endParaRPr lang="en-US" sz="1600" dirty="0"/>
+          </a:p>
+        </p:txBody>
+      </p:sp>
+      <p:sp>
+        <p:nvSpPr>
+          <p:cNvPr id="6" name="Text 3"/>
+          <p:cNvSpPr txBox="1"/>
+          <p:nvPr/>
+        </p:nvSpPr>
+        <p:spPr>
+          <a:xfrm>
+            <a:off x="594360" y="3063240"/>
+            <a:ext cx="2331720" cy="1600200"/>
+          </a:xfrm>
+          <a:prstGeom prst="rect">
+            <a:avLst/>
+          </a:prstGeom>
+          <a:noFill/>
+          <a:ln/>
+        </p:spPr>
+        <p:txBody>
+          <a:bodyPr wrap="square" lIns="0" tIns="0" rIns="0" bIns="0" rtlCol="0" anchor="t"/>
+          <a:lstStyle/>
+          <a:p>
+            <a:pPr marL="342900" indent="-342900">
+              <a:spcAft>
+                <a:spcPts val="600"/>
+              </a:spcAft>
+              <a:buSzPct val="100000"/>
+              <a:buChar char="•"/>
+            </a:pPr>
+            <a:r>
+              <a:rPr lang="en-US" sz="1400" dirty="0">
+                <a:solidFill>
+                  <a:schemeClr val="tx1"/>
+                </a:solidFill>
+              </a:rPr>
+              <a:t>Zynq-7020: dual ARM A9 + FPGA</a:t>
+            </a:r>
+            <a:endParaRPr lang="en-US" sz="1400" dirty="0"/>
+          </a:p>
+          <a:p>
+            <a:pPr marL="342900" indent="-342900">
+              <a:spcAft>
+                <a:spcPts val="600"/>
+              </a:spcAft>
+              <a:buSzPct val="100000"/>
+              <a:buChar char="•"/>
+            </a:pPr>
+            <a:r>
+              <a:rPr lang="en-US" sz="1400" dirty="0">
+                <a:solidFill>
+                  <a:schemeClr val="tx1"/>
+                </a:solidFill>
+              </a:rPr>
+              <a:t>PL: reflex path; PS: AI/ML</a:t>
+            </a:r>
+            <a:endParaRPr lang="en-US" sz="1400" dirty="0"/>
+          </a:p>
+          <a:p>
+            <a:pPr marL="342900" indent="-342900">
+              <a:spcAft>
+                <a:spcPts val="600"/>
+              </a:spcAft>
+              <a:buSzPct val="100000"/>
+              <a:buChar char="•"/>
+            </a:pPr>
+            <a:r>
+              <a:rPr lang="en-US" sz="1400" dirty="0">
+                <a:solidFill>
+                  <a:schemeClr val="tx1"/>
+                </a:solidFill>
+              </a:rPr>
+              <a:t>Pmod and Arduino headers</a:t>
+            </a:r>
+            <a:endParaRPr lang="en-US" sz="1400" dirty="0"/>
+          </a:p>
+        </p:txBody>
+      </p:sp>
+      <p:sp>
+        <p:nvSpPr>
+          <p:cNvPr id="7" name="Shape 4"/>
+          <p:cNvSpPr/>
+          <p:nvPr/>
+        </p:nvSpPr>
+        <p:spPr>
+          <a:xfrm>
+            <a:off x="3264408" y="1097280"/>
+            <a:ext cx="2606040" cy="3611880"/>
+          </a:xfrm>
+          <a:prstGeom prst="roundRect">
+            <a:avLst>
+              <a:gd name="adj" fmla="val 2807"/>
+            </a:avLst>
+          </a:prstGeom>
+          <a:solidFill>
+            <a:schemeClr val="bg2"/>
+          </a:solidFill>
+          <a:ln w="12700">
+            <a:solidFill>
+              <a:schemeClr val="bg2"/>
+            </a:solidFill>
+            <a:prstDash val="solid"/>
+          </a:ln>
+        </p:spPr>
+      </p:sp>
+      <p:pic>
+        <p:nvPicPr>
+          <p:cNvPr id="8" name="Image 1" descr="Photo placeholder: Pmod AD1">    </p:cNvPr>
+          <p:cNvPicPr>
+            <a:picLocks noChangeAspect="1"/>
+          </p:cNvPicPr>
+          <p:nvPr/>
+        </p:nvPicPr>
+        <p:blipFill>
+          <a:blip r:embed="rId2"/>
+          <a:stretch>
+            <a:fillRect/>
+          </a:stretch>
+        </p:blipFill>
+        <p:spPr>
+          <a:xfrm>
+            <a:off x="3401568" y="1234440"/>
+            <a:ext cx="2331720" cy="1371600"/>
+          </a:xfrm>
+          <a:prstGeom prst="rect">
+            <a:avLst/>
+          </a:prstGeom>
+        </p:spPr>
+      </p:pic>
+      <p:sp>
+        <p:nvSpPr>
+          <p:cNvPr id="9" name="Text 5"/>
+          <p:cNvSpPr txBox="1"/>
+          <p:nvPr/>
+        </p:nvSpPr>
+        <p:spPr>
+          <a:xfrm>
+            <a:off x="3401568" y="2697480"/>
+            <a:ext cx="2331720" cy="320040"/>
+          </a:xfrm>
+          <a:prstGeom prst="rect">
+            <a:avLst/>
+          </a:prstGeom>
+          <a:noFill/>
+          <a:ln/>
+        </p:spPr>
+        <p:txBody>
+          <a:bodyPr wrap="square" lIns="0" tIns="0" rIns="0" bIns="0" rtlCol="0" anchor="t"/>
+          <a:lstStyle/>
+          <a:p>
+            <a:pPr indent="0" marL="0">
+              <a:buNone/>
+            </a:pPr>
+            <a:r>
+              <a:rPr lang="en-US" sz="1600" b="1" dirty="0">
+                <a:solidFill>
+                  <a:schemeClr val="tx2"/>
+                </a:solidFill>
+              </a:rPr>
+              <a:t>Pmod AD1</a:t>
+            </a:r>
+            <a:endParaRPr lang="en-US" sz="1600" dirty="0"/>
+          </a:p>
+        </p:txBody>
+      </p:sp>
+      <p:sp>
+        <p:nvSpPr>
+          <p:cNvPr id="10" name="Text 6"/>
+          <p:cNvSpPr txBox="1"/>
+          <p:nvPr/>
+        </p:nvSpPr>
+        <p:spPr>
+          <a:xfrm>
+            <a:off x="3401568" y="3063240"/>
+            <a:ext cx="2331720" cy="1600200"/>
+          </a:xfrm>
+          <a:prstGeom prst="rect">
+            <a:avLst/>
+          </a:prstGeom>
+          <a:noFill/>
+          <a:ln/>
+        </p:spPr>
+        <p:txBody>
+          <a:bodyPr wrap="square" lIns="0" tIns="0" rIns="0" bIns="0" rtlCol="0" anchor="t"/>
+          <a:lstStyle/>
+          <a:p>
+            <a:pPr marL="342900" indent="-342900">
+              <a:spcAft>
+                <a:spcPts val="600"/>
+              </a:spcAft>
+              <a:buSzPct val="100000"/>
+              <a:buChar char="•"/>
+            </a:pPr>
+            <a:r>
+              <a:rPr lang="en-US" sz="1400" dirty="0">
+                <a:solidFill>
+                  <a:schemeClr val="tx1"/>
+                </a:solidFill>
+              </a:rPr>
+              <a:t>2 x AD7476A, 12-bit</a:t>
+            </a:r>
+            <a:endParaRPr lang="en-US" sz="1400" dirty="0"/>
+          </a:p>
+          <a:p>
+            <a:pPr marL="342900" indent="-342900">
+              <a:spcAft>
+                <a:spcPts val="600"/>
+              </a:spcAft>
+              <a:buSzPct val="100000"/>
+              <a:buChar char="•"/>
+            </a:pPr>
+            <a:r>
+              <a:rPr lang="en-US" sz="1400" dirty="0">
+                <a:solidFill>
+                  <a:schemeClr val="tx1"/>
+                </a:solidFill>
+              </a:rPr>
+              <a:t>Up to 1 MSPS, SPI</a:t>
+            </a:r>
+            <a:endParaRPr lang="en-US" sz="1400" dirty="0"/>
+          </a:p>
+          <a:p>
+            <a:pPr marL="342900" indent="-342900">
+              <a:spcAft>
+                <a:spcPts val="600"/>
+              </a:spcAft>
+              <a:buSzPct val="100000"/>
+              <a:buChar char="•"/>
+            </a:pPr>
+            <a:r>
+              <a:rPr lang="en-US" sz="1400" dirty="0">
+                <a:solidFill>
+                  <a:schemeClr val="tx1"/>
+                </a:solidFill>
+              </a:rPr>
+              <a:t>0 to 3.3 V analog input</a:t>
+            </a:r>
+            <a:endParaRPr lang="en-US" sz="1400" dirty="0"/>
+          </a:p>
+        </p:txBody>
+      </p:sp>
+      <p:sp>
+        <p:nvSpPr>
+          <p:cNvPr id="11" name="Shape 7"/>
+          <p:cNvSpPr/>
+          <p:nvPr/>
+        </p:nvSpPr>
+        <p:spPr>
+          <a:xfrm>
+            <a:off x="6071616" y="1097280"/>
+            <a:ext cx="2606040" cy="3611880"/>
+          </a:xfrm>
+          <a:prstGeom prst="roundRect">
+            <a:avLst>
+              <a:gd name="adj" fmla="val 2807"/>
+            </a:avLst>
+          </a:prstGeom>
+          <a:solidFill>
+            <a:schemeClr val="bg2"/>
+          </a:solidFill>
+          <a:ln w="12700">
+            <a:solidFill>
+              <a:schemeClr val="bg2"/>
+            </a:solidFill>
+            <a:prstDash val="solid"/>
+          </a:ln>
+        </p:spPr>
+      </p:sp>
+      <p:pic>
+        <p:nvPicPr>
+          <p:cNvPr id="12" name="Image 2" descr="Photo placeholder: FSR 402">    </p:cNvPr>
+          <p:cNvPicPr>
+            <a:picLocks noChangeAspect="1"/>
+          </p:cNvPicPr>
+          <p:nvPr/>
+        </p:nvPicPr>
+        <p:blipFill>
+          <a:blip r:embed="rId3"/>
+          <a:stretch>
+            <a:fillRect/>
+          </a:stretch>
+        </p:blipFill>
+        <p:spPr>
+          <a:xfrm>
+            <a:off x="6208776" y="1234440"/>
+            <a:ext cx="2331720" cy="1371600"/>
+          </a:xfrm>
+          <a:prstGeom prst="rect">
+            <a:avLst/>
+          </a:prstGeom>
+        </p:spPr>
+      </p:pic>
+      <p:sp>
+        <p:nvSpPr>
+          <p:cNvPr id="13" name="Text 8"/>
+          <p:cNvSpPr txBox="1"/>
+          <p:nvPr/>
+        </p:nvSpPr>
+        <p:spPr>
+          <a:xfrm>
+            <a:off x="6208776" y="2697480"/>
+            <a:ext cx="2331720" cy="320040"/>
+          </a:xfrm>
+          <a:prstGeom prst="rect">
+            <a:avLst/>
+          </a:prstGeom>
+          <a:noFill/>
+          <a:ln/>
+        </p:spPr>
+        <p:txBody>
+          <a:bodyPr wrap="square" lIns="0" tIns="0" rIns="0" bIns="0" rtlCol="0" anchor="t"/>
+          <a:lstStyle/>
+          <a:p>
+            <a:pPr indent="0" marL="0">
+              <a:buNone/>
+            </a:pPr>
+            <a:r>
+              <a:rPr lang="en-US" sz="1600" b="1" dirty="0">
+                <a:solidFill>
+                  <a:schemeClr val="tx2"/>
+                </a:solidFill>
+              </a:rPr>
+              <a:t>FSR 402</a:t>
+            </a:r>
+            <a:endParaRPr lang="en-US" sz="1600" dirty="0"/>
+          </a:p>
+        </p:txBody>
+      </p:sp>
+      <p:sp>
+        <p:nvSpPr>
+          <p:cNvPr id="14" name="Text 9"/>
+          <p:cNvSpPr txBox="1"/>
+          <p:nvPr/>
+        </p:nvSpPr>
+        <p:spPr>
+          <a:xfrm>
+            <a:off x="6208776" y="3063240"/>
+            <a:ext cx="2331720" cy="1600200"/>
+          </a:xfrm>
+          <a:prstGeom prst="rect">
+            <a:avLst/>
+          </a:prstGeom>
+          <a:noFill/>
+          <a:ln/>
+        </p:spPr>
+        <p:txBody>
+          <a:bodyPr wrap="square" lIns="0" tIns="0" rIns="0" bIns="0" rtlCol="0" anchor="t"/>
+          <a:lstStyle/>
+          <a:p>
+            <a:pPr marL="342900" indent="-342900">
+              <a:spcAft>
+                <a:spcPts val="600"/>
+              </a:spcAft>
+              <a:buSzPct val="100000"/>
+              <a:buChar char="•"/>
+            </a:pPr>
+            <a:r>
+              <a:rPr lang="en-US" sz="1400" dirty="0">
+                <a:solidFill>
+                  <a:schemeClr val="tx1"/>
+                </a:solidFill>
+              </a:rPr>
+              <a:t>Interlink force-sensing resistor</a:t>
+            </a:r>
+            <a:endParaRPr lang="en-US" sz="1400" dirty="0"/>
+          </a:p>
+          <a:p>
+            <a:pPr marL="342900" indent="-342900">
+              <a:spcAft>
+                <a:spcPts val="600"/>
+              </a:spcAft>
+              <a:buSzPct val="100000"/>
+              <a:buChar char="•"/>
+            </a:pPr>
+            <a:r>
+              <a:rPr lang="en-US" sz="1400" dirty="0">
+                <a:solidFill>
+                  <a:schemeClr val="tx1"/>
+                </a:solidFill>
+              </a:rPr>
+              <a:t>12.7 mm round active area</a:t>
+            </a:r>
+            <a:endParaRPr lang="en-US" sz="1400" dirty="0"/>
+          </a:p>
+          <a:p>
+            <a:pPr marL="342900" indent="-342900">
+              <a:spcAft>
+                <a:spcPts val="600"/>
+              </a:spcAft>
+              <a:buSzPct val="100000"/>
+              <a:buChar char="•"/>
+            </a:pPr>
+            <a:r>
+              <a:rPr lang="en-US" sz="1400" dirty="0">
+                <a:solidFill>
+                  <a:schemeClr val="tx1"/>
+                </a:solidFill>
+              </a:rPr>
+              <a:t>Voltage divider with 10 kOhm</a:t>
+            </a:r>
+            <a:endParaRPr lang="en-US" sz="1400" dirty="0"/>
+          </a:p>
+        </p:txBody>
+      </p:sp>
+      <p:sp>
+        <p:nvSpPr>
+          <p:cNvPr id="25" name="Slide Number Placeholder 0"/>
+          <p:cNvSpPr>
+            <a:spLocks noGrp="1"/>
+          </p:cNvSpPr>
+          <p:nvPr>
+            <p:ph type="sldNum" sz="quarter" idx="4294967295"/>
+          </p:nvPr>
+        </p:nvSpPr>
+        <p:spPr>
+          <a:xfrm>
+            <a:off x="8321040" y="4754880"/>
+            <a:ext cx="457200" cy="274320"/>
+          </a:xfrm>
+          <a:prstGeom prst="rect">
+            <a:avLst/>
+          </a:prstGeom>
+          <a:extLst>
+            <a:ext uri="{C572A759-6A51-4108-AA02-DFA0A04FC94B}">
+              <ma14:wrappingTextBoxFlag xmlns:ma14="http://schemas.microsoft.com/office/mac/drawingml/2011/main" val="0"/>
+            </a:ext>
+          </a:extLst>
+        </p:spPr>
+        <p:txBody>
+          <a:bodyPr/>
+          <a:lstStyle>
+            <a:lvl1pPr>
+              <a:defRPr sz="1000">
+                <a:solidFill>
+                  <a:schemeClr val="accent5"/>
+                </a:solidFill>
+              </a:defRPr>
+            </a:lvl1pPr>
+          </a:lstStyle>
+          <a:p>
+            <a:pPr algn="l"/>
+            <a:fld id="{F7021451-1387-4CA6-816F-3879F97B5CBC}" type="slidenum">
+              <a:rPr b="0" lang="en-US"/>
+              <a:t>5</a:t>
+            </a:fld>
+            <a:endParaRPr lang="en-US"/>
+          </a:p>
+        </p:txBody>
+      </p:sp>
+    </p:spTree>
+  </p:cSld>
+  <p:clrMapOvr>
+    <a:masterClrMapping/>
+  </p:clrMapOvr>
+</p:sld>
+</file>
+
+<file path=ppt/slides/slide6.xml><?xml version="1.0" encoding="utf-8"?>
+<p:sld xmlns:a="http://schemas.openxmlformats.org/drawingml/2006/main" xmlns:r="http://schemas.openxmlformats.org/officeDocument/2006/relationships" xmlns:p="http://schemas.openxmlformats.org/presentationml/2006/main">
+  <p:cSld name="Slide 6">
+    <p:spTree>
+      <p:nvGrpSpPr>
+        <p:cNvPr id="1" name=""/>
+        <p:cNvGrpSpPr/>
+        <p:nvPr/>
+      </p:nvGrpSpPr>
+      <p:grpSpPr>
+        <a:xfrm>
+          <a:off x="0" y="0"/>
+          <a:ext cx="0" cy="0"/>
+          <a:chOff x="0" y="0"/>
+          <a:chExt cx="0" cy="0"/>
+        </a:xfrm>
+      </p:grpSpPr>
+      <p:sp>
+        <p:nvSpPr>
+          <p:cNvPr id="2" name="Text 0"/>
+          <p:cNvSpPr/>
+          <p:nvPr>
+            <p:ph idx="100" type="title" hasCustomPrompt="1"/>
+          </p:nvPr>
+        </p:nvSpPr>
+        <p:spPr>
+          <a:xfrm>
+            <a:off x="457200" y="274320"/>
+            <a:ext cx="8229600" cy="731520"/>
+          </a:xfrm>
+          <a:prstGeom prst="rect">
+            <a:avLst/>
+          </a:prstGeom>
+          <a:noFill/>
+          <a:ln/>
+        </p:spPr>
+        <p:txBody>
+          <a:bodyPr wrap="square" lIns="0" tIns="0" rIns="0" bIns="0" rtlCol="0" anchor="ctr"/>
+          <a:lstStyle/>
+          <a:p>
+            <a:pPr algn="l" indent="0" marL="0">
+              <a:buNone/>
+            </a:pPr>
+            <a:r>
+              <a:rPr lang="en-US" sz="3600" b="1" dirty="0">
+                <a:solidFill>
+                  <a:schemeClr val="tx2"/>
+                </a:solidFill>
+              </a:rPr>
+              <a:t>Hardware: actuation and safety</a:t>
+            </a:r>
+            <a:endParaRPr lang="en-US" sz="3600" dirty="0"/>
+          </a:p>
+        </p:txBody>
+      </p:sp>
+      <p:sp>
+        <p:nvSpPr>
+          <p:cNvPr id="3" name="Shape 1"/>
+          <p:cNvSpPr/>
+          <p:nvPr/>
+        </p:nvSpPr>
+        <p:spPr>
+          <a:xfrm>
+            <a:off x="457200" y="1097280"/>
+            <a:ext cx="2606040" cy="3611880"/>
+          </a:xfrm>
+          <a:prstGeom prst="roundRect">
+            <a:avLst>
+              <a:gd name="adj" fmla="val 2807"/>
+            </a:avLst>
+          </a:prstGeom>
+          <a:solidFill>
+            <a:schemeClr val="bg2"/>
+          </a:solidFill>
+          <a:ln w="12700">
+            <a:solidFill>
+              <a:schemeClr val="bg2"/>
+            </a:solidFill>
+            <a:prstDash val="solid"/>
+          </a:ln>
+        </p:spPr>
+      </p:sp>
+      <p:pic>
+        <p:nvPicPr>
+          <p:cNvPr id="4" name="Image 0" descr="Photo placeholder: DRV8871 breakout">    </p:cNvPr>
+          <p:cNvPicPr>
+            <a:picLocks noChangeAspect="1"/>
+          </p:cNvPicPr>
+          <p:nvPr/>
+        </p:nvPicPr>
+        <p:blipFill>
+          <a:blip r:embed="rId1"/>
+          <a:stretch>
+            <a:fillRect/>
+          </a:stretch>
+        </p:blipFill>
+        <p:spPr>
+          <a:xfrm>
+            <a:off x="594360" y="1234440"/>
+            <a:ext cx="2331720" cy="1371600"/>
+          </a:xfrm>
+          <a:prstGeom prst="rect">
+            <a:avLst/>
+          </a:prstGeom>
+        </p:spPr>
+      </p:pic>
+      <p:sp>
+        <p:nvSpPr>
+          <p:cNvPr id="5" name="Text 2"/>
+          <p:cNvSpPr txBox="1"/>
+          <p:nvPr/>
+        </p:nvSpPr>
+        <p:spPr>
+          <a:xfrm>
+            <a:off x="594360" y="2697480"/>
+            <a:ext cx="2331720" cy="320040"/>
+          </a:xfrm>
+          <a:prstGeom prst="rect">
+            <a:avLst/>
+          </a:prstGeom>
+          <a:noFill/>
+          <a:ln/>
+        </p:spPr>
+        <p:txBody>
+          <a:bodyPr wrap="square" lIns="0" tIns="0" rIns="0" bIns="0" rtlCol="0" anchor="t"/>
+          <a:lstStyle/>
+          <a:p>
+            <a:pPr indent="0" marL="0">
+              <a:buNone/>
+            </a:pPr>
+            <a:r>
+              <a:rPr lang="en-US" sz="1600" b="1" dirty="0">
+                <a:solidFill>
+                  <a:schemeClr val="tx2"/>
+                </a:solidFill>
+              </a:rPr>
+              <a:t>DRV8871 breakout</a:t>
+            </a:r>
+            <a:endParaRPr lang="en-US" sz="1600" dirty="0"/>
+          </a:p>
+        </p:txBody>
+      </p:sp>
+      <p:sp>
+        <p:nvSpPr>
+          <p:cNvPr id="6" name="Text 3"/>
+          <p:cNvSpPr txBox="1"/>
+          <p:nvPr/>
+        </p:nvSpPr>
+        <p:spPr>
+          <a:xfrm>
+            <a:off x="594360" y="3063240"/>
+            <a:ext cx="2331720" cy="1600200"/>
+          </a:xfrm>
+          <a:prstGeom prst="rect">
+            <a:avLst/>
+          </a:prstGeom>
+          <a:noFill/>
+          <a:ln/>
+        </p:spPr>
+        <p:txBody>
+          <a:bodyPr wrap="square" lIns="0" tIns="0" rIns="0" bIns="0" rtlCol="0" anchor="t"/>
+          <a:lstStyle/>
+          <a:p>
+            <a:pPr marL="342900" indent="-342900">
+              <a:spcAft>
+                <a:spcPts val="600"/>
+              </a:spcAft>
+              <a:buSzPct val="100000"/>
+              <a:buChar char="•"/>
+            </a:pPr>
+            <a:r>
+              <a:rPr lang="en-US" sz="1400" dirty="0">
+                <a:solidFill>
+                  <a:schemeClr val="tx1"/>
+                </a:solidFill>
+              </a:rPr>
+              <a:t>Single H-bridge, PWM input</a:t>
+            </a:r>
+            <a:endParaRPr lang="en-US" sz="1400" dirty="0"/>
+          </a:p>
+          <a:p>
+            <a:pPr marL="342900" indent="-342900">
+              <a:spcAft>
+                <a:spcPts val="600"/>
+              </a:spcAft>
+              <a:buSzPct val="100000"/>
+              <a:buChar char="•"/>
+            </a:pPr>
+            <a:r>
+              <a:rPr lang="en-US" sz="1400" dirty="0">
+                <a:solidFill>
+                  <a:schemeClr val="tx1"/>
+                </a:solidFill>
+              </a:rPr>
+              <a:t>6.5 to 45 V, 3.6 A peak</a:t>
+            </a:r>
+            <a:endParaRPr lang="en-US" sz="1400" dirty="0"/>
+          </a:p>
+          <a:p>
+            <a:pPr marL="342900" indent="-342900">
+              <a:spcAft>
+                <a:spcPts val="600"/>
+              </a:spcAft>
+              <a:buSzPct val="100000"/>
+              <a:buChar char="•"/>
+            </a:pPr>
+            <a:r>
+              <a:rPr lang="en-US" sz="1400" dirty="0">
+                <a:solidFill>
+                  <a:schemeClr val="tx1"/>
+                </a:solidFill>
+              </a:rPr>
+              <a:t>Current limit, thermal trip</a:t>
+            </a:r>
+            <a:endParaRPr lang="en-US" sz="1400" dirty="0"/>
+          </a:p>
+        </p:txBody>
+      </p:sp>
+      <p:sp>
+        <p:nvSpPr>
+          <p:cNvPr id="7" name="Shape 4"/>
+          <p:cNvSpPr/>
+          <p:nvPr/>
+        </p:nvSpPr>
+        <p:spPr>
+          <a:xfrm>
+            <a:off x="3264408" y="1097280"/>
+            <a:ext cx="2606040" cy="3611880"/>
+          </a:xfrm>
+          <a:prstGeom prst="roundRect">
+            <a:avLst>
+              <a:gd name="adj" fmla="val 2807"/>
+            </a:avLst>
+          </a:prstGeom>
+          <a:solidFill>
+            <a:schemeClr val="bg2"/>
+          </a:solidFill>
+          <a:ln w="12700">
+            <a:solidFill>
+              <a:schemeClr val="bg2"/>
+            </a:solidFill>
+            <a:prstDash val="solid"/>
+          </a:ln>
+        </p:spPr>
+      </p:sp>
+      <p:pic>
+        <p:nvPicPr>
+          <p:cNvPr id="8" name="Image 1" descr="Photo placeholder: Geared DC motor">    </p:cNvPr>
+          <p:cNvPicPr>
+            <a:picLocks noChangeAspect="1"/>
+          </p:cNvPicPr>
+          <p:nvPr/>
+        </p:nvPicPr>
+        <p:blipFill>
+          <a:blip r:embed="rId2"/>
+          <a:stretch>
+            <a:fillRect/>
+          </a:stretch>
+        </p:blipFill>
+        <p:spPr>
+          <a:xfrm>
+            <a:off x="3401568" y="1234440"/>
+            <a:ext cx="2331720" cy="1371600"/>
+          </a:xfrm>
+          <a:prstGeom prst="rect">
+            <a:avLst/>
+          </a:prstGeom>
+        </p:spPr>
+      </p:pic>
+      <p:sp>
+        <p:nvSpPr>
+          <p:cNvPr id="9" name="Text 5"/>
+          <p:cNvSpPr txBox="1"/>
+          <p:nvPr/>
+        </p:nvSpPr>
+        <p:spPr>
+          <a:xfrm>
+            <a:off x="3401568" y="2697480"/>
+            <a:ext cx="2331720" cy="320040"/>
+          </a:xfrm>
+          <a:prstGeom prst="rect">
+            <a:avLst/>
+          </a:prstGeom>
+          <a:noFill/>
+          <a:ln/>
+        </p:spPr>
+        <p:txBody>
+          <a:bodyPr wrap="square" lIns="0" tIns="0" rIns="0" bIns="0" rtlCol="0" anchor="t"/>
+          <a:lstStyle/>
+          <a:p>
+            <a:pPr indent="0" marL="0">
+              <a:buNone/>
+            </a:pPr>
+            <a:r>
+              <a:rPr lang="en-US" sz="1600" b="1" dirty="0">
+                <a:solidFill>
+                  <a:schemeClr val="tx2"/>
+                </a:solidFill>
+              </a:rPr>
+              <a:t>Geared DC motor</a:t>
+            </a:r>
+            <a:endParaRPr lang="en-US" sz="1600" dirty="0"/>
+          </a:p>
+        </p:txBody>
+      </p:sp>
+      <p:sp>
+        <p:nvSpPr>
+          <p:cNvPr id="10" name="Text 6"/>
+          <p:cNvSpPr txBox="1"/>
+          <p:nvPr/>
+        </p:nvSpPr>
+        <p:spPr>
+          <a:xfrm>
+            <a:off x="3401568" y="3063240"/>
+            <a:ext cx="2331720" cy="1600200"/>
+          </a:xfrm>
+          <a:prstGeom prst="rect">
+            <a:avLst/>
+          </a:prstGeom>
+          <a:noFill/>
+          <a:ln/>
+        </p:spPr>
+        <p:txBody>
+          <a:bodyPr wrap="square" lIns="0" tIns="0" rIns="0" bIns="0" rtlCol="0" anchor="t"/>
+          <a:lstStyle/>
+          <a:p>
+            <a:pPr marL="342900" indent="-342900">
+              <a:spcAft>
+                <a:spcPts val="600"/>
+              </a:spcAft>
+              <a:buSzPct val="100000"/>
+              <a:buChar char="•"/>
+            </a:pPr>
+            <a:r>
+              <a:rPr lang="en-US" sz="1400" dirty="0">
+                <a:solidFill>
+                  <a:schemeClr val="tx1"/>
+                </a:solidFill>
+              </a:rPr>
+              <a:t>12 V, stall below 2 A</a:t>
+            </a:r>
+            <a:endParaRPr lang="en-US" sz="1400" dirty="0"/>
+          </a:p>
+          <a:p>
+            <a:pPr marL="342900" indent="-342900">
+              <a:spcAft>
+                <a:spcPts val="600"/>
+              </a:spcAft>
+              <a:buSzPct val="100000"/>
+              <a:buChar char="•"/>
+            </a:pPr>
+            <a:r>
+              <a:rPr lang="en-US" sz="1400" dirty="0">
+                <a:solidFill>
+                  <a:schemeClr val="tx1"/>
+                </a:solidFill>
+              </a:rPr>
+              <a:t>Driven by the DRV8871</a:t>
+            </a:r>
+            <a:endParaRPr lang="en-US" sz="1400" dirty="0"/>
+          </a:p>
+          <a:p>
+            <a:pPr marL="342900" indent="-342900">
+              <a:spcAft>
+                <a:spcPts val="600"/>
+              </a:spcAft>
+              <a:buSzPct val="100000"/>
+              <a:buChar char="•"/>
+            </a:pPr>
+            <a:r>
+              <a:rPr lang="en-US" sz="1400" dirty="0">
+                <a:solidFill>
+                  <a:schemeClr val="tx1"/>
+                </a:solidFill>
+              </a:rPr>
+              <a:t>Gripper mechanism load</a:t>
+            </a:r>
+            <a:endParaRPr lang="en-US" sz="1400" dirty="0"/>
+          </a:p>
+        </p:txBody>
+      </p:sp>
+      <p:sp>
+        <p:nvSpPr>
+          <p:cNvPr id="11" name="Shape 7"/>
+          <p:cNvSpPr/>
+          <p:nvPr/>
+        </p:nvSpPr>
+        <p:spPr>
+          <a:xfrm>
+            <a:off x="6071616" y="1097280"/>
+            <a:ext cx="2606040" cy="3611880"/>
+          </a:xfrm>
+          <a:prstGeom prst="roundRect">
+            <a:avLst>
+              <a:gd name="adj" fmla="val 2807"/>
+            </a:avLst>
+          </a:prstGeom>
+          <a:solidFill>
+            <a:schemeClr val="bg2"/>
+          </a:solidFill>
+          <a:ln w="12700">
+            <a:solidFill>
+              <a:schemeClr val="bg2"/>
+            </a:solidFill>
+            <a:prstDash val="solid"/>
+          </a:ln>
+        </p:spPr>
+      </p:sp>
+      <p:pic>
+        <p:nvPicPr>
+          <p:cNvPr id="12" name="Image 2" descr="Photo placeholder: E-stop and supply">    </p:cNvPr>
+          <p:cNvPicPr>
+            <a:picLocks noChangeAspect="1"/>
+          </p:cNvPicPr>
+          <p:nvPr/>
+        </p:nvPicPr>
+        <p:blipFill>
+          <a:blip r:embed="rId3"/>
+          <a:stretch>
+            <a:fillRect/>
+          </a:stretch>
+        </p:blipFill>
+        <p:spPr>
+          <a:xfrm>
+            <a:off x="6208776" y="1234440"/>
+            <a:ext cx="2331720" cy="1371600"/>
+          </a:xfrm>
+          <a:prstGeom prst="rect">
+            <a:avLst/>
+          </a:prstGeom>
+        </p:spPr>
+      </p:pic>
+      <p:sp>
+        <p:nvSpPr>
+          <p:cNvPr id="13" name="Text 8"/>
+          <p:cNvSpPr txBox="1"/>
+          <p:nvPr/>
+        </p:nvSpPr>
+        <p:spPr>
+          <a:xfrm>
+            <a:off x="6208776" y="2697480"/>
+            <a:ext cx="2331720" cy="320040"/>
+          </a:xfrm>
+          <a:prstGeom prst="rect">
+            <a:avLst/>
+          </a:prstGeom>
+          <a:noFill/>
+          <a:ln/>
+        </p:spPr>
+        <p:txBody>
+          <a:bodyPr wrap="square" lIns="0" tIns="0" rIns="0" bIns="0" rtlCol="0" anchor="t"/>
+          <a:lstStyle/>
+          <a:p>
+            <a:pPr indent="0" marL="0">
+              <a:buNone/>
+            </a:pPr>
+            <a:r>
+              <a:rPr lang="en-US" sz="1600" b="1" dirty="0">
+                <a:solidFill>
+                  <a:schemeClr val="tx2"/>
+                </a:solidFill>
+              </a:rPr>
+              <a:t>E-stop and supply</a:t>
+            </a:r>
+            <a:endParaRPr lang="en-US" sz="1600" dirty="0"/>
+          </a:p>
+        </p:txBody>
+      </p:sp>
+      <p:sp>
+        <p:nvSpPr>
+          <p:cNvPr id="14" name="Text 9"/>
+          <p:cNvSpPr txBox="1"/>
+          <p:nvPr/>
+        </p:nvSpPr>
+        <p:spPr>
+          <a:xfrm>
+            <a:off x="6208776" y="3063240"/>
+            <a:ext cx="2331720" cy="1600200"/>
+          </a:xfrm>
+          <a:prstGeom prst="rect">
+            <a:avLst/>
+          </a:prstGeom>
+          <a:noFill/>
+          <a:ln/>
+        </p:spPr>
+        <p:txBody>
+          <a:bodyPr wrap="square" lIns="0" tIns="0" rIns="0" bIns="0" rtlCol="0" anchor="t"/>
+          <a:lstStyle/>
+          <a:p>
+            <a:pPr marL="342900" indent="-342900">
+              <a:spcAft>
+                <a:spcPts val="600"/>
+              </a:spcAft>
+              <a:buSzPct val="100000"/>
+              <a:buChar char="•"/>
+            </a:pPr>
+            <a:r>
+              <a:rPr lang="en-US" sz="1400" dirty="0">
+                <a:solidFill>
+                  <a:schemeClr val="tx1"/>
+                </a:solidFill>
+              </a:rPr>
+              <a:t>NC mushroom, 22 mm</a:t>
+            </a:r>
+            <a:endParaRPr lang="en-US" sz="1400" dirty="0"/>
+          </a:p>
+          <a:p>
+            <a:pPr marL="342900" indent="-342900">
+              <a:spcAft>
+                <a:spcPts val="600"/>
+              </a:spcAft>
+              <a:buSzPct val="100000"/>
+              <a:buChar char="•"/>
+            </a:pPr>
+            <a:r>
+              <a:rPr lang="en-US" sz="1400" dirty="0">
+                <a:solidFill>
+                  <a:schemeClr val="tx1"/>
+                </a:solidFill>
+              </a:rPr>
+              <a:t>12 V 3 A supply, 2 A fuse</a:t>
+            </a:r>
+            <a:endParaRPr lang="en-US" sz="1400" dirty="0"/>
+          </a:p>
+          <a:p>
+            <a:pPr marL="342900" indent="-342900">
+              <a:spcAft>
+                <a:spcPts val="600"/>
+              </a:spcAft>
+              <a:buSzPct val="100000"/>
+              <a:buChar char="•"/>
+            </a:pPr>
+            <a:r>
+              <a:rPr lang="en-US" sz="1400" dirty="0">
+                <a:solidFill>
+                  <a:schemeClr val="tx1"/>
+                </a:solidFill>
+              </a:rPr>
+              <a:t>1000 uF bulk capacitor</a:t>
+            </a:r>
+            <a:endParaRPr lang="en-US" sz="1400" dirty="0"/>
+          </a:p>
+        </p:txBody>
+      </p:sp>
+      <p:sp>
+        <p:nvSpPr>
+          <p:cNvPr id="25" name="Slide Number Placeholder 0"/>
+          <p:cNvSpPr>
+            <a:spLocks noGrp="1"/>
+          </p:cNvSpPr>
+          <p:nvPr>
+            <p:ph type="sldNum" sz="quarter" idx="4294967295"/>
+          </p:nvPr>
+        </p:nvSpPr>
+        <p:spPr>
+          <a:xfrm>
+            <a:off x="8321040" y="4754880"/>
+            <a:ext cx="457200" cy="274320"/>
+          </a:xfrm>
+          <a:prstGeom prst="rect">
+            <a:avLst/>
+          </a:prstGeom>
+          <a:extLst>
+            <a:ext uri="{C572A759-6A51-4108-AA02-DFA0A04FC94B}">
+              <ma14:wrappingTextBoxFlag xmlns:ma14="http://schemas.microsoft.com/office/mac/drawingml/2011/main" val="0"/>
+            </a:ext>
+          </a:extLst>
+        </p:spPr>
+        <p:txBody>
+          <a:bodyPr/>
+          <a:lstStyle>
+            <a:lvl1pPr>
+              <a:defRPr sz="1000">
+                <a:solidFill>
+                  <a:schemeClr val="accent5"/>
+                </a:solidFill>
+              </a:defRPr>
+            </a:lvl1pPr>
+          </a:lstStyle>
+          <a:p>
+            <a:pPr algn="l"/>
+            <a:fld id="{F7021451-1387-4CA6-816F-3879F97B5CBC}" type="slidenum">
+              <a:rPr b="0" lang="en-US"/>
+              <a:t>6</a:t>
+            </a:fld>
+            <a:endParaRPr lang="en-US"/>
+          </a:p>
+        </p:txBody>
+      </p:sp>
+    </p:spTree>
+  </p:cSld>
+  <p:clrMapOvr>
+    <a:masterClrMapping/>
+  </p:clrMapOvr>
+</p:sld>
+</file>
+
+<file path=ppt/slides/slide7.xml><?xml version="1.0" encoding="utf-8"?>
+<p:sld xmlns:a="http://schemas.openxmlformats.org/drawingml/2006/main" xmlns:r="http://schemas.openxmlformats.org/officeDocument/2006/relationships" xmlns:p="http://schemas.openxmlformats.org/presentationml/2006/main">
+  <p:cSld name="Slide 7">
+    <p:spTree>
+      <p:nvGrpSpPr>
+        <p:cNvPr id="1" name=""/>
+        <p:cNvGrpSpPr/>
+        <p:nvPr/>
+      </p:nvGrpSpPr>
+      <p:grpSpPr>
+        <a:xfrm>
+          <a:off x="0" y="0"/>
+          <a:ext cx="0" cy="0"/>
+          <a:chOff x="0" y="0"/>
+          <a:chExt cx="0" cy="0"/>
+        </a:xfrm>
+      </p:grpSpPr>
+      <p:sp>
+        <p:nvSpPr>
+          <p:cNvPr id="2" name="Text 0"/>
+          <p:cNvSpPr/>
+          <p:nvPr>
+            <p:ph idx="100" type="title" hasCustomPrompt="1"/>
+          </p:nvPr>
+        </p:nvSpPr>
+        <p:spPr>
+          <a:xfrm>
+            <a:off x="457200" y="274320"/>
+            <a:ext cx="8229600" cy="731520"/>
+          </a:xfrm>
+          <a:prstGeom prst="rect">
+            <a:avLst/>
+          </a:prstGeom>
+          <a:noFill/>
+          <a:ln/>
+        </p:spPr>
+        <p:txBody>
+          <a:bodyPr wrap="square" lIns="0" tIns="0" rIns="0" bIns="0" rtlCol="0" anchor="ctr"/>
+          <a:lstStyle/>
+          <a:p>
+            <a:pPr algn="l" indent="0" marL="0">
+              <a:buNone/>
+            </a:pPr>
+            <a:r>
+              <a:rPr lang="en-US" sz="3600" b="1" dirty="0">
+                <a:solidFill>
+                  <a:schemeClr val="tx2"/>
+                </a:solidFill>
+              </a:rPr>
+              <a:t>Safety Governor rules</a:t>
+            </a:r>
+            <a:endParaRPr lang="en-US" sz="3600" dirty="0"/>
+          </a:p>
+        </p:txBody>
+      </p:sp>
+      <p:sp>
+        <p:nvSpPr>
+          <p:cNvPr id="3" name="card 1  Maximum force"/>
+          <p:cNvSpPr/>
+          <p:nvPr/>
+        </p:nvSpPr>
+        <p:spPr>
+          <a:xfrm>
+            <a:off x="457200" y="1188720"/>
+            <a:ext cx="2606040" cy="1600200"/>
+          </a:xfrm>
+          <a:prstGeom prst="roundRect">
+            <a:avLst>
+              <a:gd name="adj" fmla="val 4571"/>
+            </a:avLst>
+          </a:prstGeom>
+          <a:solidFill>
+            <a:schemeClr val="bg2"/>
+          </a:solidFill>
+          <a:ln w="12700">
+            <a:solidFill>
+              <a:schemeClr val="bg2"/>
+            </a:solidFill>
+            <a:prstDash val="solid"/>
+          </a:ln>
+        </p:spPr>
+      </p:sp>
+      <p:sp>
+        <p:nvSpPr>
+          <p:cNvPr id="4" name="Text 2"/>
+          <p:cNvSpPr txBox="1"/>
+          <p:nvPr/>
+        </p:nvSpPr>
+        <p:spPr>
+          <a:xfrm>
+            <a:off x="594360" y="1298448"/>
+            <a:ext cx="2331720" cy="320040"/>
+          </a:xfrm>
+          <a:prstGeom prst="rect">
+            <a:avLst/>
+          </a:prstGeom>
+          <a:noFill/>
+          <a:ln/>
+        </p:spPr>
+        <p:txBody>
+          <a:bodyPr wrap="square" lIns="0" tIns="0" rIns="0" bIns="0" rtlCol="0" anchor="t"/>
+          <a:lstStyle/>
+          <a:p>
+            <a:pPr indent="0" marL="0">
+              <a:buNone/>
+            </a:pPr>
+            <a:r>
+              <a:rPr lang="en-US" sz="1600" b="1" dirty="0">
+                <a:solidFill>
+                  <a:schemeClr val="tx2"/>
+                </a:solidFill>
+              </a:rPr>
+              <a:t>1  Maximum force</a:t>
+            </a:r>
+            <a:endParaRPr lang="en-US" sz="1600" dirty="0"/>
+          </a:p>
+        </p:txBody>
+      </p:sp>
+      <p:sp>
+        <p:nvSpPr>
+          <p:cNvPr id="5" name="Text 3"/>
+          <p:cNvSpPr txBox="1"/>
+          <p:nvPr/>
+        </p:nvSpPr>
+        <p:spPr>
+          <a:xfrm>
+            <a:off x="594360" y="1645920"/>
+            <a:ext cx="2331720" cy="1051560"/>
+          </a:xfrm>
+          <a:prstGeom prst="rect">
+            <a:avLst/>
+          </a:prstGeom>
+          <a:noFill/>
+          <a:ln/>
+        </p:spPr>
+        <p:txBody>
+          <a:bodyPr wrap="square" lIns="0" tIns="0" rIns="0" bIns="0" rtlCol="0" anchor="t"/>
+          <a:lstStyle/>
+          <a:p>
+            <a:pPr indent="0" marL="0">
+              <a:buNone/>
+            </a:pPr>
+            <a:r>
+              <a:rPr lang="en-US" sz="1400" dirty="0">
+                <a:solidFill>
+                  <a:schemeClr val="tx1"/>
+                </a:solidFill>
+              </a:rPr>
+              <a:t>Force at or above FORCE_MAX trips the safe state, with release hysteresis.</a:t>
+            </a:r>
+            <a:endParaRPr lang="en-US" sz="1400" dirty="0"/>
+          </a:p>
+        </p:txBody>
+      </p:sp>
+      <p:sp>
+        <p:nvSpPr>
+          <p:cNvPr id="6" name="card 2  Sensor fault"/>
+          <p:cNvSpPr/>
+          <p:nvPr/>
+        </p:nvSpPr>
+        <p:spPr>
+          <a:xfrm>
+            <a:off x="3264408" y="1188720"/>
+            <a:ext cx="2606040" cy="1600200"/>
+          </a:xfrm>
+          <a:prstGeom prst="roundRect">
+            <a:avLst>
+              <a:gd name="adj" fmla="val 4571"/>
+            </a:avLst>
+          </a:prstGeom>
+          <a:solidFill>
+            <a:schemeClr val="bg2"/>
+          </a:solidFill>
+          <a:ln w="12700">
+            <a:solidFill>
+              <a:schemeClr val="bg2"/>
+            </a:solidFill>
+            <a:prstDash val="solid"/>
+          </a:ln>
+        </p:spPr>
+      </p:sp>
+      <p:sp>
+        <p:nvSpPr>
+          <p:cNvPr id="7" name="Text 5"/>
+          <p:cNvSpPr txBox="1"/>
+          <p:nvPr/>
+        </p:nvSpPr>
+        <p:spPr>
+          <a:xfrm>
+            <a:off x="3401568" y="1298448"/>
+            <a:ext cx="2331720" cy="320040"/>
+          </a:xfrm>
+          <a:prstGeom prst="rect">
+            <a:avLst/>
+          </a:prstGeom>
+          <a:noFill/>
+          <a:ln/>
+        </p:spPr>
+        <p:txBody>
+          <a:bodyPr wrap="square" lIns="0" tIns="0" rIns="0" bIns="0" rtlCol="0" anchor="t"/>
+          <a:lstStyle/>
+          <a:p>
+            <a:pPr indent="0" marL="0">
+              <a:buNone/>
+            </a:pPr>
+            <a:r>
+              <a:rPr lang="en-US" sz="1600" b="1" dirty="0">
+                <a:solidFill>
+                  <a:schemeClr val="tx2"/>
+                </a:solidFill>
+              </a:rPr>
+              <a:t>2  Sensor fault</a:t>
+            </a:r>
+            <a:endParaRPr lang="en-US" sz="1600" dirty="0"/>
+          </a:p>
+        </p:txBody>
+      </p:sp>
+      <p:sp>
+        <p:nvSpPr>
+          <p:cNvPr id="8" name="Text 6"/>
+          <p:cNvSpPr txBox="1"/>
+          <p:nvPr/>
+        </p:nvSpPr>
+        <p:spPr>
+          <a:xfrm>
+            <a:off x="3401568" y="1645920"/>
+            <a:ext cx="2331720" cy="1051560"/>
+          </a:xfrm>
+          <a:prstGeom prst="rect">
+            <a:avLst/>
+          </a:prstGeom>
+          <a:noFill/>
+          <a:ln/>
+        </p:spPr>
+        <p:txBody>
+          <a:bodyPr wrap="square" lIns="0" tIns="0" rIns="0" bIns="0" rtlCol="0" anchor="t"/>
+          <a:lstStyle/>
+          <a:p>
+            <a:pPr indent="0" marL="0">
+              <a:buNone/>
+            </a:pPr>
+            <a:r>
+              <a:rPr lang="en-US" sz="1400" dirty="0">
+                <a:solidFill>
+                  <a:schemeClr val="tx1"/>
+                </a:solidFill>
+              </a:rPr>
+              <a:t>Persistent invalid readings or a silent ADC latch a fault.</a:t>
+            </a:r>
+            <a:endParaRPr lang="en-US" sz="1400" dirty="0"/>
+          </a:p>
+        </p:txBody>
+      </p:sp>
+      <p:sp>
+        <p:nvSpPr>
+          <p:cNvPr id="9" name="card 3  Emergency stop"/>
+          <p:cNvSpPr/>
+          <p:nvPr/>
+        </p:nvSpPr>
+        <p:spPr>
+          <a:xfrm>
+            <a:off x="6071616" y="1188720"/>
+            <a:ext cx="2606040" cy="1600200"/>
+          </a:xfrm>
+          <a:prstGeom prst="roundRect">
+            <a:avLst>
+              <a:gd name="adj" fmla="val 4571"/>
+            </a:avLst>
+          </a:prstGeom>
+          <a:solidFill>
+            <a:schemeClr val="bg2"/>
+          </a:solidFill>
+          <a:ln w="12700">
+            <a:solidFill>
+              <a:schemeClr val="bg2"/>
+            </a:solidFill>
+            <a:prstDash val="solid"/>
+          </a:ln>
+        </p:spPr>
+      </p:sp>
+      <p:sp>
+        <p:nvSpPr>
+          <p:cNvPr id="10" name="Text 8"/>
+          <p:cNvSpPr txBox="1"/>
+          <p:nvPr/>
+        </p:nvSpPr>
+        <p:spPr>
+          <a:xfrm>
+            <a:off x="6208776" y="1298448"/>
+            <a:ext cx="2331720" cy="320040"/>
+          </a:xfrm>
+          <a:prstGeom prst="rect">
+            <a:avLst/>
+          </a:prstGeom>
+          <a:noFill/>
+          <a:ln/>
+        </p:spPr>
+        <p:txBody>
+          <a:bodyPr wrap="square" lIns="0" tIns="0" rIns="0" bIns="0" rtlCol="0" anchor="t"/>
+          <a:lstStyle/>
+          <a:p>
+            <a:pPr indent="0" marL="0">
+              <a:buNone/>
+            </a:pPr>
+            <a:r>
+              <a:rPr lang="en-US" sz="1600" b="1" dirty="0">
+                <a:solidFill>
+                  <a:schemeClr val="tx2"/>
+                </a:solidFill>
+              </a:rPr>
+              <a:t>3  Emergency stop</a:t>
+            </a:r>
+            <a:endParaRPr lang="en-US" sz="1600" dirty="0"/>
+          </a:p>
+        </p:txBody>
+      </p:sp>
+      <p:sp>
+        <p:nvSpPr>
+          <p:cNvPr id="11" name="Text 9"/>
+          <p:cNvSpPr txBox="1"/>
+          <p:nvPr/>
+        </p:nvSpPr>
+        <p:spPr>
+          <a:xfrm>
+            <a:off x="6208776" y="1645920"/>
+            <a:ext cx="2331720" cy="1051560"/>
+          </a:xfrm>
+          <a:prstGeom prst="rect">
+            <a:avLst/>
+          </a:prstGeom>
+          <a:noFill/>
+          <a:ln/>
+        </p:spPr>
+        <p:txBody>
+          <a:bodyPr wrap="square" lIns="0" tIns="0" rIns="0" bIns="0" rtlCol="0" anchor="t"/>
+          <a:lstStyle/>
+          <a:p>
+            <a:pPr indent="0" marL="0">
+              <a:buNone/>
+            </a:pPr>
+            <a:r>
+              <a:rPr lang="en-US" sz="1400" dirty="0">
+                <a:solidFill>
+                  <a:schemeClr val="tx1"/>
+                </a:solidFill>
+              </a:rPr>
+              <a:t>Fail-safe input: an open contact or cut wire stops the output.</a:t>
+            </a:r>
+            <a:endParaRPr lang="en-US" sz="1400" dirty="0"/>
+          </a:p>
+        </p:txBody>
+      </p:sp>
+      <p:sp>
+        <p:nvSpPr>
+          <p:cNvPr id="12" name="card 4  Invalid ADC value"/>
+          <p:cNvSpPr/>
+          <p:nvPr/>
+        </p:nvSpPr>
+        <p:spPr>
+          <a:xfrm>
+            <a:off x="457200" y="2926080"/>
+            <a:ext cx="2606040" cy="1600200"/>
+          </a:xfrm>
+          <a:prstGeom prst="roundRect">
+            <a:avLst>
+              <a:gd name="adj" fmla="val 4571"/>
+            </a:avLst>
+          </a:prstGeom>
+          <a:solidFill>
+            <a:schemeClr val="bg2"/>
+          </a:solidFill>
+          <a:ln w="12700">
+            <a:solidFill>
+              <a:schemeClr val="bg2"/>
+            </a:solidFill>
+            <a:prstDash val="solid"/>
+          </a:ln>
+        </p:spPr>
+      </p:sp>
+      <p:sp>
+        <p:nvSpPr>
+          <p:cNvPr id="13" name="Text 11"/>
+          <p:cNvSpPr txBox="1"/>
+          <p:nvPr/>
+        </p:nvSpPr>
+        <p:spPr>
+          <a:xfrm>
+            <a:off x="594360" y="3035808"/>
+            <a:ext cx="2331720" cy="320040"/>
+          </a:xfrm>
+          <a:prstGeom prst="rect">
+            <a:avLst/>
+          </a:prstGeom>
+          <a:noFill/>
+          <a:ln/>
+        </p:spPr>
+        <p:txBody>
+          <a:bodyPr wrap="square" lIns="0" tIns="0" rIns="0" bIns="0" rtlCol="0" anchor="t"/>
+          <a:lstStyle/>
+          <a:p>
+            <a:pPr indent="0" marL="0">
+              <a:buNone/>
+            </a:pPr>
+            <a:r>
+              <a:rPr lang="en-US" sz="1600" b="1" dirty="0">
+                <a:solidFill>
+                  <a:schemeClr val="tx2"/>
+                </a:solidFill>
+              </a:rPr>
+              <a:t>4  Invalid ADC value</a:t>
+            </a:r>
+            <a:endParaRPr lang="en-US" sz="1600" dirty="0"/>
+          </a:p>
+        </p:txBody>
+      </p:sp>
+      <p:sp>
+        <p:nvSpPr>
+          <p:cNvPr id="14" name="Text 12"/>
+          <p:cNvSpPr txBox="1"/>
+          <p:nvPr/>
+        </p:nvSpPr>
+        <p:spPr>
+          <a:xfrm>
+            <a:off x="594360" y="3383280"/>
+            <a:ext cx="2331720" cy="1051560"/>
+          </a:xfrm>
+          <a:prstGeom prst="rect">
+            <a:avLst/>
+          </a:prstGeom>
+          <a:noFill/>
+          <a:ln/>
+        </p:spPr>
+        <p:txBody>
+          <a:bodyPr wrap="square" lIns="0" tIns="0" rIns="0" bIns="0" rtlCol="0" anchor="t"/>
+          <a:lstStyle/>
+          <a:p>
+            <a:pPr indent="0" marL="0">
+              <a:buNone/>
+            </a:pPr>
+            <a:r>
+              <a:rPr lang="en-US" sz="1400" dirty="0">
+                <a:solidFill>
+                  <a:schemeClr val="tx1"/>
+                </a:solidFill>
+              </a:rPr>
+              <a:t>Frame errors and railed readings are rejected immediately.</a:t>
+            </a:r>
+            <a:endParaRPr lang="en-US" sz="1400" dirty="0"/>
+          </a:p>
+        </p:txBody>
+      </p:sp>
+      <p:sp>
+        <p:nvSpPr>
+          <p:cNvPr id="15" name="card 5  Safe output state"/>
+          <p:cNvSpPr/>
+          <p:nvPr/>
+        </p:nvSpPr>
+        <p:spPr>
+          <a:xfrm>
+            <a:off x="3264408" y="2926080"/>
+            <a:ext cx="2606040" cy="1600200"/>
+          </a:xfrm>
+          <a:prstGeom prst="roundRect">
+            <a:avLst>
+              <a:gd name="adj" fmla="val 4571"/>
+            </a:avLst>
+          </a:prstGeom>
+          <a:solidFill>
+            <a:schemeClr val="bg2"/>
+          </a:solidFill>
+          <a:ln w="12700">
+            <a:solidFill>
+              <a:schemeClr val="bg2"/>
+            </a:solidFill>
+            <a:prstDash val="solid"/>
+          </a:ln>
+        </p:spPr>
+      </p:sp>
+      <p:sp>
+        <p:nvSpPr>
+          <p:cNvPr id="16" name="Text 14"/>
+          <p:cNvSpPr txBox="1"/>
+          <p:nvPr/>
+        </p:nvSpPr>
+        <p:spPr>
+          <a:xfrm>
+            <a:off x="3401568" y="3035808"/>
+            <a:ext cx="2331720" cy="320040"/>
+          </a:xfrm>
+          <a:prstGeom prst="rect">
+            <a:avLst/>
+          </a:prstGeom>
+          <a:noFill/>
+          <a:ln/>
+        </p:spPr>
+        <p:txBody>
+          <a:bodyPr wrap="square" lIns="0" tIns="0" rIns="0" bIns="0" rtlCol="0" anchor="t"/>
+          <a:lstStyle/>
+          <a:p>
+            <a:pPr indent="0" marL="0">
+              <a:buNone/>
+            </a:pPr>
+            <a:r>
+              <a:rPr lang="en-US" sz="1600" b="1" dirty="0">
+                <a:solidFill>
+                  <a:schemeClr val="tx2"/>
+                </a:solidFill>
+              </a:rPr>
+              <a:t>5  Safe output state</a:t>
+            </a:r>
+            <a:endParaRPr lang="en-US" sz="1600" dirty="0"/>
+          </a:p>
+        </p:txBody>
+      </p:sp>
+      <p:sp>
+        <p:nvSpPr>
+          <p:cNvPr id="17" name="Text 15"/>
+          <p:cNvSpPr txBox="1"/>
+          <p:nvPr/>
+        </p:nvSpPr>
+        <p:spPr>
+          <a:xfrm>
+            <a:off x="3401568" y="3383280"/>
+            <a:ext cx="2331720" cy="1051560"/>
+          </a:xfrm>
+          <a:prstGeom prst="rect">
+            <a:avLst/>
+          </a:prstGeom>
+          <a:noFill/>
+          <a:ln/>
+        </p:spPr>
+        <p:txBody>
+          <a:bodyPr wrap="square" lIns="0" tIns="0" rIns="0" bIns="0" rtlCol="0" anchor="t"/>
+          <a:lstStyle/>
+          <a:p>
+            <a:pPr indent="0" marL="0">
+              <a:buNone/>
+            </a:pPr>
+            <a:r>
+              <a:rPr lang="en-US" sz="1400" dirty="0">
+                <a:solidFill>
+                  <a:schemeClr val="tx1"/>
+                </a:solidFill>
+              </a:rPr>
+              <a:t>PWM forced low on the next clock, not at the next period.</a:t>
+            </a:r>
+            <a:endParaRPr lang="en-US" sz="1400" dirty="0"/>
+          </a:p>
+        </p:txBody>
+      </p:sp>
+      <p:sp>
+        <p:nvSpPr>
+          <p:cNvPr id="18" name="card 6  AI override"/>
+          <p:cNvSpPr/>
+          <p:nvPr/>
+        </p:nvSpPr>
+        <p:spPr>
+          <a:xfrm>
+            <a:off x="6071616" y="2926080"/>
+            <a:ext cx="2606040" cy="1600200"/>
+          </a:xfrm>
+          <a:prstGeom prst="roundRect">
+            <a:avLst>
+              <a:gd name="adj" fmla="val 4571"/>
+            </a:avLst>
+          </a:prstGeom>
+          <a:solidFill>
+            <a:schemeClr val="accent2"/>
+          </a:solidFill>
+          <a:ln w="12700">
+            <a:solidFill>
+              <a:schemeClr val="accent2"/>
+            </a:solidFill>
+            <a:prstDash val="solid"/>
+          </a:ln>
+        </p:spPr>
+      </p:sp>
+      <p:sp>
+        <p:nvSpPr>
+          <p:cNvPr id="19" name="Text 17"/>
+          <p:cNvSpPr txBox="1"/>
+          <p:nvPr/>
+        </p:nvSpPr>
+        <p:spPr>
+          <a:xfrm>
+            <a:off x="6208776" y="3035808"/>
+            <a:ext cx="2331720" cy="320040"/>
+          </a:xfrm>
+          <a:prstGeom prst="rect">
+            <a:avLst/>
+          </a:prstGeom>
+          <a:noFill/>
+          <a:ln/>
+        </p:spPr>
+        <p:txBody>
+          <a:bodyPr wrap="square" lIns="0" tIns="0" rIns="0" bIns="0" rtlCol="0" anchor="t"/>
+          <a:lstStyle/>
+          <a:p>
+            <a:pPr indent="0" marL="0">
+              <a:buNone/>
+            </a:pPr>
+            <a:r>
+              <a:rPr lang="en-US" sz="1600" b="1" dirty="0">
+                <a:solidFill>
+                  <a:schemeClr val="tx2"/>
+                </a:solidFill>
+              </a:rPr>
+              <a:t>6  AI override</a:t>
+            </a:r>
+            <a:endParaRPr lang="en-US" sz="1600" dirty="0"/>
+          </a:p>
+        </p:txBody>
+      </p:sp>
+      <p:sp>
+        <p:nvSpPr>
+          <p:cNvPr id="20" name="Text 18"/>
+          <p:cNvSpPr txBox="1"/>
+          <p:nvPr/>
+        </p:nvSpPr>
+        <p:spPr>
+          <a:xfrm>
+            <a:off x="6208776" y="3383280"/>
+            <a:ext cx="2331720" cy="1051560"/>
+          </a:xfrm>
+          <a:prstGeom prst="rect">
+            <a:avLst/>
+          </a:prstGeom>
+          <a:noFill/>
+          <a:ln/>
+        </p:spPr>
+        <p:txBody>
+          <a:bodyPr wrap="square" lIns="0" tIns="0" rIns="0" bIns="0" rtlCol="0" anchor="t"/>
+          <a:lstStyle/>
+          <a:p>
+            <a:pPr indent="0" marL="0">
+              <a:buNone/>
+            </a:pPr>
+            <a:r>
+              <a:rPr lang="en-US" sz="1400" dirty="0">
+                <a:solidFill>
+                  <a:schemeClr val="tx1"/>
+                </a:solidFill>
+              </a:rPr>
+              <a:t>AI is ignored when invalid or when any hard limit trips.</a:t>
+            </a:r>
+            <a:endParaRPr lang="en-US" sz="1400" dirty="0"/>
+          </a:p>
+        </p:txBody>
+      </p:sp>
+      <p:sp>
+        <p:nvSpPr>
+          <p:cNvPr id="25" name="Slide Number Placeholder 0"/>
+          <p:cNvSpPr>
+            <a:spLocks noGrp="1"/>
+          </p:cNvSpPr>
+          <p:nvPr>
+            <p:ph type="sldNum" sz="quarter" idx="4294967295"/>
+          </p:nvPr>
+        </p:nvSpPr>
+        <p:spPr>
+          <a:xfrm>
+            <a:off x="8321040" y="4754880"/>
+            <a:ext cx="457200" cy="274320"/>
+          </a:xfrm>
+          <a:prstGeom prst="rect">
+            <a:avLst/>
+          </a:prstGeom>
+          <a:extLst>
+            <a:ext uri="{C572A759-6A51-4108-AA02-DFA0A04FC94B}">
+              <ma14:wrappingTextBoxFlag xmlns:ma14="http://schemas.microsoft.com/office/mac/drawingml/2011/main" val="0"/>
+            </a:ext>
+          </a:extLst>
+        </p:spPr>
+        <p:txBody>
+          <a:bodyPr/>
+          <a:lstStyle>
+            <a:lvl1pPr>
+              <a:defRPr sz="1000">
+                <a:solidFill>
+                  <a:schemeClr val="accent5"/>
+                </a:solidFill>
+              </a:defRPr>
+            </a:lvl1pPr>
+          </a:lstStyle>
+          <a:p>
+            <a:pPr algn="l"/>
+            <a:fld id="{F7021451-1387-4CA6-816F-3879F97B5CBC}" type="slidenum">
+              <a:rPr b="0" lang="en-US"/>
+              <a:t>7</a:t>
+            </a:fld>
+            <a:endParaRPr lang="en-US"/>
+          </a:p>
+        </p:txBody>
+      </p:sp>
+    </p:spTree>
+  </p:cSld>
+  <p:clrMapOvr>
+    <a:masterClrMapping/>
+  </p:clrMapOvr>
+</p:sld>
+</file>
+
+<file path=ppt/slides/slide8.xml><?xml version="1.0" encoding="utf-8"?>
+<p:sld xmlns:a="http://schemas.openxmlformats.org/drawingml/2006/main" xmlns:r="http://schemas.openxmlformats.org/officeDocument/2006/relationships" xmlns:p="http://schemas.openxmlformats.org/presentationml/2006/main">
+  <p:cSld name="Slide 8">
+    <p:spTree>
+      <p:nvGrpSpPr>
+        <p:cNvPr id="1" name=""/>
+        <p:cNvGrpSpPr/>
+        <p:nvPr/>
+      </p:nvGrpSpPr>
+      <p:grpSpPr>
+        <a:xfrm>
+          <a:off x="0" y="0"/>
+          <a:ext cx="0" cy="0"/>
+          <a:chOff x="0" y="0"/>
+          <a:chExt cx="0" cy="0"/>
+        </a:xfrm>
+      </p:grpSpPr>
+      <p:sp>
+        <p:nvSpPr>
+          <p:cNvPr id="2" name="Text 0"/>
+          <p:cNvSpPr/>
+          <p:nvPr>
+            <p:ph idx="100" type="title" hasCustomPrompt="1"/>
+          </p:nvPr>
+        </p:nvSpPr>
+        <p:spPr>
+          <a:xfrm>
+            <a:off x="457200" y="274320"/>
+            <a:ext cx="8229600" cy="731520"/>
+          </a:xfrm>
+          <a:prstGeom prst="rect">
+            <a:avLst/>
+          </a:prstGeom>
+          <a:noFill/>
+          <a:ln/>
+        </p:spPr>
+        <p:txBody>
+          <a:bodyPr wrap="square" lIns="0" tIns="0" rIns="0" bIns="0" rtlCol="0" anchor="ctr"/>
+          <a:lstStyle/>
+          <a:p>
+            <a:pPr algn="l" indent="0" marL="0">
+              <a:buNone/>
+            </a:pPr>
+            <a:r>
+              <a:rPr lang="en-US" sz="3600" b="1" dirty="0">
+                <a:solidFill>
+                  <a:schemeClr val="tx2"/>
+                </a:solidFill>
+              </a:rPr>
               <a:t>Verilog modules</a:t>
             </a:r>
             <a:endParaRPr lang="en-US" sz="3600" dirty="0"/>
@@ -8217,7 +12598,7 @@
       </p:sp>
       <p:graphicFrame>
         <p:nvGraphicFramePr>
-          <p:cNvPr id="6" name="Table 0"/>
+          <p:cNvPr id="9" name="Table 0"/>
           <p:cNvGraphicFramePr>
             <a:graphicFrameLocks noGrp="1"/>
           </p:cNvGraphicFramePr>
@@ -9302,1510 +13683,6 @@
             <a:pPr algn="l"/>
             <a:fld id="{F7021451-1387-4CA6-816F-3879F97B5CBC}" type="slidenum">
               <a:rPr b="0" lang="en-US"/>
-              <a:t>5</a:t>
-            </a:fld>
-            <a:endParaRPr lang="en-US"/>
-          </a:p>
-        </p:txBody>
-      </p:sp>
-    </p:spTree>
-  </p:cSld>
-  <p:clrMapOvr>
-    <a:masterClrMapping/>
-  </p:clrMapOvr>
-</p:sld>
-</file>
-
-<file path=ppt/slides/slide6.xml><?xml version="1.0" encoding="utf-8"?>
-<p:sld xmlns:a="http://schemas.openxmlformats.org/drawingml/2006/main" xmlns:r="http://schemas.openxmlformats.org/officeDocument/2006/relationships" xmlns:p="http://schemas.openxmlformats.org/presentationml/2006/main">
-  <p:cSld name="Slide 6">
-    <p:spTree>
-      <p:nvGrpSpPr>
-        <p:cNvPr id="1" name=""/>
-        <p:cNvGrpSpPr/>
-        <p:nvPr/>
-      </p:nvGrpSpPr>
-      <p:grpSpPr>
-        <a:xfrm>
-          <a:off x="0" y="0"/>
-          <a:ext cx="0" cy="0"/>
-          <a:chOff x="0" y="0"/>
-          <a:chExt cx="0" cy="0"/>
-        </a:xfrm>
-      </p:grpSpPr>
-      <p:sp>
-        <p:nvSpPr>
-          <p:cNvPr id="2" name="Text 0"/>
-          <p:cNvSpPr/>
-          <p:nvPr>
-            <p:ph idx="100" type="title" hasCustomPrompt="1"/>
-          </p:nvPr>
-        </p:nvSpPr>
-        <p:spPr>
-          <a:xfrm>
-            <a:off x="457200" y="274320"/>
-            <a:ext cx="8229600" cy="731520"/>
-          </a:xfrm>
-          <a:prstGeom prst="rect">
-            <a:avLst/>
-          </a:prstGeom>
-          <a:noFill/>
-          <a:ln/>
-        </p:spPr>
-        <p:txBody>
-          <a:bodyPr wrap="square" lIns="0" tIns="0" rIns="0" bIns="0" rtlCol="0" anchor="ctr"/>
-          <a:lstStyle/>
-          <a:p>
-            <a:pPr algn="l" indent="0" marL="0">
-              <a:buNone/>
-            </a:pPr>
-            <a:r>
-              <a:rPr lang="en-US" sz="3600" b="1" dirty="0">
-                <a:solidFill>
-                  <a:schemeClr val="tx2"/>
-                </a:solidFill>
-              </a:rPr>
-              <a:t>Verification results</a:t>
-            </a:r>
-            <a:endParaRPr lang="en-US" sz="3600" dirty="0"/>
-          </a:p>
-        </p:txBody>
-      </p:sp>
-      <p:sp>
-        <p:nvSpPr>
-          <p:cNvPr id="3" name="Shape 1"/>
-          <p:cNvSpPr/>
-          <p:nvPr/>
-        </p:nvSpPr>
-        <p:spPr>
-          <a:xfrm>
-            <a:off x="457200" y="1188720"/>
-            <a:ext cx="3931920" cy="1508760"/>
-          </a:xfrm>
-          <a:prstGeom prst="roundRect">
-            <a:avLst>
-              <a:gd name="adj" fmla="val 4848"/>
-            </a:avLst>
-          </a:prstGeom>
-          <a:solidFill>
-            <a:schemeClr val="bg2"/>
-          </a:solidFill>
-          <a:ln w="12700">
-            <a:solidFill>
-              <a:schemeClr val="bg2"/>
-            </a:solidFill>
-            <a:prstDash val="solid"/>
-          </a:ln>
-        </p:spPr>
-      </p:sp>
-      <p:sp>
-        <p:nvSpPr>
-          <p:cNvPr id="4" name="Text 2"/>
-          <p:cNvSpPr txBox="1"/>
-          <p:nvPr/>
-        </p:nvSpPr>
-        <p:spPr>
-          <a:xfrm>
-            <a:off x="594360" y="1280160"/>
-            <a:ext cx="3657600" cy="640080"/>
-          </a:xfrm>
-          <a:prstGeom prst="rect">
-            <a:avLst/>
-          </a:prstGeom>
-          <a:noFill/>
-          <a:ln/>
-        </p:spPr>
-        <p:txBody>
-          <a:bodyPr wrap="square" lIns="0" tIns="0" rIns="0" bIns="0" rtlCol="0" anchor="t"/>
-          <a:lstStyle/>
-          <a:p>
-            <a:pPr indent="0" marL="0">
-              <a:buNone/>
-            </a:pPr>
-            <a:r>
-              <a:rPr lang="en-US" sz="3200" b="1" dirty="0">
-                <a:solidFill>
-                  <a:schemeClr val="accent1"/>
-                </a:solidFill>
-              </a:rPr>
-              <a:t>134 / 134</a:t>
-            </a:r>
-            <a:endParaRPr lang="en-US" sz="3200" dirty="0"/>
-          </a:p>
-        </p:txBody>
-      </p:sp>
-      <p:sp>
-        <p:nvSpPr>
-          <p:cNvPr id="5" name="Text 3"/>
-          <p:cNvSpPr txBox="1"/>
-          <p:nvPr/>
-        </p:nvSpPr>
-        <p:spPr>
-          <a:xfrm>
-            <a:off x="594360" y="1965960"/>
-            <a:ext cx="3657600" cy="640080"/>
-          </a:xfrm>
-          <a:prstGeom prst="rect">
-            <a:avLst/>
-          </a:prstGeom>
-          <a:noFill/>
-          <a:ln/>
-        </p:spPr>
-        <p:txBody>
-          <a:bodyPr wrap="square" lIns="0" tIns="0" rIns="0" bIns="0" rtlCol="0" anchor="t"/>
-          <a:lstStyle/>
-          <a:p>
-            <a:pPr indent="0" marL="0">
-              <a:buNone/>
-            </a:pPr>
-            <a:r>
-              <a:rPr lang="en-US" sz="1400" dirty="0">
-                <a:solidFill>
-                  <a:schemeClr val="tx1"/>
-                </a:solidFill>
-              </a:rPr>
-              <a:t>directed checks pass across 8 testbenches</a:t>
-            </a:r>
-            <a:endParaRPr lang="en-US" sz="1400" dirty="0"/>
-          </a:p>
-        </p:txBody>
-      </p:sp>
-      <p:sp>
-        <p:nvSpPr>
-          <p:cNvPr id="6" name="Shape 4"/>
-          <p:cNvSpPr/>
-          <p:nvPr/>
-        </p:nvSpPr>
-        <p:spPr>
-          <a:xfrm>
-            <a:off x="457200" y="2880360"/>
-            <a:ext cx="3931920" cy="1508760"/>
-          </a:xfrm>
-          <a:prstGeom prst="roundRect">
-            <a:avLst>
-              <a:gd name="adj" fmla="val 4848"/>
-            </a:avLst>
-          </a:prstGeom>
-          <a:solidFill>
-            <a:schemeClr val="accent1"/>
-          </a:solidFill>
-          <a:ln w="12700">
-            <a:solidFill>
-              <a:schemeClr val="accent1"/>
-            </a:solidFill>
-            <a:prstDash val="solid"/>
-          </a:ln>
-        </p:spPr>
-      </p:sp>
-      <p:sp>
-        <p:nvSpPr>
-          <p:cNvPr id="7" name="Text 5"/>
-          <p:cNvSpPr txBox="1"/>
-          <p:nvPr/>
-        </p:nvSpPr>
-        <p:spPr>
-          <a:xfrm>
-            <a:off x="594360" y="2971800"/>
-            <a:ext cx="3657600" cy="640080"/>
-          </a:xfrm>
-          <a:prstGeom prst="rect">
-            <a:avLst/>
-          </a:prstGeom>
-          <a:noFill/>
-          <a:ln/>
-        </p:spPr>
-        <p:txBody>
-          <a:bodyPr wrap="square" lIns="0" tIns="0" rIns="0" bIns="0" rtlCol="0" anchor="t"/>
-          <a:lstStyle/>
-          <a:p>
-            <a:pPr indent="0" marL="0">
-              <a:buNone/>
-            </a:pPr>
-            <a:r>
-              <a:rPr lang="en-US" sz="3200" b="1" dirty="0">
-                <a:solidFill>
-                  <a:schemeClr val="bg1"/>
-                </a:solidFill>
-              </a:rPr>
-              <a:t>2 x 1,800</a:t>
-            </a:r>
-            <a:endParaRPr lang="en-US" sz="3200" dirty="0"/>
-          </a:p>
-        </p:txBody>
-      </p:sp>
-      <p:sp>
-        <p:nvSpPr>
-          <p:cNvPr id="8" name="Text 6"/>
-          <p:cNvSpPr txBox="1"/>
-          <p:nvPr/>
-        </p:nvSpPr>
-        <p:spPr>
-          <a:xfrm>
-            <a:off x="594360" y="3657600"/>
-            <a:ext cx="3657600" cy="640080"/>
-          </a:xfrm>
-          <a:prstGeom prst="rect">
-            <a:avLst/>
-          </a:prstGeom>
-          <a:noFill/>
-          <a:ln/>
-        </p:spPr>
-        <p:txBody>
-          <a:bodyPr wrap="square" lIns="0" tIns="0" rIns="0" bIns="0" rtlCol="0" anchor="t"/>
-          <a:lstStyle/>
-          <a:p>
-            <a:pPr indent="0" marL="0">
-              <a:buNone/>
-            </a:pPr>
-            <a:r>
-              <a:rPr lang="en-US" sz="1400" dirty="0">
-                <a:solidFill>
-                  <a:schemeClr val="bg1"/>
-                </a:solidFill>
-              </a:rPr>
-              <a:t>replayed vectors with zero safety violations</a:t>
-            </a:r>
-            <a:endParaRPr lang="en-US" sz="1400" dirty="0"/>
-          </a:p>
-        </p:txBody>
-      </p:sp>
-      <p:sp>
-        <p:nvSpPr>
-          <p:cNvPr id="9" name="card Cases covered"/>
-          <p:cNvSpPr/>
-          <p:nvPr/>
-        </p:nvSpPr>
-        <p:spPr>
-          <a:xfrm>
-            <a:off x="4572000" y="1188720"/>
-            <a:ext cx="4114800" cy="3200400"/>
-          </a:xfrm>
-          <a:prstGeom prst="roundRect">
-            <a:avLst>
-              <a:gd name="adj" fmla="val 2286"/>
-            </a:avLst>
-          </a:prstGeom>
-          <a:solidFill>
-            <a:schemeClr val="bg2"/>
-          </a:solidFill>
-          <a:ln w="12700">
-            <a:solidFill>
-              <a:schemeClr val="bg2"/>
-            </a:solidFill>
-            <a:prstDash val="solid"/>
-          </a:ln>
-        </p:spPr>
-      </p:sp>
-      <p:sp>
-        <p:nvSpPr>
-          <p:cNvPr id="10" name="Text 8"/>
-          <p:cNvSpPr txBox="1"/>
-          <p:nvPr/>
-        </p:nvSpPr>
-        <p:spPr>
-          <a:xfrm>
-            <a:off x="4709160" y="1298448"/>
-            <a:ext cx="3840480" cy="320040"/>
-          </a:xfrm>
-          <a:prstGeom prst="rect">
-            <a:avLst/>
-          </a:prstGeom>
-          <a:noFill/>
-          <a:ln/>
-        </p:spPr>
-        <p:txBody>
-          <a:bodyPr wrap="square" lIns="0" tIns="0" rIns="0" bIns="0" rtlCol="0" anchor="t"/>
-          <a:lstStyle/>
-          <a:p>
-            <a:pPr indent="0" marL="0">
-              <a:buNone/>
-            </a:pPr>
-            <a:r>
-              <a:rPr lang="en-US" sz="1600" b="1" dirty="0">
-                <a:solidFill>
-                  <a:schemeClr val="tx2"/>
-                </a:solidFill>
-              </a:rPr>
-              <a:t>Cases covered</a:t>
-            </a:r>
-            <a:endParaRPr lang="en-US" sz="1600" dirty="0"/>
-          </a:p>
-        </p:txBody>
-      </p:sp>
-      <p:sp>
-        <p:nvSpPr>
-          <p:cNvPr id="11" name="Text 9"/>
-          <p:cNvSpPr txBox="1"/>
-          <p:nvPr/>
-        </p:nvSpPr>
-        <p:spPr>
-          <a:xfrm>
-            <a:off x="4754880" y="1691640"/>
-            <a:ext cx="3749040" cy="2651760"/>
-          </a:xfrm>
-          <a:prstGeom prst="rect">
-            <a:avLst/>
-          </a:prstGeom>
-          <a:noFill/>
-          <a:ln/>
-        </p:spPr>
-        <p:txBody>
-          <a:bodyPr wrap="square" lIns="0" tIns="0" rIns="0" bIns="0" rtlCol="0" anchor="t"/>
-          <a:lstStyle/>
-          <a:p>
-            <a:pPr marL="342900" indent="-342900">
-              <a:spcAft>
-                <a:spcPts val="600"/>
-              </a:spcAft>
-              <a:buSzPct val="100000"/>
-              <a:buChar char="•"/>
-            </a:pPr>
-            <a:r>
-              <a:rPr lang="en-US" sz="1400" dirty="0">
-                <a:solidFill>
-                  <a:schemeClr val="tx1"/>
-                </a:solidFill>
-              </a:rPr>
-              <a:t>No, light and normal contact</a:t>
-            </a:r>
-            <a:endParaRPr lang="en-US" sz="1400" dirty="0"/>
-          </a:p>
-          <a:p>
-            <a:pPr marL="342900" indent="-342900">
-              <a:spcAft>
-                <a:spcPts val="600"/>
-              </a:spcAft>
-              <a:buSzPct val="100000"/>
-              <a:buChar char="•"/>
-            </a:pPr>
-            <a:r>
-              <a:rPr lang="en-US" sz="1400" dirty="0">
-                <a:solidFill>
-                  <a:schemeClr val="tx1"/>
-                </a:solidFill>
-              </a:rPr>
-              <a:t>High and excessive force</a:t>
-            </a:r>
-            <a:endParaRPr lang="en-US" sz="1400" dirty="0"/>
-          </a:p>
-          <a:p>
-            <a:pPr marL="342900" indent="-342900">
-              <a:spcAft>
-                <a:spcPts val="600"/>
-              </a:spcAft>
-              <a:buSzPct val="100000"/>
-              <a:buChar char="•"/>
-            </a:pPr>
-            <a:r>
-              <a:rPr lang="en-US" sz="1400" dirty="0">
-                <a:solidFill>
-                  <a:schemeClr val="tx1"/>
-                </a:solidFill>
-              </a:rPr>
-              <a:t>AI class changes and AI failure</a:t>
-            </a:r>
-            <a:endParaRPr lang="en-US" sz="1400" dirty="0"/>
-          </a:p>
-          <a:p>
-            <a:pPr marL="342900" indent="-342900">
-              <a:spcAft>
-                <a:spcPts val="600"/>
-              </a:spcAft>
-              <a:buSzPct val="100000"/>
-              <a:buChar char="•"/>
-            </a:pPr>
-            <a:r>
-              <a:rPr lang="en-US" sz="1400" dirty="0">
-                <a:solidFill>
-                  <a:schemeClr val="tx1"/>
-                </a:solidFill>
-              </a:rPr>
-              <a:t>Emergency stop and sensor failure</a:t>
-            </a:r>
-            <a:endParaRPr lang="en-US" sz="1400" dirty="0"/>
-          </a:p>
-          <a:p>
-            <a:pPr marL="342900" indent="-342900">
-              <a:spcAft>
-                <a:spcPts val="600"/>
-              </a:spcAft>
-              <a:buSzPct val="100000"/>
-              <a:buChar char="•"/>
-            </a:pPr>
-            <a:r>
-              <a:rPr lang="en-US" sz="1400" dirty="0">
-                <a:solidFill>
-                  <a:schemeClr val="tx1"/>
-                </a:solidFill>
-              </a:rPr>
-              <a:t>Reset and LUT boundaries</a:t>
-            </a:r>
-            <a:endParaRPr lang="en-US" sz="1400" dirty="0"/>
-          </a:p>
-          <a:p>
-            <a:pPr marL="342900" indent="-342900">
-              <a:spcAft>
-                <a:spcPts val="600"/>
-              </a:spcAft>
-              <a:buSzPct val="100000"/>
-              <a:buChar char="•"/>
-            </a:pPr>
-            <a:r>
-              <a:rPr lang="en-US" sz="1400" dirty="0">
-                <a:solidFill>
-                  <a:schemeClr val="tx1"/>
-                </a:solidFill>
-              </a:rPr>
-              <a:t>PWM duty and instant kill</a:t>
-            </a:r>
-            <a:endParaRPr lang="en-US" sz="1400" dirty="0"/>
-          </a:p>
-        </p:txBody>
-      </p:sp>
-      <p:sp>
-        <p:nvSpPr>
-          <p:cNvPr id="25" name="Slide Number Placeholder 0"/>
-          <p:cNvSpPr>
-            <a:spLocks noGrp="1"/>
-          </p:cNvSpPr>
-          <p:nvPr>
-            <p:ph type="sldNum" sz="quarter" idx="4294967295"/>
-          </p:nvPr>
-        </p:nvSpPr>
-        <p:spPr>
-          <a:xfrm>
-            <a:off x="8321040" y="4754880"/>
-            <a:ext cx="457200" cy="274320"/>
-          </a:xfrm>
-          <a:prstGeom prst="rect">
-            <a:avLst/>
-          </a:prstGeom>
-          <a:extLst>
-            <a:ext uri="{C572A759-6A51-4108-AA02-DFA0A04FC94B}">
-              <ma14:wrappingTextBoxFlag xmlns:ma14="http://schemas.microsoft.com/office/mac/drawingml/2011/main" val="0"/>
-            </a:ext>
-          </a:extLst>
-        </p:spPr>
-        <p:txBody>
-          <a:bodyPr/>
-          <a:lstStyle>
-            <a:lvl1pPr>
-              <a:defRPr sz="1000">
-                <a:solidFill>
-                  <a:schemeClr val="accent5"/>
-                </a:solidFill>
-              </a:defRPr>
-            </a:lvl1pPr>
-          </a:lstStyle>
-          <a:p>
-            <a:pPr algn="l"/>
-            <a:fld id="{F7021451-1387-4CA6-816F-3879F97B5CBC}" type="slidenum">
-              <a:rPr b="0" lang="en-US"/>
-              <a:t>6</a:t>
-            </a:fld>
-            <a:endParaRPr lang="en-US"/>
-          </a:p>
-        </p:txBody>
-      </p:sp>
-    </p:spTree>
-  </p:cSld>
-  <p:clrMapOvr>
-    <a:masterClrMapping/>
-  </p:clrMapOvr>
-</p:sld>
-</file>
-
-<file path=ppt/slides/slide7.xml><?xml version="1.0" encoding="utf-8"?>
-<p:sld xmlns:a="http://schemas.openxmlformats.org/drawingml/2006/main" xmlns:r="http://schemas.openxmlformats.org/officeDocument/2006/relationships" xmlns:p="http://schemas.openxmlformats.org/presentationml/2006/main">
-  <p:cSld name="Slide 7">
-    <p:spTree>
-      <p:nvGrpSpPr>
-        <p:cNvPr id="1" name=""/>
-        <p:cNvGrpSpPr/>
-        <p:nvPr/>
-      </p:nvGrpSpPr>
-      <p:grpSpPr>
-        <a:xfrm>
-          <a:off x="0" y="0"/>
-          <a:ext cx="0" cy="0"/>
-          <a:chOff x="0" y="0"/>
-          <a:chExt cx="0" cy="0"/>
-        </a:xfrm>
-      </p:grpSpPr>
-      <p:sp>
-        <p:nvSpPr>
-          <p:cNvPr id="2" name="Text 0"/>
-          <p:cNvSpPr/>
-          <p:nvPr>
-            <p:ph idx="100" type="title" hasCustomPrompt="1"/>
-          </p:nvPr>
-        </p:nvSpPr>
-        <p:spPr>
-          <a:xfrm>
-            <a:off x="457200" y="274320"/>
-            <a:ext cx="8229600" cy="731520"/>
-          </a:xfrm>
-          <a:prstGeom prst="rect">
-            <a:avLst/>
-          </a:prstGeom>
-          <a:noFill/>
-          <a:ln/>
-        </p:spPr>
-        <p:txBody>
-          <a:bodyPr wrap="square" lIns="0" tIns="0" rIns="0" bIns="0" rtlCol="0" anchor="ctr"/>
-          <a:lstStyle/>
-          <a:p>
-            <a:pPr algn="l" indent="0" marL="0">
-              <a:buNone/>
-            </a:pPr>
-            <a:r>
-              <a:rPr lang="en-US" sz="3600" b="1" dirty="0">
-                <a:solidFill>
-                  <a:schemeClr val="tx2"/>
-                </a:solidFill>
-              </a:rPr>
-              <a:t>AI overridden by the Governor</a:t>
-            </a:r>
-            <a:endParaRPr lang="en-US" sz="3600" dirty="0"/>
-          </a:p>
-        </p:txBody>
-      </p:sp>
-      <p:pic>
-        <p:nvPicPr>
-          <p:cNvPr id="3" name="Image 0" descr="Waveform: force exceeds FORCE_MAX while AI class stays 2; safe_state rises and pwm_out falls">    </p:cNvPr>
-          <p:cNvPicPr>
-            <a:picLocks noChangeAspect="1"/>
-          </p:cNvPicPr>
-          <p:nvPr/>
-        </p:nvPicPr>
-        <p:blipFill>
-          <a:blip r:embed="rId1"/>
-          <a:stretch>
-            <a:fillRect/>
-          </a:stretch>
-        </p:blipFill>
-        <p:spPr>
-          <a:xfrm>
-            <a:off x="457200" y="1097280"/>
-            <a:ext cx="4937760" cy="3401568"/>
-          </a:xfrm>
-          <a:prstGeom prst="rect">
-            <a:avLst/>
-          </a:prstGeom>
-        </p:spPr>
-      </p:pic>
-      <p:sp>
-        <p:nvSpPr>
-          <p:cNvPr id="4" name="card AI says class 2"/>
-          <p:cNvSpPr/>
-          <p:nvPr/>
-        </p:nvSpPr>
-        <p:spPr>
-          <a:xfrm>
-            <a:off x="5577840" y="1188720"/>
-            <a:ext cx="3108960" cy="1051560"/>
-          </a:xfrm>
-          <a:prstGeom prst="roundRect">
-            <a:avLst>
-              <a:gd name="adj" fmla="val 6957"/>
-            </a:avLst>
-          </a:prstGeom>
-          <a:solidFill>
-            <a:schemeClr val="bg2"/>
-          </a:solidFill>
-          <a:ln w="12700">
-            <a:solidFill>
-              <a:schemeClr val="bg2"/>
-            </a:solidFill>
-            <a:prstDash val="solid"/>
-          </a:ln>
-        </p:spPr>
-      </p:sp>
-      <p:sp>
-        <p:nvSpPr>
-          <p:cNvPr id="5" name="Text 2"/>
-          <p:cNvSpPr txBox="1"/>
-          <p:nvPr/>
-        </p:nvSpPr>
-        <p:spPr>
-          <a:xfrm>
-            <a:off x="5715000" y="1298448"/>
-            <a:ext cx="2834640" cy="320040"/>
-          </a:xfrm>
-          <a:prstGeom prst="rect">
-            <a:avLst/>
-          </a:prstGeom>
-          <a:noFill/>
-          <a:ln/>
-        </p:spPr>
-        <p:txBody>
-          <a:bodyPr wrap="square" lIns="0" tIns="0" rIns="0" bIns="0" rtlCol="0" anchor="t"/>
-          <a:lstStyle/>
-          <a:p>
-            <a:pPr indent="0" marL="0">
-              <a:buNone/>
-            </a:pPr>
-            <a:r>
-              <a:rPr lang="en-US" sz="1400" b="1" dirty="0">
-                <a:solidFill>
-                  <a:schemeClr val="tx2"/>
-                </a:solidFill>
-              </a:rPr>
-              <a:t>AI says class 2</a:t>
-            </a:r>
-            <a:endParaRPr lang="en-US" sz="1400" dirty="0"/>
-          </a:p>
-        </p:txBody>
-      </p:sp>
-      <p:sp>
-        <p:nvSpPr>
-          <p:cNvPr id="6" name="Text 3"/>
-          <p:cNvSpPr txBox="1"/>
-          <p:nvPr/>
-        </p:nvSpPr>
-        <p:spPr>
-          <a:xfrm>
-            <a:off x="5715000" y="1645920"/>
-            <a:ext cx="2834640" cy="502920"/>
-          </a:xfrm>
-          <a:prstGeom prst="rect">
-            <a:avLst/>
-          </a:prstGeom>
-          <a:noFill/>
-          <a:ln/>
-        </p:spPr>
-        <p:txBody>
-          <a:bodyPr wrap="square" lIns="0" tIns="0" rIns="0" bIns="0" rtlCol="0" anchor="t"/>
-          <a:lstStyle/>
-          <a:p>
-            <a:pPr indent="0" marL="0">
-              <a:buNone/>
-            </a:pPr>
-            <a:r>
-              <a:rPr lang="en-US" sz="1400" dirty="0">
-                <a:solidFill>
-                  <a:schemeClr val="tx1"/>
-                </a:solidFill>
-              </a:rPr>
-              <a:t>Normal grip, valid, steady.</a:t>
-            </a:r>
-            <a:endParaRPr lang="en-US" sz="1400" dirty="0"/>
-          </a:p>
-        </p:txBody>
-      </p:sp>
-      <p:sp>
-        <p:nvSpPr>
-          <p:cNvPr id="7" name="card Force passes FORCE_MAX"/>
-          <p:cNvSpPr/>
-          <p:nvPr/>
-        </p:nvSpPr>
-        <p:spPr>
-          <a:xfrm>
-            <a:off x="5577840" y="2377440"/>
-            <a:ext cx="3108960" cy="1051560"/>
-          </a:xfrm>
-          <a:prstGeom prst="roundRect">
-            <a:avLst>
-              <a:gd name="adj" fmla="val 6957"/>
-            </a:avLst>
-          </a:prstGeom>
-          <a:solidFill>
-            <a:schemeClr val="accent2"/>
-          </a:solidFill>
-          <a:ln w="12700">
-            <a:solidFill>
-              <a:schemeClr val="accent2"/>
-            </a:solidFill>
-            <a:prstDash val="solid"/>
-          </a:ln>
-        </p:spPr>
-      </p:sp>
-      <p:sp>
-        <p:nvSpPr>
-          <p:cNvPr id="8" name="Text 5"/>
-          <p:cNvSpPr txBox="1"/>
-          <p:nvPr/>
-        </p:nvSpPr>
-        <p:spPr>
-          <a:xfrm>
-            <a:off x="5715000" y="2487168"/>
-            <a:ext cx="2834640" cy="320040"/>
-          </a:xfrm>
-          <a:prstGeom prst="rect">
-            <a:avLst/>
-          </a:prstGeom>
-          <a:noFill/>
-          <a:ln/>
-        </p:spPr>
-        <p:txBody>
-          <a:bodyPr wrap="square" lIns="0" tIns="0" rIns="0" bIns="0" rtlCol="0" anchor="t"/>
-          <a:lstStyle/>
-          <a:p>
-            <a:pPr indent="0" marL="0">
-              <a:buNone/>
-            </a:pPr>
-            <a:r>
-              <a:rPr lang="en-US" sz="1400" b="1" dirty="0">
-                <a:solidFill>
-                  <a:schemeClr val="tx2"/>
-                </a:solidFill>
-              </a:rPr>
-              <a:t>Force passes FORCE_MAX</a:t>
-            </a:r>
-            <a:endParaRPr lang="en-US" sz="1400" dirty="0"/>
-          </a:p>
-        </p:txBody>
-      </p:sp>
-      <p:sp>
-        <p:nvSpPr>
-          <p:cNvPr id="9" name="Text 6"/>
-          <p:cNvSpPr txBox="1"/>
-          <p:nvPr/>
-        </p:nvSpPr>
-        <p:spPr>
-          <a:xfrm>
-            <a:off x="5715000" y="2834640"/>
-            <a:ext cx="2834640" cy="502920"/>
-          </a:xfrm>
-          <a:prstGeom prst="rect">
-            <a:avLst/>
-          </a:prstGeom>
-          <a:noFill/>
-          <a:ln/>
-        </p:spPr>
-        <p:txBody>
-          <a:bodyPr wrap="square" lIns="0" tIns="0" rIns="0" bIns="0" rtlCol="0" anchor="t"/>
-          <a:lstStyle/>
-          <a:p>
-            <a:pPr indent="0" marL="0">
-              <a:buNone/>
-            </a:pPr>
-            <a:r>
-              <a:rPr lang="en-US" sz="1400" dirty="0">
-                <a:solidFill>
-                  <a:schemeClr val="tx1"/>
-                </a:solidFill>
-              </a:rPr>
-              <a:t>Governor trips the safe state.</a:t>
-            </a:r>
-            <a:endParaRPr lang="en-US" sz="1400" dirty="0"/>
-          </a:p>
-        </p:txBody>
-      </p:sp>
-      <p:sp>
-        <p:nvSpPr>
-          <p:cNvPr id="10" name="card PWM goes low"/>
-          <p:cNvSpPr/>
-          <p:nvPr/>
-        </p:nvSpPr>
-        <p:spPr>
-          <a:xfrm>
-            <a:off x="5577840" y="3566160"/>
-            <a:ext cx="3108960" cy="914400"/>
-          </a:xfrm>
-          <a:prstGeom prst="roundRect">
-            <a:avLst>
-              <a:gd name="adj" fmla="val 8000"/>
-            </a:avLst>
-          </a:prstGeom>
-          <a:solidFill>
-            <a:schemeClr val="bg2"/>
-          </a:solidFill>
-          <a:ln w="12700">
-            <a:solidFill>
-              <a:schemeClr val="bg2"/>
-            </a:solidFill>
-            <a:prstDash val="solid"/>
-          </a:ln>
-        </p:spPr>
-      </p:sp>
-      <p:sp>
-        <p:nvSpPr>
-          <p:cNvPr id="11" name="Text 8"/>
-          <p:cNvSpPr txBox="1"/>
-          <p:nvPr/>
-        </p:nvSpPr>
-        <p:spPr>
-          <a:xfrm>
-            <a:off x="5715000" y="3675888"/>
-            <a:ext cx="2834640" cy="320040"/>
-          </a:xfrm>
-          <a:prstGeom prst="rect">
-            <a:avLst/>
-          </a:prstGeom>
-          <a:noFill/>
-          <a:ln/>
-        </p:spPr>
-        <p:txBody>
-          <a:bodyPr wrap="square" lIns="0" tIns="0" rIns="0" bIns="0" rtlCol="0" anchor="t"/>
-          <a:lstStyle/>
-          <a:p>
-            <a:pPr indent="0" marL="0">
-              <a:buNone/>
-            </a:pPr>
-            <a:r>
-              <a:rPr lang="en-US" sz="1400" b="1" dirty="0">
-                <a:solidFill>
-                  <a:schemeClr val="tx2"/>
-                </a:solidFill>
-              </a:rPr>
-              <a:t>PWM goes low</a:t>
-            </a:r>
-            <a:endParaRPr lang="en-US" sz="1400" dirty="0"/>
-          </a:p>
-        </p:txBody>
-      </p:sp>
-      <p:sp>
-        <p:nvSpPr>
-          <p:cNvPr id="12" name="Text 9"/>
-          <p:cNvSpPr txBox="1"/>
-          <p:nvPr/>
-        </p:nvSpPr>
-        <p:spPr>
-          <a:xfrm>
-            <a:off x="5715000" y="4023360"/>
-            <a:ext cx="2834640" cy="365760"/>
-          </a:xfrm>
-          <a:prstGeom prst="rect">
-            <a:avLst/>
-          </a:prstGeom>
-          <a:noFill/>
-          <a:ln/>
-        </p:spPr>
-        <p:txBody>
-          <a:bodyPr wrap="square" lIns="0" tIns="0" rIns="0" bIns="0" rtlCol="0" anchor="t"/>
-          <a:lstStyle/>
-          <a:p>
-            <a:pPr indent="0" marL="0">
-              <a:buNone/>
-            </a:pPr>
-            <a:r>
-              <a:rPr lang="en-US" sz="1400" dirty="0">
-                <a:solidFill>
-                  <a:schemeClr val="tx1"/>
-                </a:solidFill>
-              </a:rPr>
-              <a:t>AI input ignored.</a:t>
-            </a:r>
-            <a:endParaRPr lang="en-US" sz="1400" dirty="0"/>
-          </a:p>
-        </p:txBody>
-      </p:sp>
-      <p:sp>
-        <p:nvSpPr>
-          <p:cNvPr id="13" name="Text 10"/>
-          <p:cNvSpPr txBox="1"/>
-          <p:nvPr/>
-        </p:nvSpPr>
-        <p:spPr>
-          <a:xfrm>
-            <a:off x="457200" y="4553712"/>
-            <a:ext cx="4937760" cy="228600"/>
-          </a:xfrm>
-          <a:prstGeom prst="rect">
-            <a:avLst/>
-          </a:prstGeom>
-          <a:noFill/>
-          <a:ln/>
-        </p:spPr>
-        <p:txBody>
-          <a:bodyPr wrap="square" lIns="0" tIns="0" rIns="0" bIns="0" rtlCol="0" anchor="t"/>
-          <a:lstStyle/>
-          <a:p>
-            <a:pPr indent="0" marL="0">
-              <a:buNone/>
-            </a:pPr>
-            <a:r>
-              <a:rPr lang="en-US" sz="1000" dirty="0">
-                <a:solidFill>
-                  <a:schemeClr val="accent5"/>
-                </a:solidFill>
-              </a:rPr>
-              <a:t>RTL simulation, 100 MHz clock</a:t>
-            </a:r>
-            <a:endParaRPr lang="en-US" sz="1000" dirty="0"/>
-          </a:p>
-        </p:txBody>
-      </p:sp>
-      <p:sp>
-        <p:nvSpPr>
-          <p:cNvPr id="25" name="Slide Number Placeholder 0"/>
-          <p:cNvSpPr>
-            <a:spLocks noGrp="1"/>
-          </p:cNvSpPr>
-          <p:nvPr>
-            <p:ph type="sldNum" sz="quarter" idx="4294967295"/>
-          </p:nvPr>
-        </p:nvSpPr>
-        <p:spPr>
-          <a:xfrm>
-            <a:off x="8321040" y="4754880"/>
-            <a:ext cx="457200" cy="274320"/>
-          </a:xfrm>
-          <a:prstGeom prst="rect">
-            <a:avLst/>
-          </a:prstGeom>
-          <a:extLst>
-            <a:ext uri="{C572A759-6A51-4108-AA02-DFA0A04FC94B}">
-              <ma14:wrappingTextBoxFlag xmlns:ma14="http://schemas.microsoft.com/office/mac/drawingml/2011/main" val="0"/>
-            </a:ext>
-          </a:extLst>
-        </p:spPr>
-        <p:txBody>
-          <a:bodyPr/>
-          <a:lstStyle>
-            <a:lvl1pPr>
-              <a:defRPr sz="1000">
-                <a:solidFill>
-                  <a:schemeClr val="accent5"/>
-                </a:solidFill>
-              </a:defRPr>
-            </a:lvl1pPr>
-          </a:lstStyle>
-          <a:p>
-            <a:pPr algn="l"/>
-            <a:fld id="{F7021451-1387-4CA6-816F-3879F97B5CBC}" type="slidenum">
-              <a:rPr b="0" lang="en-US"/>
-              <a:t>7</a:t>
-            </a:fld>
-            <a:endParaRPr lang="en-US"/>
-          </a:p>
-        </p:txBody>
-      </p:sp>
-    </p:spTree>
-  </p:cSld>
-  <p:clrMapOvr>
-    <a:masterClrMapping/>
-  </p:clrMapOvr>
-</p:sld>
-</file>
-
-<file path=ppt/slides/slide8.xml><?xml version="1.0" encoding="utf-8"?>
-<p:sld xmlns:a="http://schemas.openxmlformats.org/drawingml/2006/main" xmlns:r="http://schemas.openxmlformats.org/officeDocument/2006/relationships" xmlns:p="http://schemas.openxmlformats.org/presentationml/2006/main">
-  <p:cSld name="Slide 8">
-    <p:spTree>
-      <p:nvGrpSpPr>
-        <p:cNvPr id="1" name=""/>
-        <p:cNvGrpSpPr/>
-        <p:nvPr/>
-      </p:nvGrpSpPr>
-      <p:grpSpPr>
-        <a:xfrm>
-          <a:off x="0" y="0"/>
-          <a:ext cx="0" cy="0"/>
-          <a:chOff x="0" y="0"/>
-          <a:chExt cx="0" cy="0"/>
-        </a:xfrm>
-      </p:grpSpPr>
-      <p:sp>
-        <p:nvSpPr>
-          <p:cNvPr id="2" name="Text 0"/>
-          <p:cNvSpPr/>
-          <p:nvPr>
-            <p:ph idx="100" type="title" hasCustomPrompt="1"/>
-          </p:nvPr>
-        </p:nvSpPr>
-        <p:spPr>
-          <a:xfrm>
-            <a:off x="457200" y="274320"/>
-            <a:ext cx="8229600" cy="731520"/>
-          </a:xfrm>
-          <a:prstGeom prst="rect">
-            <a:avLst/>
-          </a:prstGeom>
-          <a:noFill/>
-          <a:ln/>
-        </p:spPr>
-        <p:txBody>
-          <a:bodyPr wrap="square" lIns="0" tIns="0" rIns="0" bIns="0" rtlCol="0" anchor="ctr"/>
-          <a:lstStyle/>
-          <a:p>
-            <a:pPr algn="l" indent="0" marL="0">
-              <a:buNone/>
-            </a:pPr>
-            <a:r>
-              <a:rPr lang="en-US" sz="3600" b="1" dirty="0">
-                <a:solidFill>
-                  <a:schemeClr val="tx2"/>
-                </a:solidFill>
-              </a:rPr>
-              <a:t>FPGA path latency</a:t>
-            </a:r>
-            <a:endParaRPr lang="en-US" sz="3600" dirty="0"/>
-          </a:p>
-        </p:txBody>
-      </p:sp>
-      <p:sp>
-        <p:nvSpPr>
-          <p:cNvPr id="3" name="Shape 1"/>
-          <p:cNvSpPr/>
-          <p:nvPr/>
-        </p:nvSpPr>
-        <p:spPr>
-          <a:xfrm>
-            <a:off x="457200" y="1188720"/>
-            <a:ext cx="4023360" cy="1463040"/>
-          </a:xfrm>
-          <a:prstGeom prst="roundRect">
-            <a:avLst>
-              <a:gd name="adj" fmla="val 5000"/>
-            </a:avLst>
-          </a:prstGeom>
-          <a:solidFill>
-            <a:schemeClr val="bg2"/>
-          </a:solidFill>
-          <a:ln w="12700">
-            <a:solidFill>
-              <a:schemeClr val="bg2"/>
-            </a:solidFill>
-            <a:prstDash val="solid"/>
-          </a:ln>
-        </p:spPr>
-      </p:sp>
-      <p:sp>
-        <p:nvSpPr>
-          <p:cNvPr id="4" name="Text 2"/>
-          <p:cNvSpPr txBox="1"/>
-          <p:nvPr/>
-        </p:nvSpPr>
-        <p:spPr>
-          <a:xfrm>
-            <a:off x="594360" y="1280160"/>
-            <a:ext cx="3749040" cy="640080"/>
-          </a:xfrm>
-          <a:prstGeom prst="rect">
-            <a:avLst/>
-          </a:prstGeom>
-          <a:noFill/>
-          <a:ln/>
-        </p:spPr>
-        <p:txBody>
-          <a:bodyPr wrap="square" lIns="0" tIns="0" rIns="0" bIns="0" rtlCol="0" anchor="t"/>
-          <a:lstStyle/>
-          <a:p>
-            <a:pPr indent="0" marL="0">
-              <a:buNone/>
-            </a:pPr>
-            <a:r>
-              <a:rPr lang="en-US" sz="3200" b="1" dirty="0">
-                <a:solidFill>
-                  <a:schemeClr val="accent1"/>
-                </a:solidFill>
-              </a:rPr>
-              <a:t>40 ns</a:t>
-            </a:r>
-            <a:endParaRPr lang="en-US" sz="3200" dirty="0"/>
-          </a:p>
-        </p:txBody>
-      </p:sp>
-      <p:sp>
-        <p:nvSpPr>
-          <p:cNvPr id="5" name="Text 3"/>
-          <p:cNvSpPr txBox="1"/>
-          <p:nvPr/>
-        </p:nvSpPr>
-        <p:spPr>
-          <a:xfrm>
-            <a:off x="594360" y="1965960"/>
-            <a:ext cx="3749040" cy="594360"/>
-          </a:xfrm>
-          <a:prstGeom prst="rect">
-            <a:avLst/>
-          </a:prstGeom>
-          <a:noFill/>
-          <a:ln/>
-        </p:spPr>
-        <p:txBody>
-          <a:bodyPr wrap="square" lIns="0" tIns="0" rIns="0" bIns="0" rtlCol="0" anchor="t"/>
-          <a:lstStyle/>
-          <a:p>
-            <a:pPr indent="0" marL="0">
-              <a:buNone/>
-            </a:pPr>
-            <a:r>
-              <a:rPr lang="en-US" sz="1400" dirty="0">
-                <a:solidFill>
-                  <a:schemeClr val="tx1"/>
-                </a:solidFill>
-              </a:rPr>
-              <a:t>ADC sample to PWM low: 4 clock cycles, jitter 0</a:t>
-            </a:r>
-            <a:endParaRPr lang="en-US" sz="1400" dirty="0"/>
-          </a:p>
-        </p:txBody>
-      </p:sp>
-      <p:sp>
-        <p:nvSpPr>
-          <p:cNvPr id="6" name="Shape 4"/>
-          <p:cNvSpPr/>
-          <p:nvPr/>
-        </p:nvSpPr>
-        <p:spPr>
-          <a:xfrm>
-            <a:off x="4663440" y="1188720"/>
-            <a:ext cx="4023360" cy="1463040"/>
-          </a:xfrm>
-          <a:prstGeom prst="roundRect">
-            <a:avLst>
-              <a:gd name="adj" fmla="val 5000"/>
-            </a:avLst>
-          </a:prstGeom>
-          <a:solidFill>
-            <a:schemeClr val="bg2"/>
-          </a:solidFill>
-          <a:ln w="12700">
-            <a:solidFill>
-              <a:schemeClr val="bg2"/>
-            </a:solidFill>
-            <a:prstDash val="solid"/>
-          </a:ln>
-        </p:spPr>
-      </p:sp>
-      <p:sp>
-        <p:nvSpPr>
-          <p:cNvPr id="7" name="Text 5"/>
-          <p:cNvSpPr txBox="1"/>
-          <p:nvPr/>
-        </p:nvSpPr>
-        <p:spPr>
-          <a:xfrm>
-            <a:off x="4800600" y="1280160"/>
-            <a:ext cx="3749040" cy="640080"/>
-          </a:xfrm>
-          <a:prstGeom prst="rect">
-            <a:avLst/>
-          </a:prstGeom>
-          <a:noFill/>
-          <a:ln/>
-        </p:spPr>
-        <p:txBody>
-          <a:bodyPr wrap="square" lIns="0" tIns="0" rIns="0" bIns="0" rtlCol="0" anchor="t"/>
-          <a:lstStyle/>
-          <a:p>
-            <a:pPr indent="0" marL="0">
-              <a:buNone/>
-            </a:pPr>
-            <a:r>
-              <a:rPr lang="en-US" sz="3200" b="1" dirty="0">
-                <a:solidFill>
-                  <a:schemeClr val="accent1"/>
-                </a:solidFill>
-              </a:rPr>
-              <a:t>50 ns</a:t>
-            </a:r>
-            <a:endParaRPr lang="en-US" sz="3200" dirty="0"/>
-          </a:p>
-        </p:txBody>
-      </p:sp>
-      <p:sp>
-        <p:nvSpPr>
-          <p:cNvPr id="8" name="Text 6"/>
-          <p:cNvSpPr txBox="1"/>
-          <p:nvPr/>
-        </p:nvSpPr>
-        <p:spPr>
-          <a:xfrm>
-            <a:off x="4800600" y="1965960"/>
-            <a:ext cx="3749040" cy="594360"/>
-          </a:xfrm>
-          <a:prstGeom prst="rect">
-            <a:avLst/>
-          </a:prstGeom>
-          <a:noFill/>
-          <a:ln/>
-        </p:spPr>
-        <p:txBody>
-          <a:bodyPr wrap="square" lIns="0" tIns="0" rIns="0" bIns="0" rtlCol="0" anchor="t"/>
-          <a:lstStyle/>
-          <a:p>
-            <a:pPr indent="0" marL="0">
-              <a:buNone/>
-            </a:pPr>
-            <a:r>
-              <a:rPr lang="en-US" sz="1400" dirty="0">
-                <a:solidFill>
-                  <a:schemeClr val="tx1"/>
-                </a:solidFill>
-              </a:rPr>
-              <a:t>E-stop input to PWM low: 5 clock cycles, jitter 0</a:t>
-            </a:r>
-            <a:endParaRPr lang="en-US" sz="1400" dirty="0"/>
-          </a:p>
-        </p:txBody>
-      </p:sp>
-      <p:sp>
-        <p:nvSpPr>
-          <p:cNvPr id="9" name="Shape 7"/>
-          <p:cNvSpPr/>
-          <p:nvPr/>
-        </p:nvSpPr>
-        <p:spPr>
-          <a:xfrm>
-            <a:off x="457200" y="2788920"/>
-            <a:ext cx="4023360" cy="1463040"/>
-          </a:xfrm>
-          <a:prstGeom prst="roundRect">
-            <a:avLst>
-              <a:gd name="adj" fmla="val 5000"/>
-            </a:avLst>
-          </a:prstGeom>
-          <a:solidFill>
-            <a:schemeClr val="accent1"/>
-          </a:solidFill>
-          <a:ln w="12700">
-            <a:solidFill>
-              <a:schemeClr val="accent1"/>
-            </a:solidFill>
-            <a:prstDash val="solid"/>
-          </a:ln>
-        </p:spPr>
-      </p:sp>
-      <p:sp>
-        <p:nvSpPr>
-          <p:cNvPr id="10" name="Text 8"/>
-          <p:cNvSpPr txBox="1"/>
-          <p:nvPr/>
-        </p:nvSpPr>
-        <p:spPr>
-          <a:xfrm>
-            <a:off x="594360" y="2880360"/>
-            <a:ext cx="3749040" cy="640080"/>
-          </a:xfrm>
-          <a:prstGeom prst="rect">
-            <a:avLst/>
-          </a:prstGeom>
-          <a:noFill/>
-          <a:ln/>
-        </p:spPr>
-        <p:txBody>
-          <a:bodyPr wrap="square" lIns="0" tIns="0" rIns="0" bIns="0" rtlCol="0" anchor="t"/>
-          <a:lstStyle/>
-          <a:p>
-            <a:pPr indent="0" marL="0">
-              <a:buNone/>
-            </a:pPr>
-            <a:r>
-              <a:rPr lang="en-US" sz="3200" b="1" dirty="0">
-                <a:solidFill>
-                  <a:schemeClr val="bg1"/>
-                </a:solidFill>
-              </a:rPr>
-              <a:t>1.68 us</a:t>
-            </a:r>
-            <a:endParaRPr lang="en-US" sz="3200" dirty="0"/>
-          </a:p>
-        </p:txBody>
-      </p:sp>
-      <p:sp>
-        <p:nvSpPr>
-          <p:cNvPr id="11" name="Text 9"/>
-          <p:cNvSpPr txBox="1"/>
-          <p:nvPr/>
-        </p:nvSpPr>
-        <p:spPr>
-          <a:xfrm>
-            <a:off x="594360" y="3566160"/>
-            <a:ext cx="3749040" cy="594360"/>
-          </a:xfrm>
-          <a:prstGeom prst="rect">
-            <a:avLst/>
-          </a:prstGeom>
-          <a:noFill/>
-          <a:ln/>
-        </p:spPr>
-        <p:txBody>
-          <a:bodyPr wrap="square" lIns="0" tIns="0" rIns="0" bIns="0" rtlCol="0" anchor="t"/>
-          <a:lstStyle/>
-          <a:p>
-            <a:pPr indent="0" marL="0">
-              <a:buNone/>
-            </a:pPr>
-            <a:r>
-              <a:rPr lang="en-US" sz="1400" dirty="0">
-                <a:solidFill>
-                  <a:schemeClr val="bg1"/>
-                </a:solidFill>
-              </a:rPr>
-              <a:t>ADC frame time: 168 cycles at 10 MHz SCLK</a:t>
-            </a:r>
-            <a:endParaRPr lang="en-US" sz="1400" dirty="0"/>
-          </a:p>
-        </p:txBody>
-      </p:sp>
-      <p:sp>
-        <p:nvSpPr>
-          <p:cNvPr id="12" name="Shape 10"/>
-          <p:cNvSpPr/>
-          <p:nvPr/>
-        </p:nvSpPr>
-        <p:spPr>
-          <a:xfrm>
-            <a:off x="4663440" y="2788920"/>
-            <a:ext cx="4023360" cy="1463040"/>
-          </a:xfrm>
-          <a:prstGeom prst="roundRect">
-            <a:avLst>
-              <a:gd name="adj" fmla="val 5000"/>
-            </a:avLst>
-          </a:prstGeom>
-          <a:solidFill>
-            <a:schemeClr val="accent1"/>
-          </a:solidFill>
-          <a:ln w="12700">
-            <a:solidFill>
-              <a:schemeClr val="accent1"/>
-            </a:solidFill>
-            <a:prstDash val="solid"/>
-          </a:ln>
-        </p:spPr>
-      </p:sp>
-      <p:sp>
-        <p:nvSpPr>
-          <p:cNvPr id="13" name="Text 11"/>
-          <p:cNvSpPr txBox="1"/>
-          <p:nvPr/>
-        </p:nvSpPr>
-        <p:spPr>
-          <a:xfrm>
-            <a:off x="4800600" y="2880360"/>
-            <a:ext cx="3749040" cy="640080"/>
-          </a:xfrm>
-          <a:prstGeom prst="rect">
-            <a:avLst/>
-          </a:prstGeom>
-          <a:noFill/>
-          <a:ln/>
-        </p:spPr>
-        <p:txBody>
-          <a:bodyPr wrap="square" lIns="0" tIns="0" rIns="0" bIns="0" rtlCol="0" anchor="t"/>
-          <a:lstStyle/>
-          <a:p>
-            <a:pPr indent="0" marL="0">
-              <a:buNone/>
-            </a:pPr>
-            <a:r>
-              <a:rPr lang="en-US" sz="2800" b="1" dirty="0">
-                <a:solidFill>
-                  <a:schemeClr val="bg1"/>
-                </a:solidFill>
-              </a:rPr>
-              <a:t>1.67 - 3.22 us</a:t>
-            </a:r>
-            <a:endParaRPr lang="en-US" sz="2800" dirty="0"/>
-          </a:p>
-        </p:txBody>
-      </p:sp>
-      <p:sp>
-        <p:nvSpPr>
-          <p:cNvPr id="14" name="Text 12"/>
-          <p:cNvSpPr txBox="1"/>
-          <p:nvPr/>
-        </p:nvSpPr>
-        <p:spPr>
-          <a:xfrm>
-            <a:off x="4800600" y="3566160"/>
-            <a:ext cx="3749040" cy="594360"/>
-          </a:xfrm>
-          <a:prstGeom prst="rect">
-            <a:avLst/>
-          </a:prstGeom>
-          <a:noFill/>
-          <a:ln/>
-        </p:spPr>
-        <p:txBody>
-          <a:bodyPr wrap="square" lIns="0" tIns="0" rIns="0" bIns="0" rtlCol="0" anchor="t"/>
-          <a:lstStyle/>
-          <a:p>
-            <a:pPr indent="0" marL="0">
-              <a:buNone/>
-            </a:pPr>
-            <a:r>
-              <a:rPr lang="en-US" sz="1400" dirty="0">
-                <a:solidFill>
-                  <a:schemeClr val="bg1"/>
-                </a:solidFill>
-              </a:rPr>
-              <a:t>Input change to PWM low; jitter 1.55 us from ADC frame phase</a:t>
-            </a:r>
-            <a:endParaRPr lang="en-US" sz="1400" dirty="0"/>
-          </a:p>
-        </p:txBody>
-      </p:sp>
-      <p:sp>
-        <p:nvSpPr>
-          <p:cNvPr id="15" name="Text 13"/>
-          <p:cNvSpPr txBox="1"/>
-          <p:nvPr/>
-        </p:nvSpPr>
-        <p:spPr>
-          <a:xfrm>
-            <a:off x="457200" y="4389120"/>
-            <a:ext cx="8229600" cy="274320"/>
-          </a:xfrm>
-          <a:prstGeom prst="rect">
-            <a:avLst/>
-          </a:prstGeom>
-          <a:noFill/>
-          <a:ln/>
-        </p:spPr>
-        <p:txBody>
-          <a:bodyPr wrap="square" lIns="0" tIns="0" rIns="0" bIns="0" rtlCol="0" anchor="t"/>
-          <a:lstStyle/>
-          <a:p>
-            <a:pPr indent="0" marL="0">
-              <a:buNone/>
-            </a:pPr>
-            <a:r>
-              <a:rPr lang="en-US" sz="1200" dirty="0">
-                <a:solidFill>
-                  <a:schemeClr val="accent5"/>
-                </a:solidFill>
-              </a:rPr>
-              <a:t>RTL simulation, 100 MHz clock, behavioural ADC model. T_FPGA is reported separately from T_ML.</a:t>
-            </a:r>
-            <a:endParaRPr lang="en-US" sz="1200" dirty="0"/>
-          </a:p>
-        </p:txBody>
-      </p:sp>
-      <p:sp>
-        <p:nvSpPr>
-          <p:cNvPr id="25" name="Slide Number Placeholder 0"/>
-          <p:cNvSpPr>
-            <a:spLocks noGrp="1"/>
-          </p:cNvSpPr>
-          <p:nvPr>
-            <p:ph type="sldNum" sz="quarter" idx="4294967295"/>
-          </p:nvPr>
-        </p:nvSpPr>
-        <p:spPr>
-          <a:xfrm>
-            <a:off x="8321040" y="4754880"/>
-            <a:ext cx="457200" cy="274320"/>
-          </a:xfrm>
-          <a:prstGeom prst="rect">
-            <a:avLst/>
-          </a:prstGeom>
-          <a:extLst>
-            <a:ext uri="{C572A759-6A51-4108-AA02-DFA0A04FC94B}">
-              <ma14:wrappingTextBoxFlag xmlns:ma14="http://schemas.microsoft.com/office/mac/drawingml/2011/main" val="0"/>
-            </a:ext>
-          </a:extLst>
-        </p:spPr>
-        <p:txBody>
-          <a:bodyPr/>
-          <a:lstStyle>
-            <a:lvl1pPr>
-              <a:defRPr sz="1000">
-                <a:solidFill>
-                  <a:schemeClr val="accent5"/>
-                </a:solidFill>
-              </a:defRPr>
-            </a:lvl1pPr>
-          </a:lstStyle>
-          <a:p>
-            <a:pPr algn="l"/>
-            <a:fld id="{F7021451-1387-4CA6-816F-3879F97B5CBC}" type="slidenum">
-              <a:rPr b="0" lang="en-US"/>
               <a:t>8</a:t>
             </a:fld>
             <a:endParaRPr lang="en-US"/>
@@ -10869,7 +13746,7 @@
                   <a:schemeClr val="tx2"/>
                 </a:solidFill>
               </a:rPr>
-              <a:t>Lightweight AI/ML model</a:t>
+              <a:t>Verification results</a:t>
             </a:r>
             <a:endParaRPr lang="en-US" sz="3600" dirty="0"/>
           </a:p>
@@ -10883,20 +13760,20 @@
         </p:nvSpPr>
         <p:spPr>
           <a:xfrm>
-            <a:off x="6858000" y="411480"/>
-            <a:ext cx="1828800" cy="365760"/>
+            <a:off x="457200" y="1188720"/>
+            <a:ext cx="3931920" cy="1508760"/>
           </a:xfrm>
           <a:prstGeom prst="roundRect">
             <a:avLst>
-              <a:gd name="adj" fmla="val 25000"/>
+              <a:gd name="adj" fmla="val 4848"/>
             </a:avLst>
           </a:prstGeom>
           <a:solidFill>
-            <a:schemeClr val="accent2"/>
+            <a:schemeClr val="bg2"/>
           </a:solidFill>
           <a:ln w="12700">
             <a:solidFill>
-              <a:schemeClr val="accent2"/>
+              <a:schemeClr val="bg2"/>
             </a:solidFill>
             <a:prstDash val="solid"/>
           </a:ln>
@@ -10910,31 +13787,31 @@
         </p:nvSpPr>
         <p:spPr>
           <a:xfrm>
-            <a:off x="6858000" y="411480"/>
-            <a:ext cx="1828800" cy="365760"/>
-          </a:xfrm>
-          <a:prstGeom prst="rect">
-            <a:avLst/>
-          </a:prstGeom>
-          <a:noFill/>
-          <a:ln/>
-        </p:spPr>
-        <p:txBody>
-          <a:bodyPr wrap="square" lIns="0" tIns="0" rIns="0" bIns="0" rtlCol="0" anchor="ctr"/>
-          <a:lstStyle/>
-          <a:p>
-            <a:pPr algn="ctr" indent="0" marL="0">
+            <a:off x="594360" y="1280160"/>
+            <a:ext cx="3657600" cy="640080"/>
+          </a:xfrm>
+          <a:prstGeom prst="rect">
+            <a:avLst/>
+          </a:prstGeom>
+          <a:noFill/>
+          <a:ln/>
+        </p:spPr>
+        <p:txBody>
+          <a:bodyPr wrap="square" lIns="0" tIns="0" rIns="0" bIns="0" rtlCol="0" anchor="t"/>
+          <a:lstStyle/>
+          <a:p>
+            <a:pPr indent="0" marL="0">
               <a:buNone/>
             </a:pPr>
             <a:r>
-              <a:rPr lang="en-US" sz="1200" b="1" dirty="0">
-                <a:solidFill>
-                  <a:schemeClr val="tx1"/>
-                </a:solidFill>
-              </a:rPr>
-              <a:t>SIMULATED DATA</a:t>
-            </a:r>
-            <a:endParaRPr lang="en-US" sz="1200" dirty="0"/>
+              <a:rPr lang="en-US" sz="3200" b="1" dirty="0">
+                <a:solidFill>
+                  <a:schemeClr val="accent1"/>
+                </a:solidFill>
+              </a:rPr>
+              <a:t>134 / 134</a:t>
+            </a:r>
+            <a:endParaRPr lang="en-US" sz="3200" dirty="0"/>
           </a:p>
         </p:txBody>
       </p:sp>
@@ -10946,8 +13823,206 @@
         </p:nvSpPr>
         <p:spPr>
           <a:xfrm>
-            <a:off x="457200" y="1188720"/>
-            <a:ext cx="4206240" cy="3108960"/>
+            <a:off x="594360" y="1965960"/>
+            <a:ext cx="3657600" cy="640080"/>
+          </a:xfrm>
+          <a:prstGeom prst="rect">
+            <a:avLst/>
+          </a:prstGeom>
+          <a:noFill/>
+          <a:ln/>
+        </p:spPr>
+        <p:txBody>
+          <a:bodyPr wrap="square" lIns="0" tIns="0" rIns="0" bIns="0" rtlCol="0" anchor="t"/>
+          <a:lstStyle/>
+          <a:p>
+            <a:pPr indent="0" marL="0">
+              <a:buNone/>
+            </a:pPr>
+            <a:r>
+              <a:rPr lang="en-US" sz="1400" dirty="0">
+                <a:solidFill>
+                  <a:schemeClr val="tx1"/>
+                </a:solidFill>
+              </a:rPr>
+              <a:t>directed checks pass across 8 testbenches</a:t>
+            </a:r>
+            <a:endParaRPr lang="en-US" sz="1400" dirty="0"/>
+          </a:p>
+        </p:txBody>
+      </p:sp>
+      <p:sp>
+        <p:nvSpPr>
+          <p:cNvPr id="6" name="Shape 4"/>
+          <p:cNvSpPr/>
+          <p:nvPr/>
+        </p:nvSpPr>
+        <p:spPr>
+          <a:xfrm>
+            <a:off x="457200" y="2880360"/>
+            <a:ext cx="3931920" cy="1508760"/>
+          </a:xfrm>
+          <a:prstGeom prst="roundRect">
+            <a:avLst>
+              <a:gd name="adj" fmla="val 4848"/>
+            </a:avLst>
+          </a:prstGeom>
+          <a:solidFill>
+            <a:schemeClr val="accent1"/>
+          </a:solidFill>
+          <a:ln w="12700">
+            <a:solidFill>
+              <a:schemeClr val="accent1"/>
+            </a:solidFill>
+            <a:prstDash val="solid"/>
+          </a:ln>
+        </p:spPr>
+      </p:sp>
+      <p:sp>
+        <p:nvSpPr>
+          <p:cNvPr id="7" name="Text 5"/>
+          <p:cNvSpPr txBox="1"/>
+          <p:nvPr/>
+        </p:nvSpPr>
+        <p:spPr>
+          <a:xfrm>
+            <a:off x="594360" y="2971800"/>
+            <a:ext cx="3657600" cy="640080"/>
+          </a:xfrm>
+          <a:prstGeom prst="rect">
+            <a:avLst/>
+          </a:prstGeom>
+          <a:noFill/>
+          <a:ln/>
+        </p:spPr>
+        <p:txBody>
+          <a:bodyPr wrap="square" lIns="0" tIns="0" rIns="0" bIns="0" rtlCol="0" anchor="t"/>
+          <a:lstStyle/>
+          <a:p>
+            <a:pPr indent="0" marL="0">
+              <a:buNone/>
+            </a:pPr>
+            <a:r>
+              <a:rPr lang="en-US" sz="3200" b="1" dirty="0">
+                <a:solidFill>
+                  <a:schemeClr val="bg1"/>
+                </a:solidFill>
+              </a:rPr>
+              <a:t>2 x 1,800</a:t>
+            </a:r>
+            <a:endParaRPr lang="en-US" sz="3200" dirty="0"/>
+          </a:p>
+        </p:txBody>
+      </p:sp>
+      <p:sp>
+        <p:nvSpPr>
+          <p:cNvPr id="8" name="Text 6"/>
+          <p:cNvSpPr txBox="1"/>
+          <p:nvPr/>
+        </p:nvSpPr>
+        <p:spPr>
+          <a:xfrm>
+            <a:off x="594360" y="3657600"/>
+            <a:ext cx="3657600" cy="640080"/>
+          </a:xfrm>
+          <a:prstGeom prst="rect">
+            <a:avLst/>
+          </a:prstGeom>
+          <a:noFill/>
+          <a:ln/>
+        </p:spPr>
+        <p:txBody>
+          <a:bodyPr wrap="square" lIns="0" tIns="0" rIns="0" bIns="0" rtlCol="0" anchor="t"/>
+          <a:lstStyle/>
+          <a:p>
+            <a:pPr indent="0" marL="0">
+              <a:buNone/>
+            </a:pPr>
+            <a:r>
+              <a:rPr lang="en-US" sz="1400" dirty="0">
+                <a:solidFill>
+                  <a:schemeClr val="bg1"/>
+                </a:solidFill>
+              </a:rPr>
+              <a:t>replayed vectors with zero safety violations</a:t>
+            </a:r>
+            <a:endParaRPr lang="en-US" sz="1400" dirty="0"/>
+          </a:p>
+        </p:txBody>
+      </p:sp>
+      <p:sp>
+        <p:nvSpPr>
+          <p:cNvPr id="9" name="card Cases covered"/>
+          <p:cNvSpPr/>
+          <p:nvPr/>
+        </p:nvSpPr>
+        <p:spPr>
+          <a:xfrm>
+            <a:off x="4572000" y="1188720"/>
+            <a:ext cx="4114800" cy="3200400"/>
+          </a:xfrm>
+          <a:prstGeom prst="roundRect">
+            <a:avLst>
+              <a:gd name="adj" fmla="val 2286"/>
+            </a:avLst>
+          </a:prstGeom>
+          <a:solidFill>
+            <a:schemeClr val="bg2"/>
+          </a:solidFill>
+          <a:ln w="12700">
+            <a:solidFill>
+              <a:schemeClr val="bg2"/>
+            </a:solidFill>
+            <a:prstDash val="solid"/>
+          </a:ln>
+        </p:spPr>
+      </p:sp>
+      <p:sp>
+        <p:nvSpPr>
+          <p:cNvPr id="10" name="Text 8"/>
+          <p:cNvSpPr txBox="1"/>
+          <p:nvPr/>
+        </p:nvSpPr>
+        <p:spPr>
+          <a:xfrm>
+            <a:off x="4709160" y="1298448"/>
+            <a:ext cx="3840480" cy="320040"/>
+          </a:xfrm>
+          <a:prstGeom prst="rect">
+            <a:avLst/>
+          </a:prstGeom>
+          <a:noFill/>
+          <a:ln/>
+        </p:spPr>
+        <p:txBody>
+          <a:bodyPr wrap="square" lIns="0" tIns="0" rIns="0" bIns="0" rtlCol="0" anchor="t"/>
+          <a:lstStyle/>
+          <a:p>
+            <a:pPr indent="0" marL="0">
+              <a:buNone/>
+            </a:pPr>
+            <a:r>
+              <a:rPr lang="en-US" sz="1600" b="1" dirty="0">
+                <a:solidFill>
+                  <a:schemeClr val="tx2"/>
+                </a:solidFill>
+              </a:rPr>
+              <a:t>Cases covered</a:t>
+            </a:r>
+            <a:endParaRPr lang="en-US" sz="1600" dirty="0"/>
+          </a:p>
+        </p:txBody>
+      </p:sp>
+      <p:sp>
+        <p:nvSpPr>
+          <p:cNvPr id="11" name="Text 9"/>
+          <p:cNvSpPr txBox="1"/>
+          <p:nvPr/>
+        </p:nvSpPr>
+        <p:spPr>
+          <a:xfrm>
+            <a:off x="4754880" y="1691640"/>
+            <a:ext cx="3749040" cy="2651760"/>
           </a:xfrm>
           <a:prstGeom prst="rect">
             <a:avLst/>
@@ -10972,7 +14047,7 @@
                   <a:schemeClr val="tx1"/>
                 </a:solidFill>
               </a:rPr>
-              <a:t>Decision tree: depth 4, 16 leaves (scikit-learn)</a:t>
+              <a:t>No, light and normal contact</a:t>
             </a:r>
             <a:endParaRPr lang="en-US" sz="1400" dirty="0"/>
           </a:p>
@@ -10990,7 +14065,7 @@
                   <a:schemeClr val="tx1"/>
                 </a:solidFill>
               </a:rPr>
-              <a:t>Six features: force, previous force, rate of change, moving average, contact duration, last delta</a:t>
+              <a:t>High and excessive force</a:t>
             </a:r>
             <a:endParaRPr lang="en-US" sz="1400" dirty="0"/>
           </a:p>
@@ -11008,7 +14083,7 @@
                   <a:schemeClr val="tx1"/>
                 </a:solidFill>
               </a:rPr>
-              <a:t>420 training and 180 test episodes, split by episode</a:t>
+              <a:t>AI class changes and AI failure</a:t>
             </a:r>
             <a:endParaRPr lang="en-US" sz="1400" dirty="0"/>
           </a:p>
@@ -11026,453 +14101,43 @@
                   <a:schemeClr val="tx1"/>
                 </a:solidFill>
               </a:rPr>
-              <a:t>Labels come from the scenario that generated each episode</a:t>
+              <a:t>Emergency stop and sensor failure</a:t>
             </a:r>
             <a:endParaRPr lang="en-US" sz="1400" dirty="0"/>
           </a:p>
-        </p:txBody>
-      </p:sp>
-      <p:graphicFrame>
-        <p:nvGraphicFramePr>
-          <p:cNvPr id="10" name="Table 0"/>
-          <p:cNvGraphicFramePr>
-            <a:graphicFrameLocks noGrp="1"/>
-          </p:cNvGraphicFramePr>
-          <p:nvPr>
-            <p:extLst>
-              <p:ext uri="{D42A27DB-BD31-4B8C-83A1-F6EECF244321}">
-                <p14:modId xmlns:p14="http://schemas.microsoft.com/office/powerpoint/2010/main" val="1579011935"/>
-              </p:ext>
-            </p:extLst>
-          </p:nvPr>
-        </p:nvGraphicFramePr>
-        <p:xfrm>
-          <a:off x="4937760" y="1188720"/>
-          <a:ext cx="3749040" cy="914400"/>
-        </p:xfrm>
-        <a:graphic>
-          <a:graphicData uri="http://schemas.openxmlformats.org/drawingml/2006/table">
-            <a:tbl>
-              <a:tblPr/>
-              <a:tblGrid>
-                <a:gridCol w="914400"/>
-                <a:gridCol w="2834640"/>
-              </a:tblGrid>
-              <a:tr h="457200">
-                <a:tc>
-                  <a:txBody>
-                    <a:bodyPr/>
-                    <a:lstStyle/>
-                    <a:p>
-                      <a:pPr indent="0" marL="0">
-                        <a:buNone/>
-                      </a:pPr>
-                      <a:r>
-                        <a:rPr lang="en-US" sz="1400" b="1" dirty="0">
-                          <a:solidFill>
-                            <a:schemeClr val="bg1"/>
-                          </a:solidFill>
-                        </a:rPr>
-                        <a:t>Class</a:t>
-                      </a:r>
-                      <a:endParaRPr lang="en-US" sz="1400" dirty="0"/>
-                    </a:p>
-                  </a:txBody>
-                  <a:tcPr marL="91440" marR="91440" marT="45720" marB="45720" anchor="ctr">
-                    <a:lnL w="0" cap="flat" cmpd="sng" algn="ctr">
-                      <a:noFill/>
-                    </a:lnL>
-                    <a:lnR w="0" cap="flat" cmpd="sng" algn="ctr">
-                      <a:noFill/>
-                    </a:lnR>
-                    <a:lnT w="0" cap="flat" cmpd="sng" algn="ctr">
-                      <a:noFill/>
-                    </a:lnT>
-                    <a:lnB w="0" cap="flat" cmpd="sng" algn="ctr">
-                      <a:noFill/>
-                    </a:lnB>
-                    <a:solidFill>
-                      <a:schemeClr val="accent1"/>
-                    </a:solidFill>
-                  </a:tcPr>
-                </a:tc>
-                <a:tc>
-                  <a:txBody>
-                    <a:bodyPr/>
-                    <a:lstStyle/>
-                    <a:p>
-                      <a:pPr indent="0" marL="0">
-                        <a:buNone/>
-                      </a:pPr>
-                      <a:r>
-                        <a:rPr lang="en-US" sz="1400" b="1" dirty="0">
-                          <a:solidFill>
-                            <a:schemeClr val="bg1"/>
-                          </a:solidFill>
-                        </a:rPr>
-                        <a:t>Meaning</a:t>
-                      </a:r>
-                      <a:endParaRPr lang="en-US" sz="1400" dirty="0"/>
-                    </a:p>
-                  </a:txBody>
-                  <a:tcPr marL="91440" marR="91440" marT="45720" marB="45720" anchor="ctr">
-                    <a:lnL w="0" cap="flat" cmpd="sng" algn="ctr">
-                      <a:noFill/>
-                    </a:lnL>
-                    <a:lnR w="0" cap="flat" cmpd="sng" algn="ctr">
-                      <a:noFill/>
-                    </a:lnR>
-                    <a:lnT w="0" cap="flat" cmpd="sng" algn="ctr">
-                      <a:noFill/>
-                    </a:lnT>
-                    <a:lnB w="0" cap="flat" cmpd="sng" algn="ctr">
-                      <a:noFill/>
-                    </a:lnB>
-                    <a:solidFill>
-                      <a:schemeClr val="accent1"/>
-                    </a:solidFill>
-                  </a:tcPr>
-                </a:tc>
-              </a:tr>
-              <a:tr h="457200">
-                <a:tc>
-                  <a:txBody>
-                    <a:bodyPr/>
-                    <a:lstStyle/>
-                    <a:p>
-                      <a:pPr indent="0" marL="0">
-                        <a:buNone/>
-                      </a:pPr>
-                      <a:r>
-                        <a:rPr lang="en-US" sz="1400" dirty="0">
-                          <a:solidFill>
-                            <a:schemeClr val="tx1"/>
-                          </a:solidFill>
-                        </a:rPr>
-                        <a:t>0</a:t>
-                      </a:r>
-                      <a:endParaRPr lang="en-US" sz="1400" dirty="0"/>
-                    </a:p>
-                  </a:txBody>
-                  <a:tcPr marL="91440" marR="91440" marT="45720" marB="45720" anchor="ctr">
-                    <a:lnL w="0" cap="flat" cmpd="sng" algn="ctr">
-                      <a:noFill/>
-                    </a:lnL>
-                    <a:lnR w="0" cap="flat" cmpd="sng" algn="ctr">
-                      <a:noFill/>
-                    </a:lnR>
-                    <a:lnT w="0" cap="flat" cmpd="sng" algn="ctr">
-                      <a:noFill/>
-                    </a:lnT>
-                    <a:lnB w="0" cap="flat" cmpd="sng" algn="ctr">
-                      <a:noFill/>
-                    </a:lnB>
-                    <a:solidFill>
-                      <a:schemeClr val="bg2"/>
-                    </a:solidFill>
-                  </a:tcPr>
-                </a:tc>
-                <a:tc>
-                  <a:txBody>
-                    <a:bodyPr/>
-                    <a:lstStyle/>
-                    <a:p>
-                      <a:pPr indent="0" marL="0">
-                        <a:buNone/>
-                      </a:pPr>
-                      <a:r>
-                        <a:rPr lang="en-US" sz="1400" dirty="0">
-                          <a:solidFill>
-                            <a:schemeClr val="tx1"/>
-                          </a:solidFill>
-                        </a:rPr>
-                        <a:t>No contact</a:t>
-                      </a:r>
-                      <a:endParaRPr lang="en-US" sz="1400" dirty="0"/>
-                    </a:p>
-                  </a:txBody>
-                  <a:tcPr marL="91440" marR="91440" marT="45720" marB="45720" anchor="ctr">
-                    <a:lnL w="0" cap="flat" cmpd="sng" algn="ctr">
-                      <a:noFill/>
-                    </a:lnL>
-                    <a:lnR w="0" cap="flat" cmpd="sng" algn="ctr">
-                      <a:noFill/>
-                    </a:lnR>
-                    <a:lnT w="0" cap="flat" cmpd="sng" algn="ctr">
-                      <a:noFill/>
-                    </a:lnT>
-                    <a:lnB w="0" cap="flat" cmpd="sng" algn="ctr">
-                      <a:noFill/>
-                    </a:lnB>
-                    <a:solidFill>
-                      <a:schemeClr val="bg2"/>
-                    </a:solidFill>
-                  </a:tcPr>
-                </a:tc>
-              </a:tr>
-              <a:tr h="457200">
-                <a:tc>
-                  <a:txBody>
-                    <a:bodyPr/>
-                    <a:lstStyle/>
-                    <a:p>
-                      <a:pPr indent="0" marL="0">
-                        <a:buNone/>
-                      </a:pPr>
-                      <a:r>
-                        <a:rPr lang="en-US" sz="1400" dirty="0">
-                          <a:solidFill>
-                            <a:schemeClr val="tx1"/>
-                          </a:solidFill>
-                        </a:rPr>
-                        <a:t>1</a:t>
-                      </a:r>
-                      <a:endParaRPr lang="en-US" sz="1400" dirty="0"/>
-                    </a:p>
-                  </a:txBody>
-                  <a:tcPr marL="91440" marR="91440" marT="45720" marB="45720" anchor="ctr">
-                    <a:lnL w="0" cap="flat" cmpd="sng" algn="ctr">
-                      <a:noFill/>
-                    </a:lnL>
-                    <a:lnR w="0" cap="flat" cmpd="sng" algn="ctr">
-                      <a:noFill/>
-                    </a:lnR>
-                    <a:lnT w="0" cap="flat" cmpd="sng" algn="ctr">
-                      <a:noFill/>
-                    </a:lnT>
-                    <a:lnB w="0" cap="flat" cmpd="sng" algn="ctr">
-                      <a:noFill/>
-                    </a:lnB>
-                    <a:solidFill>
-                      <a:schemeClr val="bg1"/>
-                    </a:solidFill>
-                  </a:tcPr>
-                </a:tc>
-                <a:tc>
-                  <a:txBody>
-                    <a:bodyPr/>
-                    <a:lstStyle/>
-                    <a:p>
-                      <a:pPr indent="0" marL="0">
-                        <a:buNone/>
-                      </a:pPr>
-                      <a:r>
-                        <a:rPr lang="en-US" sz="1400" dirty="0">
-                          <a:solidFill>
-                            <a:schemeClr val="tx1"/>
-                          </a:solidFill>
-                        </a:rPr>
-                        <a:t>Light contact</a:t>
-                      </a:r>
-                      <a:endParaRPr lang="en-US" sz="1400" dirty="0"/>
-                    </a:p>
-                  </a:txBody>
-                  <a:tcPr marL="91440" marR="91440" marT="45720" marB="45720" anchor="ctr">
-                    <a:lnL w="0" cap="flat" cmpd="sng" algn="ctr">
-                      <a:noFill/>
-                    </a:lnL>
-                    <a:lnR w="0" cap="flat" cmpd="sng" algn="ctr">
-                      <a:noFill/>
-                    </a:lnR>
-                    <a:lnT w="0" cap="flat" cmpd="sng" algn="ctr">
-                      <a:noFill/>
-                    </a:lnT>
-                    <a:lnB w="0" cap="flat" cmpd="sng" algn="ctr">
-                      <a:noFill/>
-                    </a:lnB>
-                    <a:solidFill>
-                      <a:schemeClr val="bg1"/>
-                    </a:solidFill>
-                  </a:tcPr>
-                </a:tc>
-              </a:tr>
-              <a:tr h="457200">
-                <a:tc>
-                  <a:txBody>
-                    <a:bodyPr/>
-                    <a:lstStyle/>
-                    <a:p>
-                      <a:pPr indent="0" marL="0">
-                        <a:buNone/>
-                      </a:pPr>
-                      <a:r>
-                        <a:rPr lang="en-US" sz="1400" dirty="0">
-                          <a:solidFill>
-                            <a:schemeClr val="tx1"/>
-                          </a:solidFill>
-                        </a:rPr>
-                        <a:t>2</a:t>
-                      </a:r>
-                      <a:endParaRPr lang="en-US" sz="1400" dirty="0"/>
-                    </a:p>
-                  </a:txBody>
-                  <a:tcPr marL="91440" marR="91440" marT="45720" marB="45720" anchor="ctr">
-                    <a:lnL w="0" cap="flat" cmpd="sng" algn="ctr">
-                      <a:noFill/>
-                    </a:lnL>
-                    <a:lnR w="0" cap="flat" cmpd="sng" algn="ctr">
-                      <a:noFill/>
-                    </a:lnR>
-                    <a:lnT w="0" cap="flat" cmpd="sng" algn="ctr">
-                      <a:noFill/>
-                    </a:lnT>
-                    <a:lnB w="0" cap="flat" cmpd="sng" algn="ctr">
-                      <a:noFill/>
-                    </a:lnB>
-                    <a:solidFill>
-                      <a:schemeClr val="bg2"/>
-                    </a:solidFill>
-                  </a:tcPr>
-                </a:tc>
-                <a:tc>
-                  <a:txBody>
-                    <a:bodyPr/>
-                    <a:lstStyle/>
-                    <a:p>
-                      <a:pPr indent="0" marL="0">
-                        <a:buNone/>
-                      </a:pPr>
-                      <a:r>
-                        <a:rPr lang="en-US" sz="1400" dirty="0">
-                          <a:solidFill>
-                            <a:schemeClr val="tx1"/>
-                          </a:solidFill>
-                        </a:rPr>
-                        <a:t>Normal grip</a:t>
-                      </a:r>
-                      <a:endParaRPr lang="en-US" sz="1400" dirty="0"/>
-                    </a:p>
-                  </a:txBody>
-                  <a:tcPr marL="91440" marR="91440" marT="45720" marB="45720" anchor="ctr">
-                    <a:lnL w="0" cap="flat" cmpd="sng" algn="ctr">
-                      <a:noFill/>
-                    </a:lnL>
-                    <a:lnR w="0" cap="flat" cmpd="sng" algn="ctr">
-                      <a:noFill/>
-                    </a:lnR>
-                    <a:lnT w="0" cap="flat" cmpd="sng" algn="ctr">
-                      <a:noFill/>
-                    </a:lnT>
-                    <a:lnB w="0" cap="flat" cmpd="sng" algn="ctr">
-                      <a:noFill/>
-                    </a:lnB>
-                    <a:solidFill>
-                      <a:schemeClr val="bg2"/>
-                    </a:solidFill>
-                  </a:tcPr>
-                </a:tc>
-              </a:tr>
-              <a:tr h="457200">
-                <a:tc>
-                  <a:txBody>
-                    <a:bodyPr/>
-                    <a:lstStyle/>
-                    <a:p>
-                      <a:pPr indent="0" marL="0">
-                        <a:buNone/>
-                      </a:pPr>
-                      <a:r>
-                        <a:rPr lang="en-US" sz="1400" dirty="0">
-                          <a:solidFill>
-                            <a:schemeClr val="tx1"/>
-                          </a:solidFill>
-                        </a:rPr>
-                        <a:t>3</a:t>
-                      </a:r>
-                      <a:endParaRPr lang="en-US" sz="1400" dirty="0"/>
-                    </a:p>
-                  </a:txBody>
-                  <a:tcPr marL="91440" marR="91440" marT="45720" marB="45720" anchor="ctr">
-                    <a:lnL w="0" cap="flat" cmpd="sng" algn="ctr">
-                      <a:noFill/>
-                    </a:lnL>
-                    <a:lnR w="0" cap="flat" cmpd="sng" algn="ctr">
-                      <a:noFill/>
-                    </a:lnR>
-                    <a:lnT w="0" cap="flat" cmpd="sng" algn="ctr">
-                      <a:noFill/>
-                    </a:lnT>
-                    <a:lnB w="0" cap="flat" cmpd="sng" algn="ctr">
-                      <a:noFill/>
-                    </a:lnB>
-                    <a:solidFill>
-                      <a:schemeClr val="bg1"/>
-                    </a:solidFill>
-                  </a:tcPr>
-                </a:tc>
-                <a:tc>
-                  <a:txBody>
-                    <a:bodyPr/>
-                    <a:lstStyle/>
-                    <a:p>
-                      <a:pPr indent="0" marL="0">
-                        <a:buNone/>
-                      </a:pPr>
-                      <a:r>
-                        <a:rPr lang="en-US" sz="1400" dirty="0">
-                          <a:solidFill>
-                            <a:schemeClr val="tx1"/>
-                          </a:solidFill>
-                        </a:rPr>
-                        <a:t>Excessive force</a:t>
-                      </a:r>
-                      <a:endParaRPr lang="en-US" sz="1400" dirty="0"/>
-                    </a:p>
-                  </a:txBody>
-                  <a:tcPr marL="91440" marR="91440" marT="45720" marB="45720" anchor="ctr">
-                    <a:lnL w="0" cap="flat" cmpd="sng" algn="ctr">
-                      <a:noFill/>
-                    </a:lnL>
-                    <a:lnR w="0" cap="flat" cmpd="sng" algn="ctr">
-                      <a:noFill/>
-                    </a:lnR>
-                    <a:lnT w="0" cap="flat" cmpd="sng" algn="ctr">
-                      <a:noFill/>
-                    </a:lnT>
-                    <a:lnB w="0" cap="flat" cmpd="sng" algn="ctr">
-                      <a:noFill/>
-                    </a:lnB>
-                    <a:solidFill>
-                      <a:schemeClr val="bg1"/>
-                    </a:solidFill>
-                  </a:tcPr>
-                </a:tc>
-              </a:tr>
-            </a:tbl>
-          </a:graphicData>
-        </a:graphic>
-      </p:graphicFrame>
-      <p:sp>
-        <p:nvSpPr>
-          <p:cNvPr id="7" name="Text 4"/>
-          <p:cNvSpPr txBox="1"/>
-          <p:nvPr/>
-        </p:nvSpPr>
-        <p:spPr>
-          <a:xfrm>
-            <a:off x="4937760" y="3657600"/>
-            <a:ext cx="3749040" cy="548640"/>
-          </a:xfrm>
-          <a:prstGeom prst="rect">
-            <a:avLst/>
-          </a:prstGeom>
-          <a:noFill/>
-          <a:ln/>
-        </p:spPr>
-        <p:txBody>
-          <a:bodyPr wrap="square" lIns="0" tIns="0" rIns="0" bIns="0" rtlCol="0" anchor="t"/>
-          <a:lstStyle/>
-          <a:p>
-            <a:pPr indent="0" marL="0">
-              <a:buNone/>
-            </a:pPr>
-            <a:r>
-              <a:rPr lang="en-US" sz="1400" b="1" dirty="0">
-                <a:solidFill>
-                  <a:schemeClr val="tx2"/>
-                </a:solidFill>
-              </a:rPr>
-              <a:t>Output maps to control states sent to the PL.</a:t>
+          <a:p>
+            <a:pPr marL="342900" indent="-342900">
+              <a:spcAft>
+                <a:spcPts val="600"/>
+              </a:spcAft>
+              <a:buSzPct val="100000"/>
+              <a:buChar char="•"/>
+            </a:pPr>
+            <a:r>
+              <a:rPr lang="en-US" sz="1400" dirty="0">
+                <a:solidFill>
+                  <a:schemeClr val="tx1"/>
+                </a:solidFill>
+              </a:rPr>
+              <a:t>Reset and LUT boundaries</a:t>
+            </a:r>
+            <a:endParaRPr lang="en-US" sz="1400" dirty="0"/>
+          </a:p>
+          <a:p>
+            <a:pPr marL="342900" indent="-342900">
+              <a:spcAft>
+                <a:spcPts val="600"/>
+              </a:spcAft>
+              <a:buSzPct val="100000"/>
+              <a:buChar char="•"/>
+            </a:pPr>
+            <a:r>
+              <a:rPr lang="en-US" sz="1400" dirty="0">
+                <a:solidFill>
+                  <a:schemeClr val="tx1"/>
+                </a:solidFill>
+              </a:rPr>
+              <a:t>PWM duty and instant kill</a:t>
             </a:r>
             <a:endParaRPr lang="en-US" sz="1400" dirty="0"/>
           </a:p>

--- a/docs/tactile_reflex_system.pptx
+++ b/docs/tactile_reflex_system.pptx
@@ -3116,7 +3116,7 @@
                   <a:schemeClr val="accent2"/>
                 </a:solidFill>
               </a:rPr>
-              <a:t>Verilog design, verification and AI/ML evaluation</a:t>
+              <a:t>Terasic DE2-115  |  Verilog design, verification and AI/ML evaluation</a:t>
             </a:r>
             <a:endParaRPr lang="en-US" sz="1400" dirty="0"/>
           </a:p>
@@ -3242,7 +3242,7 @@
                   <a:schemeClr val="accent1"/>
                 </a:solidFill>
               </a:rPr>
-              <a:t>134 / 134</a:t>
+              <a:t>167 / 167</a:t>
             </a:r>
             <a:endParaRPr lang="en-US" sz="3200" dirty="0"/>
           </a:p>
@@ -3278,7 +3278,7 @@
                   <a:schemeClr val="tx1"/>
                 </a:solidFill>
               </a:rPr>
-              <a:t>directed checks pass across 8 testbenches</a:t>
+              <a:t>directed checks pass across 10 testbenches</a:t>
             </a:r>
             <a:endParaRPr lang="en-US" sz="1400" dirty="0"/>
           </a:p>
@@ -4167,7 +4167,7 @@
                   <a:schemeClr val="accent5"/>
                 </a:solidFill>
               </a:rPr>
-              <a:t>RTL simulation, 100 MHz clock</a:t>
+              <a:t>RTL simulation, 50 MHz clock</a:t>
             </a:r>
             <a:endParaRPr lang="en-US" sz="1000" dirty="0"/>
           </a:p>
@@ -4632,7 +4632,7 @@
                   <a:schemeClr val="accent5"/>
                 </a:solidFill>
               </a:rPr>
-              <a:t>RTL simulation, 100 MHz clock</a:t>
+              <a:t>RTL simulation, 50 MHz clock</a:t>
             </a:r>
             <a:endParaRPr lang="en-US" sz="1000" dirty="0"/>
           </a:p>
@@ -4803,7 +4803,7 @@
                   <a:schemeClr val="accent1"/>
                 </a:solidFill>
               </a:rPr>
-              <a:t>40 ns</a:t>
+              <a:t>80 ns</a:t>
             </a:r>
             <a:endParaRPr lang="en-US" sz="3200" dirty="0"/>
           </a:p>
@@ -4839,7 +4839,7 @@
                   <a:schemeClr val="tx1"/>
                 </a:solidFill>
               </a:rPr>
-              <a:t>ADC sample to PWM low: 4 clock cycles, jitter 0</a:t>
+              <a:t>ADC sample to PWM low: 4 clock cycles at 50 MHz, jitter 0</a:t>
             </a:r>
             <a:endParaRPr lang="en-US" sz="1400" dirty="0"/>
           </a:p>
@@ -4902,7 +4902,7 @@
                   <a:schemeClr val="accent1"/>
                 </a:solidFill>
               </a:rPr>
-              <a:t>50 ns</a:t>
+              <a:t>100 ns</a:t>
             </a:r>
             <a:endParaRPr lang="en-US" sz="3200" dirty="0"/>
           </a:p>
@@ -5001,7 +5001,7 @@
                   <a:schemeClr val="bg1"/>
                 </a:solidFill>
               </a:rPr>
-              <a:t>1.68 us</a:t>
+              <a:t>2.08 us</a:t>
             </a:r>
             <a:endParaRPr lang="en-US" sz="3200" dirty="0"/>
           </a:p>
@@ -5037,7 +5037,7 @@
                   <a:schemeClr val="bg1"/>
                 </a:solidFill>
               </a:rPr>
-              <a:t>ADC frame time: 168 cycles at 10 MHz SCLK</a:t>
+              <a:t>ADC frame time: 104 cycles at 8.33 MHz SCLK</a:t>
             </a:r>
             <a:endParaRPr lang="en-US" sz="1400" dirty="0"/>
           </a:p>
@@ -5100,7 +5100,7 @@
                   <a:schemeClr val="bg1"/>
                 </a:solidFill>
               </a:rPr>
-              <a:t>1.65 - 3.20 us</a:t>
+              <a:t>2.10 - 3.84 us</a:t>
             </a:r>
             <a:endParaRPr lang="en-US" sz="2800" dirty="0"/>
           </a:p>
@@ -5136,7 +5136,7 @@
                   <a:schemeClr val="bg1"/>
                 </a:solidFill>
               </a:rPr>
-              <a:t>Input change to PWM low; jitter 1.55 us from ADC frame phase</a:t>
+              <a:t>Input change to PWM low; jitter 1.74 us from ADC frame phase</a:t>
             </a:r>
             <a:endParaRPr lang="en-US" sz="1400" dirty="0"/>
           </a:p>
@@ -5172,7 +5172,7 @@
                   <a:schemeClr val="accent5"/>
                 </a:solidFill>
               </a:rPr>
-              <a:t>RTL simulation, 100 MHz clock, behavioural ADC model. T_FPGA is reported separately from T_ML.</a:t>
+              <a:t>RTL simulation, 50 MHz clock, behavioural ADC model. T_FPGA is reported separately from T_ML.</a:t>
             </a:r>
             <a:endParaRPr lang="en-US" sz="1200" dirty="0"/>
           </a:p>
@@ -5883,7 +5883,7 @@
                   <a:schemeClr val="tx2"/>
                 </a:solidFill>
               </a:rPr>
-              <a:t>Output maps to control states sent to the PL.</a:t>
+              <a:t>Output maps to control states sent to the FPGA.</a:t>
             </a:r>
             <a:endParaRPr lang="en-US" sz="1400" dirty="0"/>
           </a:p>
@@ -8824,7 +8824,7 @@
                   <a:schemeClr val="tx1"/>
                 </a:solidFill>
               </a:rPr>
-              <a:t>Classifies contact, grip condition and force category. Predicts excessive force. Runs on the processor in microseconds to milliseconds. May be wrong or absent.</a:t>
+              <a:t>Classifies contact, grip condition and force category. Predicts excessive force. Runs on a laptop over a UART link. May be wrong, late or absent.</a:t>
             </a:r>
             <a:endParaRPr lang="en-US" sz="1600" dirty="0"/>
           </a:p>
@@ -10435,7 +10435,7 @@
                   <a:schemeClr val="bg2"/>
                 </a:solidFill>
               </a:rPr>
-              <a:t>134 directed checks and 3,600 replayed vectors confirm the override behaviour in simulation.</a:t>
+              <a:t>167 directed checks and 3,600 replayed vectors confirm the override behaviour in simulation.</a:t>
             </a:r>
             <a:endParaRPr lang="en-US" sz="1800" dirty="0"/>
           </a:p>
@@ -10810,7 +10810,7 @@
                             <a:schemeClr val="tx1"/>
                           </a:solidFill>
                         </a:rPr>
-                        <a:t>Open Verilog, 134 directed checks, replay with an adversarial AI</a:t>
+                        <a:t>Open Verilog, 167 directed checks, replay with an adversarial AI</a:t>
                       </a:r>
                       <a:endParaRPr lang="en-US" sz="1400" dirty="0"/>
                     </a:p>
@@ -11088,7 +11088,7 @@
                   <a:schemeClr val="accent1"/>
                 </a:solidFill>
               </a:rPr>
-              <a:t>PL (FPGA fabric): safety-critical reflex path</a:t>
+              <a:t>FPGA (Cyclone IV E): safety-critical reflex path</a:t>
             </a:r>
             <a:endParaRPr lang="en-US" sz="1200" dirty="0"/>
           </a:p>
@@ -11820,7 +11820,7 @@
                   <a:schemeClr val="accent3"/>
                 </a:solidFill>
               </a:rPr>
-              <a:t>advisory class + heartbeat</a:t>
+              <a:t>advisory class over UART</a:t>
             </a:r>
             <a:endParaRPr lang="en-US" sz="1200" dirty="0"/>
           </a:p>
@@ -11856,7 +11856,7 @@
                   <a:schemeClr val="accent5"/>
                 </a:solidFill>
               </a:rPr>
-              <a:t>PS (processor): AI/ML, logging, visualization</a:t>
+              <a:t>Laptop (UART link): AI/ML, logging, visualization</a:t>
             </a:r>
             <a:endParaRPr lang="en-US" sz="1200" dirty="0"/>
           </a:p>
@@ -12008,7 +12008,7 @@
       </p:sp>
       <p:pic>
         <p:nvPicPr>
-          <p:cNvPr id="3" name="Image 0" descr="Wiring schematic: FSR divider, Pmod AD1, PYNQ-Z2, DRV8871, motor, e-stop">    </p:cNvPr>
+          <p:cNvPr id="3" name="Image 0" descr="Wiring schematic: FSR divider, Pmod AD1, DE2-115, DRV8871, motor, e-stop">    </p:cNvPr>
           <p:cNvPicPr>
             <a:picLocks noChangeAspect="1"/>
           </p:cNvPicPr>
@@ -12464,7 +12464,7 @@
       </p:sp>
       <p:pic>
         <p:nvPicPr>
-          <p:cNvPr id="4" name="Image 0" descr="Photo placeholder: PYNQ-Z2">    </p:cNvPr>
+          <p:cNvPr id="4" name="Image 0" descr="Photo placeholder: DE2-115">    </p:cNvPr>
           <p:cNvPicPr>
             <a:picLocks noChangeAspect="1"/>
           </p:cNvPicPr>
@@ -12516,7 +12516,7 @@
                   <a:schemeClr val="tx2"/>
                 </a:solidFill>
               </a:rPr>
-              <a:t>PYNQ-Z2</a:t>
+              <a:t>DE2-115</a:t>
             </a:r>
             <a:endParaRPr lang="en-US" sz="1600" dirty="0"/>
           </a:p>
@@ -12556,7 +12556,7 @@
                   <a:schemeClr val="tx1"/>
                 </a:solidFill>
               </a:rPr>
-              <a:t>Zynq-7020: dual ARM A9 + FPGA</a:t>
+              <a:t>Cyclone IV E EP4CE115 FPGA</a:t>
             </a:r>
             <a:endParaRPr lang="en-US" sz="1400" dirty="0"/>
           </a:p>
@@ -12574,7 +12574,7 @@
                   <a:schemeClr val="tx1"/>
                 </a:solidFill>
               </a:rPr>
-              <a:t>PL: reflex path; PS: AI/ML</a:t>
+              <a:t>50 MHz clock, RS-232 port</a:t>
             </a:r>
             <a:endParaRPr lang="en-US" sz="1400" dirty="0"/>
           </a:p>
@@ -12592,7 +12592,7 @@
                   <a:schemeClr val="tx1"/>
                 </a:solidFill>
               </a:rPr>
-              <a:t>Pmod and Arduino headers</a:t>
+              <a:t>40-pin 3.3 V GPIO header</a:t>
             </a:r>
             <a:endParaRPr lang="en-US" sz="1400" dirty="0"/>
           </a:p>
@@ -12755,7 +12755,7 @@
                   <a:schemeClr val="tx1"/>
                 </a:solidFill>
               </a:rPr>
-              <a:t>0 to 3.3 V analog input</a:t>
+              <a:t>Wired to the GPIO header</a:t>
             </a:r>
             <a:endParaRPr lang="en-US" sz="1400" dirty="0"/>
           </a:p>
@@ -14358,7 +14358,7 @@
                 <a:gridCol w="4114800"/>
                 <a:gridCol w="1645920"/>
               </a:tblGrid>
-              <a:tr h="365760">
+              <a:tr h="310896">
                 <a:tc>
                   <a:txBody>
                     <a:bodyPr/>
@@ -14471,7 +14471,7 @@
                   </a:tcPr>
                 </a:tc>
               </a:tr>
-              <a:tr h="365760">
+              <a:tr h="310896">
                 <a:tc>
                   <a:txBody>
                     <a:bodyPr/>
@@ -14584,7 +14584,7 @@
                   </a:tcPr>
                 </a:tc>
               </a:tr>
-              <a:tr h="365760">
+              <a:tr h="310896">
                 <a:tc>
                   <a:txBody>
                     <a:bodyPr/>
@@ -14697,7 +14697,7 @@
                   </a:tcPr>
                 </a:tc>
               </a:tr>
-              <a:tr h="365760">
+              <a:tr h="310896">
                 <a:tc>
                   <a:txBody>
                     <a:bodyPr/>
@@ -14810,7 +14810,7 @@
                   </a:tcPr>
                 </a:tc>
               </a:tr>
-              <a:tr h="365760">
+              <a:tr h="310896">
                 <a:tc>
                   <a:txBody>
                     <a:bodyPr/>
@@ -14923,7 +14923,7 @@
                   </a:tcPr>
                 </a:tc>
               </a:tr>
-              <a:tr h="365760">
+              <a:tr h="310896">
                 <a:tc>
                   <a:txBody>
                     <a:bodyPr/>
@@ -14975,7 +14975,7 @@
                             <a:schemeClr val="tx1"/>
                           </a:solidFill>
                         </a:rPr>
-                        <a:t>24.4 kHz PWM, instant kill</a:t>
+                        <a:t>12.2 kHz PWM, instant kill</a:t>
                       </a:r>
                       <a:endParaRPr lang="en-US" sz="1400" dirty="0"/>
                     </a:p>
@@ -15036,7 +15036,7 @@
                   </a:tcPr>
                 </a:tc>
               </a:tr>
-              <a:tr h="365760">
+              <a:tr h="310896">
                 <a:tc>
                   <a:txBody>
                     <a:bodyPr/>
@@ -15149,7 +15149,7 @@
                   </a:tcPr>
                 </a:tc>
               </a:tr>
-              <a:tr h="365760">
+              <a:tr h="310896">
                 <a:tc>
                   <a:txBody>
                     <a:bodyPr/>
@@ -15262,7 +15262,120 @@
                   </a:tcPr>
                 </a:tc>
               </a:tr>
-              <a:tr h="365760">
+              <a:tr h="310896">
+                <a:tc>
+                  <a:txBody>
+                    <a:bodyPr/>
+                    <a:lstStyle/>
+                    <a:p>
+                      <a:pPr algn="l" indent="0" marL="0">
+                        <a:buNone/>
+                      </a:pPr>
+                      <a:r>
+                        <a:rPr lang="en-US" sz="1400" dirty="0">
+                          <a:solidFill>
+                            <a:schemeClr val="tx1"/>
+                          </a:solidFill>
+                        </a:rPr>
+                        <a:t>UART link</a:t>
+                      </a:r>
+                      <a:endParaRPr lang="en-US" sz="1400" dirty="0"/>
+                    </a:p>
+                  </a:txBody>
+                  <a:tcPr marL="91440" marR="91440" marT="45720" marB="45720" anchor="ctr">
+                    <a:lnL w="0" cap="flat" cmpd="sng" algn="ctr">
+                      <a:noFill/>
+                    </a:lnL>
+                    <a:lnR w="0" cap="flat" cmpd="sng" algn="ctr">
+                      <a:noFill/>
+                    </a:lnR>
+                    <a:lnT w="0" cap="flat" cmpd="sng" algn="ctr">
+                      <a:noFill/>
+                    </a:lnT>
+                    <a:lnB w="0" cap="flat" cmpd="sng" algn="ctr">
+                      <a:noFill/>
+                    </a:lnB>
+                    <a:solidFill>
+                      <a:schemeClr val="bg1"/>
+                    </a:solidFill>
+                  </a:tcPr>
+                </a:tc>
+                <a:tc>
+                  <a:txBody>
+                    <a:bodyPr/>
+                    <a:lstStyle/>
+                    <a:p>
+                      <a:pPr algn="l" indent="0" marL="0">
+                        <a:buNone/>
+                      </a:pPr>
+                      <a:r>
+                        <a:rPr lang="en-US" sz="1400" dirty="0">
+                          <a:solidFill>
+                            <a:schemeClr val="tx1"/>
+                          </a:solidFill>
+                        </a:rPr>
+                        <a:t>AI packets in, telemetry out</a:t>
+                      </a:r>
+                      <a:endParaRPr lang="en-US" sz="1400" dirty="0"/>
+                    </a:p>
+                  </a:txBody>
+                  <a:tcPr marL="91440" marR="91440" marT="45720" marB="45720" anchor="ctr">
+                    <a:lnL w="0" cap="flat" cmpd="sng" algn="ctr">
+                      <a:noFill/>
+                    </a:lnL>
+                    <a:lnR w="0" cap="flat" cmpd="sng" algn="ctr">
+                      <a:noFill/>
+                    </a:lnR>
+                    <a:lnT w="0" cap="flat" cmpd="sng" algn="ctr">
+                      <a:noFill/>
+                    </a:lnT>
+                    <a:lnB w="0" cap="flat" cmpd="sng" algn="ctr">
+                      <a:noFill/>
+                    </a:lnB>
+                    <a:solidFill>
+                      <a:schemeClr val="bg1"/>
+                    </a:solidFill>
+                  </a:tcPr>
+                </a:tc>
+                <a:tc>
+                  <a:txBody>
+                    <a:bodyPr/>
+                    <a:lstStyle/>
+                    <a:p>
+                      <a:pPr algn="r" indent="0" marL="0">
+                        <a:buNone/>
+                      </a:pPr>
+                      <a:r>
+                        <a:rPr lang="en-US" sz="1400" dirty="0">
+                          <a:solidFill>
+                            <a:schemeClr val="tx1"/>
+                          </a:solidFill>
+                        </a:rPr>
+                        <a:t>15</a:t>
+                      </a:r>
+                      <a:endParaRPr lang="en-US" sz="1400" dirty="0"/>
+                    </a:p>
+                  </a:txBody>
+                  <a:tcPr marL="91440" marR="91440" marT="45720" marB="45720" anchor="ctr">
+                    <a:lnL w="0" cap="flat" cmpd="sng" algn="ctr">
+                      <a:noFill/>
+                    </a:lnL>
+                    <a:lnR w="0" cap="flat" cmpd="sng" algn="ctr">
+                      <a:noFill/>
+                    </a:lnR>
+                    <a:lnT w="0" cap="flat" cmpd="sng" algn="ctr">
+                      <a:noFill/>
+                    </a:lnT>
+                    <a:lnB w="0" cap="flat" cmpd="sng" algn="ctr">
+                      <a:noFill/>
+                    </a:lnB>
+                    <a:solidFill>
+                      <a:schemeClr val="bg1"/>
+                    </a:solidFill>
+                  </a:tcPr>
+                </a:tc>
+              </a:tr>
+              <a:tr h="310896">
                 <a:tc>
                   <a:txBody>
                     <a:bodyPr/>
@@ -15296,7 +15409,7 @@
                       <a:noFill/>
                     </a:lnB>
                     <a:solidFill>
-                      <a:schemeClr val="bg1"/>
+                      <a:schemeClr val="bg2"/>
                     </a:solidFill>
                   </a:tcPr>
                 </a:tc>
@@ -15333,6 +15446,119 @@
                       <a:noFill/>
                     </a:lnB>
                     <a:solidFill>
+                      <a:schemeClr val="bg2"/>
+                    </a:solidFill>
+                  </a:tcPr>
+                </a:tc>
+                <a:tc>
+                  <a:txBody>
+                    <a:bodyPr/>
+                    <a:lstStyle/>
+                    <a:p>
+                      <a:pPr algn="r" indent="0" marL="0">
+                        <a:buNone/>
+                      </a:pPr>
+                      <a:r>
+                        <a:rPr lang="en-US" sz="1400" dirty="0">
+                          <a:solidFill>
+                            <a:schemeClr val="tx1"/>
+                          </a:solidFill>
+                        </a:rPr>
+                        <a:t>44</a:t>
+                      </a:r>
+                      <a:endParaRPr lang="en-US" sz="1400" dirty="0"/>
+                    </a:p>
+                  </a:txBody>
+                  <a:tcPr marL="91440" marR="91440" marT="45720" marB="45720" anchor="ctr">
+                    <a:lnL w="0" cap="flat" cmpd="sng" algn="ctr">
+                      <a:noFill/>
+                    </a:lnL>
+                    <a:lnR w="0" cap="flat" cmpd="sng" algn="ctr">
+                      <a:noFill/>
+                    </a:lnR>
+                    <a:lnT w="0" cap="flat" cmpd="sng" algn="ctr">
+                      <a:noFill/>
+                    </a:lnT>
+                    <a:lnB w="0" cap="flat" cmpd="sng" algn="ctr">
+                      <a:noFill/>
+                    </a:lnB>
+                    <a:solidFill>
+                      <a:schemeClr val="bg2"/>
+                    </a:solidFill>
+                  </a:tcPr>
+                </a:tc>
+              </a:tr>
+              <a:tr h="310896">
+                <a:tc>
+                  <a:txBody>
+                    <a:bodyPr/>
+                    <a:lstStyle/>
+                    <a:p>
+                      <a:pPr algn="l" indent="0" marL="0">
+                        <a:buNone/>
+                      </a:pPr>
+                      <a:r>
+                        <a:rPr lang="en-US" sz="1400" dirty="0">
+                          <a:solidFill>
+                            <a:schemeClr val="tx1"/>
+                          </a:solidFill>
+                        </a:rPr>
+                        <a:t>de2_115_top</a:t>
+                      </a:r>
+                      <a:endParaRPr lang="en-US" sz="1400" dirty="0"/>
+                    </a:p>
+                  </a:txBody>
+                  <a:tcPr marL="91440" marR="91440" marT="45720" marB="45720" anchor="ctr">
+                    <a:lnL w="0" cap="flat" cmpd="sng" algn="ctr">
+                      <a:noFill/>
+                    </a:lnL>
+                    <a:lnR w="0" cap="flat" cmpd="sng" algn="ctr">
+                      <a:noFill/>
+                    </a:lnR>
+                    <a:lnT w="0" cap="flat" cmpd="sng" algn="ctr">
+                      <a:noFill/>
+                    </a:lnT>
+                    <a:lnB w="0" cap="flat" cmpd="sng" algn="ctr">
+                      <a:noFill/>
+                    </a:lnB>
+                    <a:solidFill>
+                      <a:schemeClr val="bg1"/>
+                    </a:solidFill>
+                  </a:tcPr>
+                </a:tc>
+                <a:tc>
+                  <a:txBody>
+                    <a:bodyPr/>
+                    <a:lstStyle/>
+                    <a:p>
+                      <a:pPr algn="l" indent="0" marL="0">
+                        <a:buNone/>
+                      </a:pPr>
+                      <a:r>
+                        <a:rPr lang="en-US" sz="1400" dirty="0">
+                          <a:solidFill>
+                            <a:schemeClr val="tx1"/>
+                          </a:solidFill>
+                        </a:rPr>
+                        <a:t>Board wrapper: keys, LEDs, UART</a:t>
+                      </a:r>
+                      <a:endParaRPr lang="en-US" sz="1400" dirty="0"/>
+                    </a:p>
+                  </a:txBody>
+                  <a:tcPr marL="91440" marR="91440" marT="45720" marB="45720" anchor="ctr">
+                    <a:lnL w="0" cap="flat" cmpd="sng" algn="ctr">
+                      <a:noFill/>
+                    </a:lnL>
+                    <a:lnR w="0" cap="flat" cmpd="sng" algn="ctr">
+                      <a:noFill/>
+                    </a:lnR>
+                    <a:lnT w="0" cap="flat" cmpd="sng" algn="ctr">
+                      <a:noFill/>
+                    </a:lnT>
+                    <a:lnB w="0" cap="flat" cmpd="sng" algn="ctr">
+                      <a:noFill/>
+                    </a:lnB>
+                    <a:solidFill>
                       <a:schemeClr val="bg1"/>
                     </a:solidFill>
                   </a:tcPr>
@@ -15351,7 +15577,7 @@
                             <a:schemeClr val="tx1"/>
                           </a:solidFill>
                         </a:rPr>
-                        <a:t>44</a:t>
+                        <a:t>18</a:t>
                       </a:r>
                       <a:endParaRPr lang="en-US" sz="1400" dirty="0"/>
                     </a:p>

--- a/docs/tactile_reflex_system.pptx
+++ b/docs/tactile_reflex_system.pptx
@@ -10582,7 +10582,7 @@
                   <a:schemeClr val="accent1"/>
                 </a:solidFill>
               </a:rPr>
-              <a:t>6.6 us</a:t>
+              <a:t>11 us</a:t>
             </a:r>
             <a:endParaRPr lang="en-US" sz="3200" dirty="0"/>
           </a:p>
@@ -10618,7 +10618,7 @@
                   <a:schemeClr val="tx1"/>
                 </a:solidFill>
               </a:rPr>
-              <a:t>median T_ML per decision (p99 22.9 us), measured on the development host</a:t>
+              <a:t>median T_ML per decision (p99 45 us; 6.6 to 11 us across runs), development host</a:t>
             </a:r>
             <a:endParaRPr lang="en-US" sz="1400" dirty="0"/>
           </a:p>
@@ -13188,7 +13188,7 @@
                   <a:schemeClr val="tx1"/>
                 </a:solidFill>
               </a:rPr>
-              <a:t>6.6 us</a:t>
+              <a:t>11 us</a:t>
             </a:r>
             <a:endParaRPr lang="en-US" sz="2800" dirty="0"/>
           </a:p>
@@ -16775,7 +16775,7 @@
                   <a:schemeClr val="tx1"/>
                 </a:solidFill>
               </a:rPr>
-              <a:t>Class 0 to 3 in about 7 us</a:t>
+              <a:t>Class 0 to 3 in about 10 us</a:t>
             </a:r>
             <a:endParaRPr lang="en-US" sz="1200" dirty="0"/>
           </a:p>
